--- a/docs/Report.pptx
+++ b/docs/Report.pptx
@@ -245,7 +245,7 @@
           <a:p>
             <a:fld id="{643FB994-8C7A-432F-9145-2B89982E5304}" type="datetimeFigureOut">
               <a:rPr lang="zh-TW" altLang="en-US" smtClean="0"/>
-              <a:t>2026/4/30</a:t>
+              <a:t>2026/5/4</a:t>
             </a:fld>
             <a:endParaRPr lang="zh-TW" altLang="en-US"/>
           </a:p>
@@ -415,7 +415,7 @@
           <a:p>
             <a:fld id="{643FB994-8C7A-432F-9145-2B89982E5304}" type="datetimeFigureOut">
               <a:rPr lang="zh-TW" altLang="en-US" smtClean="0"/>
-              <a:t>2026/4/30</a:t>
+              <a:t>2026/5/4</a:t>
             </a:fld>
             <a:endParaRPr lang="zh-TW" altLang="en-US"/>
           </a:p>
@@ -595,7 +595,7 @@
           <a:p>
             <a:fld id="{643FB994-8C7A-432F-9145-2B89982E5304}" type="datetimeFigureOut">
               <a:rPr lang="zh-TW" altLang="en-US" smtClean="0"/>
-              <a:t>2026/4/30</a:t>
+              <a:t>2026/5/4</a:t>
             </a:fld>
             <a:endParaRPr lang="zh-TW" altLang="en-US"/>
           </a:p>
@@ -765,7 +765,7 @@
           <a:p>
             <a:fld id="{643FB994-8C7A-432F-9145-2B89982E5304}" type="datetimeFigureOut">
               <a:rPr lang="zh-TW" altLang="en-US" smtClean="0"/>
-              <a:t>2026/4/30</a:t>
+              <a:t>2026/5/4</a:t>
             </a:fld>
             <a:endParaRPr lang="zh-TW" altLang="en-US"/>
           </a:p>
@@ -1011,7 +1011,7 @@
           <a:p>
             <a:fld id="{643FB994-8C7A-432F-9145-2B89982E5304}" type="datetimeFigureOut">
               <a:rPr lang="zh-TW" altLang="en-US" smtClean="0"/>
-              <a:t>2026/4/30</a:t>
+              <a:t>2026/5/4</a:t>
             </a:fld>
             <a:endParaRPr lang="zh-TW" altLang="en-US"/>
           </a:p>
@@ -1243,7 +1243,7 @@
           <a:p>
             <a:fld id="{643FB994-8C7A-432F-9145-2B89982E5304}" type="datetimeFigureOut">
               <a:rPr lang="zh-TW" altLang="en-US" smtClean="0"/>
-              <a:t>2026/4/30</a:t>
+              <a:t>2026/5/4</a:t>
             </a:fld>
             <a:endParaRPr lang="zh-TW" altLang="en-US"/>
           </a:p>
@@ -1610,7 +1610,7 @@
           <a:p>
             <a:fld id="{643FB994-8C7A-432F-9145-2B89982E5304}" type="datetimeFigureOut">
               <a:rPr lang="zh-TW" altLang="en-US" smtClean="0"/>
-              <a:t>2026/4/30</a:t>
+              <a:t>2026/5/4</a:t>
             </a:fld>
             <a:endParaRPr lang="zh-TW" altLang="en-US"/>
           </a:p>
@@ -1728,7 +1728,7 @@
           <a:p>
             <a:fld id="{643FB994-8C7A-432F-9145-2B89982E5304}" type="datetimeFigureOut">
               <a:rPr lang="zh-TW" altLang="en-US" smtClean="0"/>
-              <a:t>2026/4/30</a:t>
+              <a:t>2026/5/4</a:t>
             </a:fld>
             <a:endParaRPr lang="zh-TW" altLang="en-US"/>
           </a:p>
@@ -1823,7 +1823,7 @@
           <a:p>
             <a:fld id="{643FB994-8C7A-432F-9145-2B89982E5304}" type="datetimeFigureOut">
               <a:rPr lang="zh-TW" altLang="en-US" smtClean="0"/>
-              <a:t>2026/4/30</a:t>
+              <a:t>2026/5/4</a:t>
             </a:fld>
             <a:endParaRPr lang="zh-TW" altLang="en-US"/>
           </a:p>
@@ -2100,7 +2100,7 @@
           <a:p>
             <a:fld id="{643FB994-8C7A-432F-9145-2B89982E5304}" type="datetimeFigureOut">
               <a:rPr lang="zh-TW" altLang="en-US" smtClean="0"/>
-              <a:t>2026/4/30</a:t>
+              <a:t>2026/5/4</a:t>
             </a:fld>
             <a:endParaRPr lang="zh-TW" altLang="en-US"/>
           </a:p>
@@ -2357,7 +2357,7 @@
           <a:p>
             <a:fld id="{643FB994-8C7A-432F-9145-2B89982E5304}" type="datetimeFigureOut">
               <a:rPr lang="zh-TW" altLang="en-US" smtClean="0"/>
-              <a:t>2026/4/30</a:t>
+              <a:t>2026/5/4</a:t>
             </a:fld>
             <a:endParaRPr lang="zh-TW" altLang="en-US"/>
           </a:p>
@@ -2570,7 +2570,7 @@
           <a:p>
             <a:fld id="{643FB994-8C7A-432F-9145-2B89982E5304}" type="datetimeFigureOut">
               <a:rPr lang="zh-TW" altLang="en-US" smtClean="0"/>
-              <a:t>2026/4/30</a:t>
+              <a:t>2026/5/4</a:t>
             </a:fld>
             <a:endParaRPr lang="zh-TW" altLang="en-US"/>
           </a:p>
@@ -3291,6 +3291,12 @@
             <a:chOff x="928685" y="9572625"/>
             <a:chExt cx="6972301" cy="4450556"/>
           </a:xfrm>
+          <a:solidFill>
+            <a:schemeClr val="accent6">
+              <a:lumMod val="20000"/>
+              <a:lumOff val="80000"/>
+            </a:schemeClr>
+          </a:solidFill>
         </p:grpSpPr>
         <p:sp>
           <p:nvSpPr>
@@ -3312,7 +3318,7 @@
             <a:prstGeom prst="roundRect">
               <a:avLst/>
             </a:prstGeom>
-            <a:noFill/>
+            <a:grpFill/>
             <a:ln>
               <a:solidFill>
                 <a:srgbClr val="C00000"/>
@@ -3375,7 +3381,7 @@
               <a:pPr algn="ctr"/>
               <a:r>
                 <a:rPr lang="en-US" altLang="zh-TW" sz="3400" b="1" dirty="0"/>
-                <a:t>UAV-to-UAV Probe</a:t>
+                <a:t>UAV-to-LEO Uplink</a:t>
               </a:r>
               <a:endParaRPr lang="zh-TW" altLang="en-US" sz="3400" b="1" dirty="0"/>
             </a:p>
@@ -3401,6 +3407,12 @@
             <a:chOff x="928685" y="9572625"/>
             <a:chExt cx="6972301" cy="4450556"/>
           </a:xfrm>
+          <a:solidFill>
+            <a:schemeClr val="accent4">
+              <a:lumMod val="20000"/>
+              <a:lumOff val="80000"/>
+            </a:schemeClr>
+          </a:solidFill>
         </p:grpSpPr>
         <p:sp>
           <p:nvSpPr>
@@ -3422,7 +3434,7 @@
             <a:prstGeom prst="roundRect">
               <a:avLst/>
             </a:prstGeom>
-            <a:noFill/>
+            <a:grpFill/>
             <a:ln>
               <a:solidFill>
                 <a:srgbClr val="C00000"/>
@@ -3532,7 +3544,12 @@
             <a:prstGeom prst="roundRect">
               <a:avLst/>
             </a:prstGeom>
-            <a:noFill/>
+            <a:solidFill>
+              <a:schemeClr val="accent5">
+                <a:lumMod val="20000"/>
+                <a:lumOff val="80000"/>
+              </a:schemeClr>
+            </a:solidFill>
             <a:ln>
               <a:solidFill>
                 <a:srgbClr val="C00000"/>
@@ -3595,7 +3612,7 @@
               <a:pPr algn="ctr"/>
               <a:r>
                 <a:rPr lang="en-US" altLang="zh-TW" sz="3400" b="1" dirty="0"/>
-                <a:t>UAV-to-LEO Uplink</a:t>
+                <a:t>UAV-to-UAV Probe</a:t>
               </a:r>
               <a:endParaRPr lang="zh-TW" altLang="en-US" sz="3400" b="1" dirty="0"/>
             </a:p>
@@ -3616,7 +3633,7 @@
         </p:nvGrpSpPr>
         <p:grpSpPr>
           <a:xfrm>
-            <a:off x="14461155" y="8919777"/>
+            <a:off x="14437517" y="8973543"/>
             <a:ext cx="6407943" cy="15006279"/>
             <a:chOff x="928686" y="9572625"/>
             <a:chExt cx="6972300" cy="4450556"/>
@@ -3720,12 +3737,4496 @@
           </p:txBody>
         </p:sp>
       </p:grpSp>
+      <p:grpSp>
+        <p:nvGrpSpPr>
+          <p:cNvPr id="73" name="群組 72">
+            <a:extLst>
+              <a:ext uri="{FF2B5EF4-FFF2-40B4-BE49-F238E27FC236}">
+                <a16:creationId xmlns:a16="http://schemas.microsoft.com/office/drawing/2014/main" id="{F4D66267-415A-FAB0-CFE3-940B29F0CA11}"/>
+              </a:ext>
+            </a:extLst>
+          </p:cNvPr>
+          <p:cNvGrpSpPr/>
+          <p:nvPr/>
+        </p:nvGrpSpPr>
+        <p:grpSpPr>
+          <a:xfrm>
+            <a:off x="15181778" y="10797931"/>
+            <a:ext cx="2335001" cy="3105962"/>
+            <a:chOff x="15208856" y="10797931"/>
+            <a:chExt cx="2335001" cy="3105962"/>
+          </a:xfrm>
+        </p:grpSpPr>
+        <p:grpSp>
+          <p:nvGrpSpPr>
+            <p:cNvPr id="66" name="群組 65">
+              <a:extLst>
+                <a:ext uri="{FF2B5EF4-FFF2-40B4-BE49-F238E27FC236}">
+                  <a16:creationId xmlns:a16="http://schemas.microsoft.com/office/drawing/2014/main" id="{760E2B63-0C8D-8092-CF7E-1868B9D44E8C}"/>
+                </a:ext>
+              </a:extLst>
+            </p:cNvPr>
+            <p:cNvGrpSpPr/>
+            <p:nvPr/>
+          </p:nvGrpSpPr>
+          <p:grpSpPr>
+            <a:xfrm>
+              <a:off x="15298778" y="10797931"/>
+              <a:ext cx="2245079" cy="3105962"/>
+              <a:chOff x="15237042" y="10392350"/>
+              <a:chExt cx="2245079" cy="3105962"/>
+            </a:xfrm>
+          </p:grpSpPr>
+          <p:pic>
+            <p:nvPicPr>
+              <p:cNvPr id="2" name="Google Shape;107;g3d00297c732_0_7" title="LEO.png">
+                <a:extLst>
+                  <a:ext uri="{FF2B5EF4-FFF2-40B4-BE49-F238E27FC236}">
+                    <a16:creationId xmlns:a16="http://schemas.microsoft.com/office/drawing/2014/main" id="{5019390A-A784-A1E7-8464-3C34F5828589}"/>
+                  </a:ext>
+                </a:extLst>
+              </p:cNvPr>
+              <p:cNvPicPr preferRelativeResize="0"/>
+              <p:nvPr/>
+            </p:nvPicPr>
+            <p:blipFill rotWithShape="1">
+              <a:blip r:embed="rId3">
+                <a:alphaModFix/>
+              </a:blip>
+              <a:srcRect/>
+              <a:stretch/>
+            </p:blipFill>
+            <p:spPr>
+              <a:xfrm>
+                <a:off x="16410024" y="10392350"/>
+                <a:ext cx="469662" cy="503828"/>
+              </a:xfrm>
+              <a:prstGeom prst="rect">
+                <a:avLst/>
+              </a:prstGeom>
+              <a:noFill/>
+              <a:ln>
+                <a:noFill/>
+              </a:ln>
+            </p:spPr>
+          </p:pic>
+          <p:grpSp>
+            <p:nvGrpSpPr>
+              <p:cNvPr id="55" name="群組 54">
+                <a:extLst>
+                  <a:ext uri="{FF2B5EF4-FFF2-40B4-BE49-F238E27FC236}">
+                    <a16:creationId xmlns:a16="http://schemas.microsoft.com/office/drawing/2014/main" id="{3F0A6F22-3D60-2051-AE52-515CA91F1FF7}"/>
+                  </a:ext>
+                </a:extLst>
+              </p:cNvPr>
+              <p:cNvGrpSpPr/>
+              <p:nvPr/>
+            </p:nvGrpSpPr>
+            <p:grpSpPr>
+              <a:xfrm>
+                <a:off x="15237042" y="12333702"/>
+                <a:ext cx="2245079" cy="1164610"/>
+                <a:chOff x="15377373" y="12057214"/>
+                <a:chExt cx="2245079" cy="1164610"/>
+              </a:xfrm>
+            </p:grpSpPr>
+            <p:pic>
+              <p:nvPicPr>
+                <p:cNvPr id="8" name="Google Shape;104;g3d00297c732_0_7" title="sensor.png">
+                  <a:extLst>
+                    <a:ext uri="{FF2B5EF4-FFF2-40B4-BE49-F238E27FC236}">
+                      <a16:creationId xmlns:a16="http://schemas.microsoft.com/office/drawing/2014/main" id="{7328CA3D-2F5C-E88B-4BCD-5F8E98E7AD7E}"/>
+                    </a:ext>
+                  </a:extLst>
+                </p:cNvPr>
+                <p:cNvPicPr preferRelativeResize="0"/>
+                <p:nvPr/>
+              </p:nvPicPr>
+              <p:blipFill rotWithShape="1">
+                <a:blip r:embed="rId4">
+                  <a:alphaModFix/>
+                </a:blip>
+                <a:srcRect/>
+                <a:stretch/>
+              </p:blipFill>
+              <p:spPr>
+                <a:xfrm>
+                  <a:off x="15377373" y="12486453"/>
+                  <a:ext cx="383400" cy="383400"/>
+                </a:xfrm>
+                <a:prstGeom prst="rect">
+                  <a:avLst/>
+                </a:prstGeom>
+                <a:noFill/>
+                <a:ln>
+                  <a:noFill/>
+                </a:ln>
+              </p:spPr>
+            </p:pic>
+            <p:grpSp>
+              <p:nvGrpSpPr>
+                <p:cNvPr id="51" name="群組 50">
+                  <a:extLst>
+                    <a:ext uri="{FF2B5EF4-FFF2-40B4-BE49-F238E27FC236}">
+                      <a16:creationId xmlns:a16="http://schemas.microsoft.com/office/drawing/2014/main" id="{2537AEE2-4EDC-D75B-6991-49DF2A77458C}"/>
+                    </a:ext>
+                  </a:extLst>
+                </p:cNvPr>
+                <p:cNvGrpSpPr/>
+                <p:nvPr/>
+              </p:nvGrpSpPr>
+              <p:grpSpPr>
+                <a:xfrm>
+                  <a:off x="15588374" y="12057214"/>
+                  <a:ext cx="2034078" cy="1164610"/>
+                  <a:chOff x="15588374" y="12057214"/>
+                  <a:chExt cx="2034078" cy="1164610"/>
+                </a:xfrm>
+              </p:grpSpPr>
+              <p:pic>
+                <p:nvPicPr>
+                  <p:cNvPr id="14" name="Google Shape;104;g3d00297c732_0_7" title="sensor.png">
+                    <a:extLst>
+                      <a:ext uri="{FF2B5EF4-FFF2-40B4-BE49-F238E27FC236}">
+                        <a16:creationId xmlns:a16="http://schemas.microsoft.com/office/drawing/2014/main" id="{D5A98E16-2804-8F6E-0A5C-52F2DF44AB4E}"/>
+                      </a:ext>
+                    </a:extLst>
+                  </p:cNvPr>
+                  <p:cNvPicPr preferRelativeResize="0"/>
+                  <p:nvPr/>
+                </p:nvPicPr>
+                <p:blipFill rotWithShape="1">
+                  <a:blip r:embed="rId4">
+                    <a:alphaModFix/>
+                  </a:blip>
+                  <a:srcRect/>
+                  <a:stretch/>
+                </p:blipFill>
+                <p:spPr>
+                  <a:xfrm>
+                    <a:off x="15727874" y="12830692"/>
+                    <a:ext cx="383400" cy="383400"/>
+                  </a:xfrm>
+                  <a:prstGeom prst="rect">
+                    <a:avLst/>
+                  </a:prstGeom>
+                  <a:noFill/>
+                  <a:ln>
+                    <a:noFill/>
+                  </a:ln>
+                </p:spPr>
+              </p:pic>
+              <p:pic>
+                <p:nvPicPr>
+                  <p:cNvPr id="15" name="Google Shape;104;g3d00297c732_0_7" title="sensor.png">
+                    <a:extLst>
+                      <a:ext uri="{FF2B5EF4-FFF2-40B4-BE49-F238E27FC236}">
+                        <a16:creationId xmlns:a16="http://schemas.microsoft.com/office/drawing/2014/main" id="{82A21E45-2812-F2AB-323C-2F629AADA327}"/>
+                      </a:ext>
+                    </a:extLst>
+                  </p:cNvPr>
+                  <p:cNvPicPr preferRelativeResize="0"/>
+                  <p:nvPr/>
+                </p:nvPicPr>
+                <p:blipFill rotWithShape="1">
+                  <a:blip r:embed="rId4">
+                    <a:alphaModFix/>
+                  </a:blip>
+                  <a:srcRect/>
+                  <a:stretch/>
+                </p:blipFill>
+                <p:spPr>
+                  <a:xfrm>
+                    <a:off x="16083306" y="12653616"/>
+                    <a:ext cx="383400" cy="383400"/>
+                  </a:xfrm>
+                  <a:prstGeom prst="rect">
+                    <a:avLst/>
+                  </a:prstGeom>
+                  <a:noFill/>
+                  <a:ln>
+                    <a:noFill/>
+                  </a:ln>
+                </p:spPr>
+              </p:pic>
+              <p:sp>
+                <p:nvSpPr>
+                  <p:cNvPr id="21" name="Google Shape;109;g3d00297c732_0_7">
+                    <a:extLst>
+                      <a:ext uri="{FF2B5EF4-FFF2-40B4-BE49-F238E27FC236}">
+                        <a16:creationId xmlns:a16="http://schemas.microsoft.com/office/drawing/2014/main" id="{E95FE36E-FBCB-F4AB-8392-D9F48B85FC72}"/>
+                      </a:ext>
+                    </a:extLst>
+                  </p:cNvPr>
+                  <p:cNvSpPr/>
+                  <p:nvPr/>
+                </p:nvSpPr>
+                <p:spPr>
+                  <a:xfrm rot="17598187">
+                    <a:off x="15492974" y="12160468"/>
+                    <a:ext cx="312000" cy="121200"/>
+                  </a:xfrm>
+                  <a:prstGeom prst="rightArrow">
+                    <a:avLst>
+                      <a:gd name="adj1" fmla="val 50000"/>
+                      <a:gd name="adj2" fmla="val 50000"/>
+                    </a:avLst>
+                  </a:prstGeom>
+                  <a:solidFill>
+                    <a:schemeClr val="lt2"/>
+                  </a:solidFill>
+                  <a:ln w="9525" cap="flat" cmpd="sng">
+                    <a:solidFill>
+                      <a:schemeClr val="dk2"/>
+                    </a:solidFill>
+                    <a:prstDash val="solid"/>
+                    <a:round/>
+                    <a:headEnd type="none" w="sm" len="sm"/>
+                    <a:tailEnd type="none" w="sm" len="sm"/>
+                  </a:ln>
+                </p:spPr>
+                <p:txBody>
+                  <a:bodyPr spcFirstLastPara="1" wrap="square" lIns="91425" tIns="91425" rIns="91425" bIns="91425" anchor="ctr" anchorCtr="0">
+                    <a:noAutofit/>
+                  </a:bodyPr>
+                  <a:lstStyle>
+                    <a:defPPr marR="0" lvl="0" algn="l" rtl="0">
+                      <a:lnSpc>
+                        <a:spcPct val="100000"/>
+                      </a:lnSpc>
+                      <a:spcBef>
+                        <a:spcPts val="0"/>
+                      </a:spcBef>
+                      <a:spcAft>
+                        <a:spcPts val="0"/>
+                      </a:spcAft>
+                    </a:defPPr>
+                    <a:lvl1pPr marR="0" lvl="0" algn="l" rtl="0">
+                      <a:lnSpc>
+                        <a:spcPct val="100000"/>
+                      </a:lnSpc>
+                      <a:spcBef>
+                        <a:spcPts val="0"/>
+                      </a:spcBef>
+                      <a:spcAft>
+                        <a:spcPts val="0"/>
+                      </a:spcAft>
+                      <a:buClr>
+                        <a:srgbClr val="000000"/>
+                      </a:buClr>
+                      <a:buFont typeface="Arial"/>
+                      <a:defRPr sz="1400" b="0" i="0" u="none" strike="noStrike" cap="none">
+                        <a:solidFill>
+                          <a:srgbClr val="000000"/>
+                        </a:solidFill>
+                        <a:latin typeface="Arial"/>
+                        <a:ea typeface="Arial"/>
+                        <a:cs typeface="Arial"/>
+                        <a:sym typeface="Arial"/>
+                      </a:defRPr>
+                    </a:lvl1pPr>
+                    <a:lvl2pPr marR="0" lvl="1" algn="l" rtl="0">
+                      <a:lnSpc>
+                        <a:spcPct val="100000"/>
+                      </a:lnSpc>
+                      <a:spcBef>
+                        <a:spcPts val="0"/>
+                      </a:spcBef>
+                      <a:spcAft>
+                        <a:spcPts val="0"/>
+                      </a:spcAft>
+                      <a:buClr>
+                        <a:srgbClr val="000000"/>
+                      </a:buClr>
+                      <a:buFont typeface="Arial"/>
+                      <a:defRPr sz="1400" b="0" i="0" u="none" strike="noStrike" cap="none">
+                        <a:solidFill>
+                          <a:srgbClr val="000000"/>
+                        </a:solidFill>
+                        <a:latin typeface="Arial"/>
+                        <a:ea typeface="Arial"/>
+                        <a:cs typeface="Arial"/>
+                        <a:sym typeface="Arial"/>
+                      </a:defRPr>
+                    </a:lvl2pPr>
+                    <a:lvl3pPr marR="0" lvl="2" algn="l" rtl="0">
+                      <a:lnSpc>
+                        <a:spcPct val="100000"/>
+                      </a:lnSpc>
+                      <a:spcBef>
+                        <a:spcPts val="0"/>
+                      </a:spcBef>
+                      <a:spcAft>
+                        <a:spcPts val="0"/>
+                      </a:spcAft>
+                      <a:buClr>
+                        <a:srgbClr val="000000"/>
+                      </a:buClr>
+                      <a:buFont typeface="Arial"/>
+                      <a:defRPr sz="1400" b="0" i="0" u="none" strike="noStrike" cap="none">
+                        <a:solidFill>
+                          <a:srgbClr val="000000"/>
+                        </a:solidFill>
+                        <a:latin typeface="Arial"/>
+                        <a:ea typeface="Arial"/>
+                        <a:cs typeface="Arial"/>
+                        <a:sym typeface="Arial"/>
+                      </a:defRPr>
+                    </a:lvl3pPr>
+                    <a:lvl4pPr marR="0" lvl="3" algn="l" rtl="0">
+                      <a:lnSpc>
+                        <a:spcPct val="100000"/>
+                      </a:lnSpc>
+                      <a:spcBef>
+                        <a:spcPts val="0"/>
+                      </a:spcBef>
+                      <a:spcAft>
+                        <a:spcPts val="0"/>
+                      </a:spcAft>
+                      <a:buClr>
+                        <a:srgbClr val="000000"/>
+                      </a:buClr>
+                      <a:buFont typeface="Arial"/>
+                      <a:defRPr sz="1400" b="0" i="0" u="none" strike="noStrike" cap="none">
+                        <a:solidFill>
+                          <a:srgbClr val="000000"/>
+                        </a:solidFill>
+                        <a:latin typeface="Arial"/>
+                        <a:ea typeface="Arial"/>
+                        <a:cs typeface="Arial"/>
+                        <a:sym typeface="Arial"/>
+                      </a:defRPr>
+                    </a:lvl4pPr>
+                    <a:lvl5pPr marR="0" lvl="4" algn="l" rtl="0">
+                      <a:lnSpc>
+                        <a:spcPct val="100000"/>
+                      </a:lnSpc>
+                      <a:spcBef>
+                        <a:spcPts val="0"/>
+                      </a:spcBef>
+                      <a:spcAft>
+                        <a:spcPts val="0"/>
+                      </a:spcAft>
+                      <a:buClr>
+                        <a:srgbClr val="000000"/>
+                      </a:buClr>
+                      <a:buFont typeface="Arial"/>
+                      <a:defRPr sz="1400" b="0" i="0" u="none" strike="noStrike" cap="none">
+                        <a:solidFill>
+                          <a:srgbClr val="000000"/>
+                        </a:solidFill>
+                        <a:latin typeface="Arial"/>
+                        <a:ea typeface="Arial"/>
+                        <a:cs typeface="Arial"/>
+                        <a:sym typeface="Arial"/>
+                      </a:defRPr>
+                    </a:lvl5pPr>
+                    <a:lvl6pPr marR="0" lvl="5" algn="l" rtl="0">
+                      <a:lnSpc>
+                        <a:spcPct val="100000"/>
+                      </a:lnSpc>
+                      <a:spcBef>
+                        <a:spcPts val="0"/>
+                      </a:spcBef>
+                      <a:spcAft>
+                        <a:spcPts val="0"/>
+                      </a:spcAft>
+                      <a:buClr>
+                        <a:srgbClr val="000000"/>
+                      </a:buClr>
+                      <a:buFont typeface="Arial"/>
+                      <a:defRPr sz="1400" b="0" i="0" u="none" strike="noStrike" cap="none">
+                        <a:solidFill>
+                          <a:srgbClr val="000000"/>
+                        </a:solidFill>
+                        <a:latin typeface="Arial"/>
+                        <a:ea typeface="Arial"/>
+                        <a:cs typeface="Arial"/>
+                        <a:sym typeface="Arial"/>
+                      </a:defRPr>
+                    </a:lvl6pPr>
+                    <a:lvl7pPr marR="0" lvl="6" algn="l" rtl="0">
+                      <a:lnSpc>
+                        <a:spcPct val="100000"/>
+                      </a:lnSpc>
+                      <a:spcBef>
+                        <a:spcPts val="0"/>
+                      </a:spcBef>
+                      <a:spcAft>
+                        <a:spcPts val="0"/>
+                      </a:spcAft>
+                      <a:buClr>
+                        <a:srgbClr val="000000"/>
+                      </a:buClr>
+                      <a:buFont typeface="Arial"/>
+                      <a:defRPr sz="1400" b="0" i="0" u="none" strike="noStrike" cap="none">
+                        <a:solidFill>
+                          <a:srgbClr val="000000"/>
+                        </a:solidFill>
+                        <a:latin typeface="Arial"/>
+                        <a:ea typeface="Arial"/>
+                        <a:cs typeface="Arial"/>
+                        <a:sym typeface="Arial"/>
+                      </a:defRPr>
+                    </a:lvl7pPr>
+                    <a:lvl8pPr marR="0" lvl="7" algn="l" rtl="0">
+                      <a:lnSpc>
+                        <a:spcPct val="100000"/>
+                      </a:lnSpc>
+                      <a:spcBef>
+                        <a:spcPts val="0"/>
+                      </a:spcBef>
+                      <a:spcAft>
+                        <a:spcPts val="0"/>
+                      </a:spcAft>
+                      <a:buClr>
+                        <a:srgbClr val="000000"/>
+                      </a:buClr>
+                      <a:buFont typeface="Arial"/>
+                      <a:defRPr sz="1400" b="0" i="0" u="none" strike="noStrike" cap="none">
+                        <a:solidFill>
+                          <a:srgbClr val="000000"/>
+                        </a:solidFill>
+                        <a:latin typeface="Arial"/>
+                        <a:ea typeface="Arial"/>
+                        <a:cs typeface="Arial"/>
+                        <a:sym typeface="Arial"/>
+                      </a:defRPr>
+                    </a:lvl8pPr>
+                    <a:lvl9pPr marR="0" lvl="8" algn="l" rtl="0">
+                      <a:lnSpc>
+                        <a:spcPct val="100000"/>
+                      </a:lnSpc>
+                      <a:spcBef>
+                        <a:spcPts val="0"/>
+                      </a:spcBef>
+                      <a:spcAft>
+                        <a:spcPts val="0"/>
+                      </a:spcAft>
+                      <a:buClr>
+                        <a:srgbClr val="000000"/>
+                      </a:buClr>
+                      <a:buFont typeface="Arial"/>
+                      <a:defRPr sz="1400" b="0" i="0" u="none" strike="noStrike" cap="none">
+                        <a:solidFill>
+                          <a:srgbClr val="000000"/>
+                        </a:solidFill>
+                        <a:latin typeface="Arial"/>
+                        <a:ea typeface="Arial"/>
+                        <a:cs typeface="Arial"/>
+                        <a:sym typeface="Arial"/>
+                      </a:defRPr>
+                    </a:lvl9pPr>
+                  </a:lstStyle>
+                  <a:p>
+                    <a:pPr marL="0" marR="0" lvl="0" indent="0" algn="ctr" rtl="0">
+                      <a:lnSpc>
+                        <a:spcPct val="100000"/>
+                      </a:lnSpc>
+                      <a:spcBef>
+                        <a:spcPts val="0"/>
+                      </a:spcBef>
+                      <a:spcAft>
+                        <a:spcPts val="0"/>
+                      </a:spcAft>
+                      <a:buClr>
+                        <a:srgbClr val="000000"/>
+                      </a:buClr>
+                      <a:buSzPts val="1400"/>
+                      <a:buFont typeface="Arial"/>
+                      <a:buNone/>
+                    </a:pPr>
+                    <a:endParaRPr sz="1400" b="0" i="0" u="none" strike="noStrike" cap="none">
+                      <a:solidFill>
+                        <a:srgbClr val="000000"/>
+                      </a:solidFill>
+                      <a:latin typeface="Calibri"/>
+                      <a:ea typeface="Calibri"/>
+                      <a:cs typeface="Calibri"/>
+                      <a:sym typeface="Calibri"/>
+                    </a:endParaRPr>
+                  </a:p>
+                </p:txBody>
+              </p:sp>
+              <p:sp>
+                <p:nvSpPr>
+                  <p:cNvPr id="22" name="Google Shape;109;g3d00297c732_0_7">
+                    <a:extLst>
+                      <a:ext uri="{FF2B5EF4-FFF2-40B4-BE49-F238E27FC236}">
+                        <a16:creationId xmlns:a16="http://schemas.microsoft.com/office/drawing/2014/main" id="{23E6D459-7515-BFA5-A9AC-37127D39E802}"/>
+                      </a:ext>
+                    </a:extLst>
+                  </p:cNvPr>
+                  <p:cNvSpPr/>
+                  <p:nvPr/>
+                </p:nvSpPr>
+                <p:spPr>
+                  <a:xfrm rot="17047058">
+                    <a:off x="15827406" y="12279995"/>
+                    <a:ext cx="312000" cy="121200"/>
+                  </a:xfrm>
+                  <a:prstGeom prst="rightArrow">
+                    <a:avLst>
+                      <a:gd name="adj1" fmla="val 50000"/>
+                      <a:gd name="adj2" fmla="val 50000"/>
+                    </a:avLst>
+                  </a:prstGeom>
+                  <a:solidFill>
+                    <a:schemeClr val="lt2"/>
+                  </a:solidFill>
+                  <a:ln w="9525" cap="flat" cmpd="sng">
+                    <a:solidFill>
+                      <a:schemeClr val="dk2"/>
+                    </a:solidFill>
+                    <a:prstDash val="solid"/>
+                    <a:round/>
+                    <a:headEnd type="none" w="sm" len="sm"/>
+                    <a:tailEnd type="none" w="sm" len="sm"/>
+                  </a:ln>
+                </p:spPr>
+                <p:txBody>
+                  <a:bodyPr spcFirstLastPara="1" wrap="square" lIns="91425" tIns="91425" rIns="91425" bIns="91425" anchor="ctr" anchorCtr="0">
+                    <a:noAutofit/>
+                  </a:bodyPr>
+                  <a:lstStyle>
+                    <a:defPPr marR="0" lvl="0" algn="l" rtl="0">
+                      <a:lnSpc>
+                        <a:spcPct val="100000"/>
+                      </a:lnSpc>
+                      <a:spcBef>
+                        <a:spcPts val="0"/>
+                      </a:spcBef>
+                      <a:spcAft>
+                        <a:spcPts val="0"/>
+                      </a:spcAft>
+                    </a:defPPr>
+                    <a:lvl1pPr marR="0" lvl="0" algn="l" rtl="0">
+                      <a:lnSpc>
+                        <a:spcPct val="100000"/>
+                      </a:lnSpc>
+                      <a:spcBef>
+                        <a:spcPts val="0"/>
+                      </a:spcBef>
+                      <a:spcAft>
+                        <a:spcPts val="0"/>
+                      </a:spcAft>
+                      <a:buClr>
+                        <a:srgbClr val="000000"/>
+                      </a:buClr>
+                      <a:buFont typeface="Arial"/>
+                      <a:defRPr sz="1400" b="0" i="0" u="none" strike="noStrike" cap="none">
+                        <a:solidFill>
+                          <a:srgbClr val="000000"/>
+                        </a:solidFill>
+                        <a:latin typeface="Arial"/>
+                        <a:ea typeface="Arial"/>
+                        <a:cs typeface="Arial"/>
+                        <a:sym typeface="Arial"/>
+                      </a:defRPr>
+                    </a:lvl1pPr>
+                    <a:lvl2pPr marR="0" lvl="1" algn="l" rtl="0">
+                      <a:lnSpc>
+                        <a:spcPct val="100000"/>
+                      </a:lnSpc>
+                      <a:spcBef>
+                        <a:spcPts val="0"/>
+                      </a:spcBef>
+                      <a:spcAft>
+                        <a:spcPts val="0"/>
+                      </a:spcAft>
+                      <a:buClr>
+                        <a:srgbClr val="000000"/>
+                      </a:buClr>
+                      <a:buFont typeface="Arial"/>
+                      <a:defRPr sz="1400" b="0" i="0" u="none" strike="noStrike" cap="none">
+                        <a:solidFill>
+                          <a:srgbClr val="000000"/>
+                        </a:solidFill>
+                        <a:latin typeface="Arial"/>
+                        <a:ea typeface="Arial"/>
+                        <a:cs typeface="Arial"/>
+                        <a:sym typeface="Arial"/>
+                      </a:defRPr>
+                    </a:lvl2pPr>
+                    <a:lvl3pPr marR="0" lvl="2" algn="l" rtl="0">
+                      <a:lnSpc>
+                        <a:spcPct val="100000"/>
+                      </a:lnSpc>
+                      <a:spcBef>
+                        <a:spcPts val="0"/>
+                      </a:spcBef>
+                      <a:spcAft>
+                        <a:spcPts val="0"/>
+                      </a:spcAft>
+                      <a:buClr>
+                        <a:srgbClr val="000000"/>
+                      </a:buClr>
+                      <a:buFont typeface="Arial"/>
+                      <a:defRPr sz="1400" b="0" i="0" u="none" strike="noStrike" cap="none">
+                        <a:solidFill>
+                          <a:srgbClr val="000000"/>
+                        </a:solidFill>
+                        <a:latin typeface="Arial"/>
+                        <a:ea typeface="Arial"/>
+                        <a:cs typeface="Arial"/>
+                        <a:sym typeface="Arial"/>
+                      </a:defRPr>
+                    </a:lvl3pPr>
+                    <a:lvl4pPr marR="0" lvl="3" algn="l" rtl="0">
+                      <a:lnSpc>
+                        <a:spcPct val="100000"/>
+                      </a:lnSpc>
+                      <a:spcBef>
+                        <a:spcPts val="0"/>
+                      </a:spcBef>
+                      <a:spcAft>
+                        <a:spcPts val="0"/>
+                      </a:spcAft>
+                      <a:buClr>
+                        <a:srgbClr val="000000"/>
+                      </a:buClr>
+                      <a:buFont typeface="Arial"/>
+                      <a:defRPr sz="1400" b="0" i="0" u="none" strike="noStrike" cap="none">
+                        <a:solidFill>
+                          <a:srgbClr val="000000"/>
+                        </a:solidFill>
+                        <a:latin typeface="Arial"/>
+                        <a:ea typeface="Arial"/>
+                        <a:cs typeface="Arial"/>
+                        <a:sym typeface="Arial"/>
+                      </a:defRPr>
+                    </a:lvl4pPr>
+                    <a:lvl5pPr marR="0" lvl="4" algn="l" rtl="0">
+                      <a:lnSpc>
+                        <a:spcPct val="100000"/>
+                      </a:lnSpc>
+                      <a:spcBef>
+                        <a:spcPts val="0"/>
+                      </a:spcBef>
+                      <a:spcAft>
+                        <a:spcPts val="0"/>
+                      </a:spcAft>
+                      <a:buClr>
+                        <a:srgbClr val="000000"/>
+                      </a:buClr>
+                      <a:buFont typeface="Arial"/>
+                      <a:defRPr sz="1400" b="0" i="0" u="none" strike="noStrike" cap="none">
+                        <a:solidFill>
+                          <a:srgbClr val="000000"/>
+                        </a:solidFill>
+                        <a:latin typeface="Arial"/>
+                        <a:ea typeface="Arial"/>
+                        <a:cs typeface="Arial"/>
+                        <a:sym typeface="Arial"/>
+                      </a:defRPr>
+                    </a:lvl5pPr>
+                    <a:lvl6pPr marR="0" lvl="5" algn="l" rtl="0">
+                      <a:lnSpc>
+                        <a:spcPct val="100000"/>
+                      </a:lnSpc>
+                      <a:spcBef>
+                        <a:spcPts val="0"/>
+                      </a:spcBef>
+                      <a:spcAft>
+                        <a:spcPts val="0"/>
+                      </a:spcAft>
+                      <a:buClr>
+                        <a:srgbClr val="000000"/>
+                      </a:buClr>
+                      <a:buFont typeface="Arial"/>
+                      <a:defRPr sz="1400" b="0" i="0" u="none" strike="noStrike" cap="none">
+                        <a:solidFill>
+                          <a:srgbClr val="000000"/>
+                        </a:solidFill>
+                        <a:latin typeface="Arial"/>
+                        <a:ea typeface="Arial"/>
+                        <a:cs typeface="Arial"/>
+                        <a:sym typeface="Arial"/>
+                      </a:defRPr>
+                    </a:lvl6pPr>
+                    <a:lvl7pPr marR="0" lvl="6" algn="l" rtl="0">
+                      <a:lnSpc>
+                        <a:spcPct val="100000"/>
+                      </a:lnSpc>
+                      <a:spcBef>
+                        <a:spcPts val="0"/>
+                      </a:spcBef>
+                      <a:spcAft>
+                        <a:spcPts val="0"/>
+                      </a:spcAft>
+                      <a:buClr>
+                        <a:srgbClr val="000000"/>
+                      </a:buClr>
+                      <a:buFont typeface="Arial"/>
+                      <a:defRPr sz="1400" b="0" i="0" u="none" strike="noStrike" cap="none">
+                        <a:solidFill>
+                          <a:srgbClr val="000000"/>
+                        </a:solidFill>
+                        <a:latin typeface="Arial"/>
+                        <a:ea typeface="Arial"/>
+                        <a:cs typeface="Arial"/>
+                        <a:sym typeface="Arial"/>
+                      </a:defRPr>
+                    </a:lvl7pPr>
+                    <a:lvl8pPr marR="0" lvl="7" algn="l" rtl="0">
+                      <a:lnSpc>
+                        <a:spcPct val="100000"/>
+                      </a:lnSpc>
+                      <a:spcBef>
+                        <a:spcPts val="0"/>
+                      </a:spcBef>
+                      <a:spcAft>
+                        <a:spcPts val="0"/>
+                      </a:spcAft>
+                      <a:buClr>
+                        <a:srgbClr val="000000"/>
+                      </a:buClr>
+                      <a:buFont typeface="Arial"/>
+                      <a:defRPr sz="1400" b="0" i="0" u="none" strike="noStrike" cap="none">
+                        <a:solidFill>
+                          <a:srgbClr val="000000"/>
+                        </a:solidFill>
+                        <a:latin typeface="Arial"/>
+                        <a:ea typeface="Arial"/>
+                        <a:cs typeface="Arial"/>
+                        <a:sym typeface="Arial"/>
+                      </a:defRPr>
+                    </a:lvl8pPr>
+                    <a:lvl9pPr marR="0" lvl="8" algn="l" rtl="0">
+                      <a:lnSpc>
+                        <a:spcPct val="100000"/>
+                      </a:lnSpc>
+                      <a:spcBef>
+                        <a:spcPts val="0"/>
+                      </a:spcBef>
+                      <a:spcAft>
+                        <a:spcPts val="0"/>
+                      </a:spcAft>
+                      <a:buClr>
+                        <a:srgbClr val="000000"/>
+                      </a:buClr>
+                      <a:buFont typeface="Arial"/>
+                      <a:defRPr sz="1400" b="0" i="0" u="none" strike="noStrike" cap="none">
+                        <a:solidFill>
+                          <a:srgbClr val="000000"/>
+                        </a:solidFill>
+                        <a:latin typeface="Arial"/>
+                        <a:ea typeface="Arial"/>
+                        <a:cs typeface="Arial"/>
+                        <a:sym typeface="Arial"/>
+                      </a:defRPr>
+                    </a:lvl9pPr>
+                  </a:lstStyle>
+                  <a:p>
+                    <a:pPr marL="0" marR="0" lvl="0" indent="0" algn="ctr" rtl="0">
+                      <a:lnSpc>
+                        <a:spcPct val="100000"/>
+                      </a:lnSpc>
+                      <a:spcBef>
+                        <a:spcPts val="0"/>
+                      </a:spcBef>
+                      <a:spcAft>
+                        <a:spcPts val="0"/>
+                      </a:spcAft>
+                      <a:buClr>
+                        <a:srgbClr val="000000"/>
+                      </a:buClr>
+                      <a:buSzPts val="1400"/>
+                      <a:buFont typeface="Arial"/>
+                      <a:buNone/>
+                    </a:pPr>
+                    <a:endParaRPr sz="1400" b="0" i="0" u="none" strike="noStrike" cap="none">
+                      <a:solidFill>
+                        <a:srgbClr val="000000"/>
+                      </a:solidFill>
+                      <a:latin typeface="Calibri"/>
+                      <a:ea typeface="Calibri"/>
+                      <a:cs typeface="Calibri"/>
+                      <a:sym typeface="Calibri"/>
+                    </a:endParaRPr>
+                  </a:p>
+                </p:txBody>
+              </p:sp>
+              <p:sp>
+                <p:nvSpPr>
+                  <p:cNvPr id="23" name="Google Shape;109;g3d00297c732_0_7">
+                    <a:extLst>
+                      <a:ext uri="{FF2B5EF4-FFF2-40B4-BE49-F238E27FC236}">
+                        <a16:creationId xmlns:a16="http://schemas.microsoft.com/office/drawing/2014/main" id="{3E2E710C-1C37-64E9-22BE-7A71550A79C0}"/>
+                      </a:ext>
+                    </a:extLst>
+                  </p:cNvPr>
+                  <p:cNvSpPr/>
+                  <p:nvPr/>
+                </p:nvSpPr>
+                <p:spPr>
+                  <a:xfrm rot="16621355">
+                    <a:off x="16158817" y="12283337"/>
+                    <a:ext cx="312000" cy="121200"/>
+                  </a:xfrm>
+                  <a:prstGeom prst="rightArrow">
+                    <a:avLst>
+                      <a:gd name="adj1" fmla="val 50000"/>
+                      <a:gd name="adj2" fmla="val 50000"/>
+                    </a:avLst>
+                  </a:prstGeom>
+                  <a:solidFill>
+                    <a:schemeClr val="lt2"/>
+                  </a:solidFill>
+                  <a:ln w="9525" cap="flat" cmpd="sng">
+                    <a:solidFill>
+                      <a:schemeClr val="dk2"/>
+                    </a:solidFill>
+                    <a:prstDash val="solid"/>
+                    <a:round/>
+                    <a:headEnd type="none" w="sm" len="sm"/>
+                    <a:tailEnd type="none" w="sm" len="sm"/>
+                  </a:ln>
+                </p:spPr>
+                <p:txBody>
+                  <a:bodyPr spcFirstLastPara="1" wrap="square" lIns="91425" tIns="91425" rIns="91425" bIns="91425" anchor="ctr" anchorCtr="0">
+                    <a:noAutofit/>
+                  </a:bodyPr>
+                  <a:lstStyle>
+                    <a:defPPr marR="0" lvl="0" algn="l" rtl="0">
+                      <a:lnSpc>
+                        <a:spcPct val="100000"/>
+                      </a:lnSpc>
+                      <a:spcBef>
+                        <a:spcPts val="0"/>
+                      </a:spcBef>
+                      <a:spcAft>
+                        <a:spcPts val="0"/>
+                      </a:spcAft>
+                    </a:defPPr>
+                    <a:lvl1pPr marR="0" lvl="0" algn="l" rtl="0">
+                      <a:lnSpc>
+                        <a:spcPct val="100000"/>
+                      </a:lnSpc>
+                      <a:spcBef>
+                        <a:spcPts val="0"/>
+                      </a:spcBef>
+                      <a:spcAft>
+                        <a:spcPts val="0"/>
+                      </a:spcAft>
+                      <a:buClr>
+                        <a:srgbClr val="000000"/>
+                      </a:buClr>
+                      <a:buFont typeface="Arial"/>
+                      <a:defRPr sz="1400" b="0" i="0" u="none" strike="noStrike" cap="none">
+                        <a:solidFill>
+                          <a:srgbClr val="000000"/>
+                        </a:solidFill>
+                        <a:latin typeface="Arial"/>
+                        <a:ea typeface="Arial"/>
+                        <a:cs typeface="Arial"/>
+                        <a:sym typeface="Arial"/>
+                      </a:defRPr>
+                    </a:lvl1pPr>
+                    <a:lvl2pPr marR="0" lvl="1" algn="l" rtl="0">
+                      <a:lnSpc>
+                        <a:spcPct val="100000"/>
+                      </a:lnSpc>
+                      <a:spcBef>
+                        <a:spcPts val="0"/>
+                      </a:spcBef>
+                      <a:spcAft>
+                        <a:spcPts val="0"/>
+                      </a:spcAft>
+                      <a:buClr>
+                        <a:srgbClr val="000000"/>
+                      </a:buClr>
+                      <a:buFont typeface="Arial"/>
+                      <a:defRPr sz="1400" b="0" i="0" u="none" strike="noStrike" cap="none">
+                        <a:solidFill>
+                          <a:srgbClr val="000000"/>
+                        </a:solidFill>
+                        <a:latin typeface="Arial"/>
+                        <a:ea typeface="Arial"/>
+                        <a:cs typeface="Arial"/>
+                        <a:sym typeface="Arial"/>
+                      </a:defRPr>
+                    </a:lvl2pPr>
+                    <a:lvl3pPr marR="0" lvl="2" algn="l" rtl="0">
+                      <a:lnSpc>
+                        <a:spcPct val="100000"/>
+                      </a:lnSpc>
+                      <a:spcBef>
+                        <a:spcPts val="0"/>
+                      </a:spcBef>
+                      <a:spcAft>
+                        <a:spcPts val="0"/>
+                      </a:spcAft>
+                      <a:buClr>
+                        <a:srgbClr val="000000"/>
+                      </a:buClr>
+                      <a:buFont typeface="Arial"/>
+                      <a:defRPr sz="1400" b="0" i="0" u="none" strike="noStrike" cap="none">
+                        <a:solidFill>
+                          <a:srgbClr val="000000"/>
+                        </a:solidFill>
+                        <a:latin typeface="Arial"/>
+                        <a:ea typeface="Arial"/>
+                        <a:cs typeface="Arial"/>
+                        <a:sym typeface="Arial"/>
+                      </a:defRPr>
+                    </a:lvl3pPr>
+                    <a:lvl4pPr marR="0" lvl="3" algn="l" rtl="0">
+                      <a:lnSpc>
+                        <a:spcPct val="100000"/>
+                      </a:lnSpc>
+                      <a:spcBef>
+                        <a:spcPts val="0"/>
+                      </a:spcBef>
+                      <a:spcAft>
+                        <a:spcPts val="0"/>
+                      </a:spcAft>
+                      <a:buClr>
+                        <a:srgbClr val="000000"/>
+                      </a:buClr>
+                      <a:buFont typeface="Arial"/>
+                      <a:defRPr sz="1400" b="0" i="0" u="none" strike="noStrike" cap="none">
+                        <a:solidFill>
+                          <a:srgbClr val="000000"/>
+                        </a:solidFill>
+                        <a:latin typeface="Arial"/>
+                        <a:ea typeface="Arial"/>
+                        <a:cs typeface="Arial"/>
+                        <a:sym typeface="Arial"/>
+                      </a:defRPr>
+                    </a:lvl4pPr>
+                    <a:lvl5pPr marR="0" lvl="4" algn="l" rtl="0">
+                      <a:lnSpc>
+                        <a:spcPct val="100000"/>
+                      </a:lnSpc>
+                      <a:spcBef>
+                        <a:spcPts val="0"/>
+                      </a:spcBef>
+                      <a:spcAft>
+                        <a:spcPts val="0"/>
+                      </a:spcAft>
+                      <a:buClr>
+                        <a:srgbClr val="000000"/>
+                      </a:buClr>
+                      <a:buFont typeface="Arial"/>
+                      <a:defRPr sz="1400" b="0" i="0" u="none" strike="noStrike" cap="none">
+                        <a:solidFill>
+                          <a:srgbClr val="000000"/>
+                        </a:solidFill>
+                        <a:latin typeface="Arial"/>
+                        <a:ea typeface="Arial"/>
+                        <a:cs typeface="Arial"/>
+                        <a:sym typeface="Arial"/>
+                      </a:defRPr>
+                    </a:lvl5pPr>
+                    <a:lvl6pPr marR="0" lvl="5" algn="l" rtl="0">
+                      <a:lnSpc>
+                        <a:spcPct val="100000"/>
+                      </a:lnSpc>
+                      <a:spcBef>
+                        <a:spcPts val="0"/>
+                      </a:spcBef>
+                      <a:spcAft>
+                        <a:spcPts val="0"/>
+                      </a:spcAft>
+                      <a:buClr>
+                        <a:srgbClr val="000000"/>
+                      </a:buClr>
+                      <a:buFont typeface="Arial"/>
+                      <a:defRPr sz="1400" b="0" i="0" u="none" strike="noStrike" cap="none">
+                        <a:solidFill>
+                          <a:srgbClr val="000000"/>
+                        </a:solidFill>
+                        <a:latin typeface="Arial"/>
+                        <a:ea typeface="Arial"/>
+                        <a:cs typeface="Arial"/>
+                        <a:sym typeface="Arial"/>
+                      </a:defRPr>
+                    </a:lvl6pPr>
+                    <a:lvl7pPr marR="0" lvl="6" algn="l" rtl="0">
+                      <a:lnSpc>
+                        <a:spcPct val="100000"/>
+                      </a:lnSpc>
+                      <a:spcBef>
+                        <a:spcPts val="0"/>
+                      </a:spcBef>
+                      <a:spcAft>
+                        <a:spcPts val="0"/>
+                      </a:spcAft>
+                      <a:buClr>
+                        <a:srgbClr val="000000"/>
+                      </a:buClr>
+                      <a:buFont typeface="Arial"/>
+                      <a:defRPr sz="1400" b="0" i="0" u="none" strike="noStrike" cap="none">
+                        <a:solidFill>
+                          <a:srgbClr val="000000"/>
+                        </a:solidFill>
+                        <a:latin typeface="Arial"/>
+                        <a:ea typeface="Arial"/>
+                        <a:cs typeface="Arial"/>
+                        <a:sym typeface="Arial"/>
+                      </a:defRPr>
+                    </a:lvl7pPr>
+                    <a:lvl8pPr marR="0" lvl="7" algn="l" rtl="0">
+                      <a:lnSpc>
+                        <a:spcPct val="100000"/>
+                      </a:lnSpc>
+                      <a:spcBef>
+                        <a:spcPts val="0"/>
+                      </a:spcBef>
+                      <a:spcAft>
+                        <a:spcPts val="0"/>
+                      </a:spcAft>
+                      <a:buClr>
+                        <a:srgbClr val="000000"/>
+                      </a:buClr>
+                      <a:buFont typeface="Arial"/>
+                      <a:defRPr sz="1400" b="0" i="0" u="none" strike="noStrike" cap="none">
+                        <a:solidFill>
+                          <a:srgbClr val="000000"/>
+                        </a:solidFill>
+                        <a:latin typeface="Arial"/>
+                        <a:ea typeface="Arial"/>
+                        <a:cs typeface="Arial"/>
+                        <a:sym typeface="Arial"/>
+                      </a:defRPr>
+                    </a:lvl8pPr>
+                    <a:lvl9pPr marR="0" lvl="8" algn="l" rtl="0">
+                      <a:lnSpc>
+                        <a:spcPct val="100000"/>
+                      </a:lnSpc>
+                      <a:spcBef>
+                        <a:spcPts val="0"/>
+                      </a:spcBef>
+                      <a:spcAft>
+                        <a:spcPts val="0"/>
+                      </a:spcAft>
+                      <a:buClr>
+                        <a:srgbClr val="000000"/>
+                      </a:buClr>
+                      <a:buFont typeface="Arial"/>
+                      <a:defRPr sz="1400" b="0" i="0" u="none" strike="noStrike" cap="none">
+                        <a:solidFill>
+                          <a:srgbClr val="000000"/>
+                        </a:solidFill>
+                        <a:latin typeface="Arial"/>
+                        <a:ea typeface="Arial"/>
+                        <a:cs typeface="Arial"/>
+                        <a:sym typeface="Arial"/>
+                      </a:defRPr>
+                    </a:lvl9pPr>
+                  </a:lstStyle>
+                  <a:p>
+                    <a:pPr marL="0" marR="0" lvl="0" indent="0" algn="ctr" rtl="0">
+                      <a:lnSpc>
+                        <a:spcPct val="100000"/>
+                      </a:lnSpc>
+                      <a:spcBef>
+                        <a:spcPts val="0"/>
+                      </a:spcBef>
+                      <a:spcAft>
+                        <a:spcPts val="0"/>
+                      </a:spcAft>
+                      <a:buClr>
+                        <a:srgbClr val="000000"/>
+                      </a:buClr>
+                      <a:buSzPts val="1400"/>
+                      <a:buFont typeface="Arial"/>
+                      <a:buNone/>
+                    </a:pPr>
+                    <a:endParaRPr sz="1400" b="0" i="0" u="none" strike="noStrike" cap="none" dirty="0">
+                      <a:solidFill>
+                        <a:srgbClr val="000000"/>
+                      </a:solidFill>
+                      <a:latin typeface="Calibri"/>
+                      <a:ea typeface="Calibri"/>
+                      <a:cs typeface="Calibri"/>
+                      <a:sym typeface="Calibri"/>
+                    </a:endParaRPr>
+                  </a:p>
+                </p:txBody>
+              </p:sp>
+              <p:pic>
+                <p:nvPicPr>
+                  <p:cNvPr id="35" name="Google Shape;104;g3d00297c732_0_7" title="sensor.png">
+                    <a:extLst>
+                      <a:ext uri="{FF2B5EF4-FFF2-40B4-BE49-F238E27FC236}">
+                        <a16:creationId xmlns:a16="http://schemas.microsoft.com/office/drawing/2014/main" id="{834AB6D7-84ED-45FD-5D26-0566C0154F3C}"/>
+                      </a:ext>
+                    </a:extLst>
+                  </p:cNvPr>
+                  <p:cNvPicPr preferRelativeResize="0"/>
+                  <p:nvPr/>
+                </p:nvPicPr>
+                <p:blipFill rotWithShape="1">
+                  <a:blip r:embed="rId4">
+                    <a:alphaModFix/>
+                  </a:blip>
+                  <a:srcRect/>
+                  <a:stretch/>
+                </p:blipFill>
+                <p:spPr>
+                  <a:xfrm flipH="1">
+                    <a:off x="17239052" y="12494185"/>
+                    <a:ext cx="383400" cy="383400"/>
+                  </a:xfrm>
+                  <a:prstGeom prst="rect">
+                    <a:avLst/>
+                  </a:prstGeom>
+                  <a:noFill/>
+                  <a:ln>
+                    <a:noFill/>
+                  </a:ln>
+                </p:spPr>
+              </p:pic>
+              <p:pic>
+                <p:nvPicPr>
+                  <p:cNvPr id="36" name="Google Shape;104;g3d00297c732_0_7" title="sensor.png">
+                    <a:extLst>
+                      <a:ext uri="{FF2B5EF4-FFF2-40B4-BE49-F238E27FC236}">
+                        <a16:creationId xmlns:a16="http://schemas.microsoft.com/office/drawing/2014/main" id="{D899CEC2-280D-C3D5-79DE-1C3FE3135CC2}"/>
+                      </a:ext>
+                    </a:extLst>
+                  </p:cNvPr>
+                  <p:cNvPicPr preferRelativeResize="0"/>
+                  <p:nvPr/>
+                </p:nvPicPr>
+                <p:blipFill rotWithShape="1">
+                  <a:blip r:embed="rId4">
+                    <a:alphaModFix/>
+                  </a:blip>
+                  <a:srcRect/>
+                  <a:stretch/>
+                </p:blipFill>
+                <p:spPr>
+                  <a:xfrm flipH="1">
+                    <a:off x="16888551" y="12838424"/>
+                    <a:ext cx="383400" cy="383400"/>
+                  </a:xfrm>
+                  <a:prstGeom prst="rect">
+                    <a:avLst/>
+                  </a:prstGeom>
+                  <a:noFill/>
+                  <a:ln>
+                    <a:noFill/>
+                  </a:ln>
+                </p:spPr>
+              </p:pic>
+              <p:pic>
+                <p:nvPicPr>
+                  <p:cNvPr id="37" name="Google Shape;104;g3d00297c732_0_7" title="sensor.png">
+                    <a:extLst>
+                      <a:ext uri="{FF2B5EF4-FFF2-40B4-BE49-F238E27FC236}">
+                        <a16:creationId xmlns:a16="http://schemas.microsoft.com/office/drawing/2014/main" id="{1C2ACED8-B817-197B-9941-97151EF27909}"/>
+                      </a:ext>
+                    </a:extLst>
+                  </p:cNvPr>
+                  <p:cNvPicPr preferRelativeResize="0"/>
+                  <p:nvPr/>
+                </p:nvPicPr>
+                <p:blipFill rotWithShape="1">
+                  <a:blip r:embed="rId4">
+                    <a:alphaModFix/>
+                  </a:blip>
+                  <a:srcRect/>
+                  <a:stretch/>
+                </p:blipFill>
+                <p:spPr>
+                  <a:xfrm flipH="1">
+                    <a:off x="16533119" y="12661348"/>
+                    <a:ext cx="383400" cy="383400"/>
+                  </a:xfrm>
+                  <a:prstGeom prst="rect">
+                    <a:avLst/>
+                  </a:prstGeom>
+                  <a:noFill/>
+                  <a:ln>
+                    <a:noFill/>
+                  </a:ln>
+                </p:spPr>
+              </p:pic>
+              <p:sp>
+                <p:nvSpPr>
+                  <p:cNvPr id="38" name="Google Shape;109;g3d00297c732_0_7">
+                    <a:extLst>
+                      <a:ext uri="{FF2B5EF4-FFF2-40B4-BE49-F238E27FC236}">
+                        <a16:creationId xmlns:a16="http://schemas.microsoft.com/office/drawing/2014/main" id="{F769B824-1FE8-D1A3-BE88-C58C63B9AF5F}"/>
+                      </a:ext>
+                    </a:extLst>
+                  </p:cNvPr>
+                  <p:cNvSpPr/>
+                  <p:nvPr/>
+                </p:nvSpPr>
+                <p:spPr>
+                  <a:xfrm rot="4080066" flipH="1">
+                    <a:off x="17191878" y="12152614"/>
+                    <a:ext cx="312000" cy="121200"/>
+                  </a:xfrm>
+                  <a:prstGeom prst="rightArrow">
+                    <a:avLst>
+                      <a:gd name="adj1" fmla="val 50000"/>
+                      <a:gd name="adj2" fmla="val 50000"/>
+                    </a:avLst>
+                  </a:prstGeom>
+                  <a:solidFill>
+                    <a:schemeClr val="lt2"/>
+                  </a:solidFill>
+                  <a:ln w="9525" cap="flat" cmpd="sng">
+                    <a:solidFill>
+                      <a:schemeClr val="dk2"/>
+                    </a:solidFill>
+                    <a:prstDash val="solid"/>
+                    <a:round/>
+                    <a:headEnd type="none" w="sm" len="sm"/>
+                    <a:tailEnd type="none" w="sm" len="sm"/>
+                  </a:ln>
+                </p:spPr>
+                <p:txBody>
+                  <a:bodyPr spcFirstLastPara="1" wrap="square" lIns="91425" tIns="91425" rIns="91425" bIns="91425" anchor="ctr" anchorCtr="0">
+                    <a:noAutofit/>
+                  </a:bodyPr>
+                  <a:lstStyle>
+                    <a:defPPr marR="0" lvl="0" algn="l" rtl="0">
+                      <a:lnSpc>
+                        <a:spcPct val="100000"/>
+                      </a:lnSpc>
+                      <a:spcBef>
+                        <a:spcPts val="0"/>
+                      </a:spcBef>
+                      <a:spcAft>
+                        <a:spcPts val="0"/>
+                      </a:spcAft>
+                    </a:defPPr>
+                    <a:lvl1pPr marR="0" lvl="0" algn="l" rtl="0">
+                      <a:lnSpc>
+                        <a:spcPct val="100000"/>
+                      </a:lnSpc>
+                      <a:spcBef>
+                        <a:spcPts val="0"/>
+                      </a:spcBef>
+                      <a:spcAft>
+                        <a:spcPts val="0"/>
+                      </a:spcAft>
+                      <a:buClr>
+                        <a:srgbClr val="000000"/>
+                      </a:buClr>
+                      <a:buFont typeface="Arial"/>
+                      <a:defRPr sz="1400" b="0" i="0" u="none" strike="noStrike" cap="none">
+                        <a:solidFill>
+                          <a:srgbClr val="000000"/>
+                        </a:solidFill>
+                        <a:latin typeface="Arial"/>
+                        <a:ea typeface="Arial"/>
+                        <a:cs typeface="Arial"/>
+                        <a:sym typeface="Arial"/>
+                      </a:defRPr>
+                    </a:lvl1pPr>
+                    <a:lvl2pPr marR="0" lvl="1" algn="l" rtl="0">
+                      <a:lnSpc>
+                        <a:spcPct val="100000"/>
+                      </a:lnSpc>
+                      <a:spcBef>
+                        <a:spcPts val="0"/>
+                      </a:spcBef>
+                      <a:spcAft>
+                        <a:spcPts val="0"/>
+                      </a:spcAft>
+                      <a:buClr>
+                        <a:srgbClr val="000000"/>
+                      </a:buClr>
+                      <a:buFont typeface="Arial"/>
+                      <a:defRPr sz="1400" b="0" i="0" u="none" strike="noStrike" cap="none">
+                        <a:solidFill>
+                          <a:srgbClr val="000000"/>
+                        </a:solidFill>
+                        <a:latin typeface="Arial"/>
+                        <a:ea typeface="Arial"/>
+                        <a:cs typeface="Arial"/>
+                        <a:sym typeface="Arial"/>
+                      </a:defRPr>
+                    </a:lvl2pPr>
+                    <a:lvl3pPr marR="0" lvl="2" algn="l" rtl="0">
+                      <a:lnSpc>
+                        <a:spcPct val="100000"/>
+                      </a:lnSpc>
+                      <a:spcBef>
+                        <a:spcPts val="0"/>
+                      </a:spcBef>
+                      <a:spcAft>
+                        <a:spcPts val="0"/>
+                      </a:spcAft>
+                      <a:buClr>
+                        <a:srgbClr val="000000"/>
+                      </a:buClr>
+                      <a:buFont typeface="Arial"/>
+                      <a:defRPr sz="1400" b="0" i="0" u="none" strike="noStrike" cap="none">
+                        <a:solidFill>
+                          <a:srgbClr val="000000"/>
+                        </a:solidFill>
+                        <a:latin typeface="Arial"/>
+                        <a:ea typeface="Arial"/>
+                        <a:cs typeface="Arial"/>
+                        <a:sym typeface="Arial"/>
+                      </a:defRPr>
+                    </a:lvl3pPr>
+                    <a:lvl4pPr marR="0" lvl="3" algn="l" rtl="0">
+                      <a:lnSpc>
+                        <a:spcPct val="100000"/>
+                      </a:lnSpc>
+                      <a:spcBef>
+                        <a:spcPts val="0"/>
+                      </a:spcBef>
+                      <a:spcAft>
+                        <a:spcPts val="0"/>
+                      </a:spcAft>
+                      <a:buClr>
+                        <a:srgbClr val="000000"/>
+                      </a:buClr>
+                      <a:buFont typeface="Arial"/>
+                      <a:defRPr sz="1400" b="0" i="0" u="none" strike="noStrike" cap="none">
+                        <a:solidFill>
+                          <a:srgbClr val="000000"/>
+                        </a:solidFill>
+                        <a:latin typeface="Arial"/>
+                        <a:ea typeface="Arial"/>
+                        <a:cs typeface="Arial"/>
+                        <a:sym typeface="Arial"/>
+                      </a:defRPr>
+                    </a:lvl4pPr>
+                    <a:lvl5pPr marR="0" lvl="4" algn="l" rtl="0">
+                      <a:lnSpc>
+                        <a:spcPct val="100000"/>
+                      </a:lnSpc>
+                      <a:spcBef>
+                        <a:spcPts val="0"/>
+                      </a:spcBef>
+                      <a:spcAft>
+                        <a:spcPts val="0"/>
+                      </a:spcAft>
+                      <a:buClr>
+                        <a:srgbClr val="000000"/>
+                      </a:buClr>
+                      <a:buFont typeface="Arial"/>
+                      <a:defRPr sz="1400" b="0" i="0" u="none" strike="noStrike" cap="none">
+                        <a:solidFill>
+                          <a:srgbClr val="000000"/>
+                        </a:solidFill>
+                        <a:latin typeface="Arial"/>
+                        <a:ea typeface="Arial"/>
+                        <a:cs typeface="Arial"/>
+                        <a:sym typeface="Arial"/>
+                      </a:defRPr>
+                    </a:lvl5pPr>
+                    <a:lvl6pPr marR="0" lvl="5" algn="l" rtl="0">
+                      <a:lnSpc>
+                        <a:spcPct val="100000"/>
+                      </a:lnSpc>
+                      <a:spcBef>
+                        <a:spcPts val="0"/>
+                      </a:spcBef>
+                      <a:spcAft>
+                        <a:spcPts val="0"/>
+                      </a:spcAft>
+                      <a:buClr>
+                        <a:srgbClr val="000000"/>
+                      </a:buClr>
+                      <a:buFont typeface="Arial"/>
+                      <a:defRPr sz="1400" b="0" i="0" u="none" strike="noStrike" cap="none">
+                        <a:solidFill>
+                          <a:srgbClr val="000000"/>
+                        </a:solidFill>
+                        <a:latin typeface="Arial"/>
+                        <a:ea typeface="Arial"/>
+                        <a:cs typeface="Arial"/>
+                        <a:sym typeface="Arial"/>
+                      </a:defRPr>
+                    </a:lvl6pPr>
+                    <a:lvl7pPr marR="0" lvl="6" algn="l" rtl="0">
+                      <a:lnSpc>
+                        <a:spcPct val="100000"/>
+                      </a:lnSpc>
+                      <a:spcBef>
+                        <a:spcPts val="0"/>
+                      </a:spcBef>
+                      <a:spcAft>
+                        <a:spcPts val="0"/>
+                      </a:spcAft>
+                      <a:buClr>
+                        <a:srgbClr val="000000"/>
+                      </a:buClr>
+                      <a:buFont typeface="Arial"/>
+                      <a:defRPr sz="1400" b="0" i="0" u="none" strike="noStrike" cap="none">
+                        <a:solidFill>
+                          <a:srgbClr val="000000"/>
+                        </a:solidFill>
+                        <a:latin typeface="Arial"/>
+                        <a:ea typeface="Arial"/>
+                        <a:cs typeface="Arial"/>
+                        <a:sym typeface="Arial"/>
+                      </a:defRPr>
+                    </a:lvl7pPr>
+                    <a:lvl8pPr marR="0" lvl="7" algn="l" rtl="0">
+                      <a:lnSpc>
+                        <a:spcPct val="100000"/>
+                      </a:lnSpc>
+                      <a:spcBef>
+                        <a:spcPts val="0"/>
+                      </a:spcBef>
+                      <a:spcAft>
+                        <a:spcPts val="0"/>
+                      </a:spcAft>
+                      <a:buClr>
+                        <a:srgbClr val="000000"/>
+                      </a:buClr>
+                      <a:buFont typeface="Arial"/>
+                      <a:defRPr sz="1400" b="0" i="0" u="none" strike="noStrike" cap="none">
+                        <a:solidFill>
+                          <a:srgbClr val="000000"/>
+                        </a:solidFill>
+                        <a:latin typeface="Arial"/>
+                        <a:ea typeface="Arial"/>
+                        <a:cs typeface="Arial"/>
+                        <a:sym typeface="Arial"/>
+                      </a:defRPr>
+                    </a:lvl8pPr>
+                    <a:lvl9pPr marR="0" lvl="8" algn="l" rtl="0">
+                      <a:lnSpc>
+                        <a:spcPct val="100000"/>
+                      </a:lnSpc>
+                      <a:spcBef>
+                        <a:spcPts val="0"/>
+                      </a:spcBef>
+                      <a:spcAft>
+                        <a:spcPts val="0"/>
+                      </a:spcAft>
+                      <a:buClr>
+                        <a:srgbClr val="000000"/>
+                      </a:buClr>
+                      <a:buFont typeface="Arial"/>
+                      <a:defRPr sz="1400" b="0" i="0" u="none" strike="noStrike" cap="none">
+                        <a:solidFill>
+                          <a:srgbClr val="000000"/>
+                        </a:solidFill>
+                        <a:latin typeface="Arial"/>
+                        <a:ea typeface="Arial"/>
+                        <a:cs typeface="Arial"/>
+                        <a:sym typeface="Arial"/>
+                      </a:defRPr>
+                    </a:lvl9pPr>
+                  </a:lstStyle>
+                  <a:p>
+                    <a:pPr marL="0" marR="0" lvl="0" indent="0" algn="ctr" rtl="0">
+                      <a:lnSpc>
+                        <a:spcPct val="100000"/>
+                      </a:lnSpc>
+                      <a:spcBef>
+                        <a:spcPts val="0"/>
+                      </a:spcBef>
+                      <a:spcAft>
+                        <a:spcPts val="0"/>
+                      </a:spcAft>
+                      <a:buClr>
+                        <a:srgbClr val="000000"/>
+                      </a:buClr>
+                      <a:buSzPts val="1400"/>
+                      <a:buFont typeface="Arial"/>
+                      <a:buNone/>
+                    </a:pPr>
+                    <a:endParaRPr sz="1400" b="0" i="0" u="none" strike="noStrike" cap="none">
+                      <a:solidFill>
+                        <a:srgbClr val="000000"/>
+                      </a:solidFill>
+                      <a:latin typeface="Calibri"/>
+                      <a:ea typeface="Calibri"/>
+                      <a:cs typeface="Calibri"/>
+                      <a:sym typeface="Calibri"/>
+                    </a:endParaRPr>
+                  </a:p>
+                </p:txBody>
+              </p:sp>
+              <p:sp>
+                <p:nvSpPr>
+                  <p:cNvPr id="39" name="Google Shape;109;g3d00297c732_0_7">
+                    <a:extLst>
+                      <a:ext uri="{FF2B5EF4-FFF2-40B4-BE49-F238E27FC236}">
+                        <a16:creationId xmlns:a16="http://schemas.microsoft.com/office/drawing/2014/main" id="{FB9FC1CD-1880-A32A-F7EA-BA41223CF4C0}"/>
+                      </a:ext>
+                    </a:extLst>
+                  </p:cNvPr>
+                  <p:cNvSpPr/>
+                  <p:nvPr/>
+                </p:nvSpPr>
+                <p:spPr>
+                  <a:xfrm rot="4552942" flipH="1">
+                    <a:off x="16872719" y="12267515"/>
+                    <a:ext cx="312000" cy="121200"/>
+                  </a:xfrm>
+                  <a:prstGeom prst="rightArrow">
+                    <a:avLst>
+                      <a:gd name="adj1" fmla="val 50000"/>
+                      <a:gd name="adj2" fmla="val 50000"/>
+                    </a:avLst>
+                  </a:prstGeom>
+                  <a:solidFill>
+                    <a:schemeClr val="lt2"/>
+                  </a:solidFill>
+                  <a:ln w="9525" cap="flat" cmpd="sng">
+                    <a:solidFill>
+                      <a:schemeClr val="dk2"/>
+                    </a:solidFill>
+                    <a:prstDash val="solid"/>
+                    <a:round/>
+                    <a:headEnd type="none" w="sm" len="sm"/>
+                    <a:tailEnd type="none" w="sm" len="sm"/>
+                  </a:ln>
+                </p:spPr>
+                <p:txBody>
+                  <a:bodyPr spcFirstLastPara="1" wrap="square" lIns="91425" tIns="91425" rIns="91425" bIns="91425" anchor="ctr" anchorCtr="0">
+                    <a:noAutofit/>
+                  </a:bodyPr>
+                  <a:lstStyle>
+                    <a:defPPr marR="0" lvl="0" algn="l" rtl="0">
+                      <a:lnSpc>
+                        <a:spcPct val="100000"/>
+                      </a:lnSpc>
+                      <a:spcBef>
+                        <a:spcPts val="0"/>
+                      </a:spcBef>
+                      <a:spcAft>
+                        <a:spcPts val="0"/>
+                      </a:spcAft>
+                    </a:defPPr>
+                    <a:lvl1pPr marR="0" lvl="0" algn="l" rtl="0">
+                      <a:lnSpc>
+                        <a:spcPct val="100000"/>
+                      </a:lnSpc>
+                      <a:spcBef>
+                        <a:spcPts val="0"/>
+                      </a:spcBef>
+                      <a:spcAft>
+                        <a:spcPts val="0"/>
+                      </a:spcAft>
+                      <a:buClr>
+                        <a:srgbClr val="000000"/>
+                      </a:buClr>
+                      <a:buFont typeface="Arial"/>
+                      <a:defRPr sz="1400" b="0" i="0" u="none" strike="noStrike" cap="none">
+                        <a:solidFill>
+                          <a:srgbClr val="000000"/>
+                        </a:solidFill>
+                        <a:latin typeface="Arial"/>
+                        <a:ea typeface="Arial"/>
+                        <a:cs typeface="Arial"/>
+                        <a:sym typeface="Arial"/>
+                      </a:defRPr>
+                    </a:lvl1pPr>
+                    <a:lvl2pPr marR="0" lvl="1" algn="l" rtl="0">
+                      <a:lnSpc>
+                        <a:spcPct val="100000"/>
+                      </a:lnSpc>
+                      <a:spcBef>
+                        <a:spcPts val="0"/>
+                      </a:spcBef>
+                      <a:spcAft>
+                        <a:spcPts val="0"/>
+                      </a:spcAft>
+                      <a:buClr>
+                        <a:srgbClr val="000000"/>
+                      </a:buClr>
+                      <a:buFont typeface="Arial"/>
+                      <a:defRPr sz="1400" b="0" i="0" u="none" strike="noStrike" cap="none">
+                        <a:solidFill>
+                          <a:srgbClr val="000000"/>
+                        </a:solidFill>
+                        <a:latin typeface="Arial"/>
+                        <a:ea typeface="Arial"/>
+                        <a:cs typeface="Arial"/>
+                        <a:sym typeface="Arial"/>
+                      </a:defRPr>
+                    </a:lvl2pPr>
+                    <a:lvl3pPr marR="0" lvl="2" algn="l" rtl="0">
+                      <a:lnSpc>
+                        <a:spcPct val="100000"/>
+                      </a:lnSpc>
+                      <a:spcBef>
+                        <a:spcPts val="0"/>
+                      </a:spcBef>
+                      <a:spcAft>
+                        <a:spcPts val="0"/>
+                      </a:spcAft>
+                      <a:buClr>
+                        <a:srgbClr val="000000"/>
+                      </a:buClr>
+                      <a:buFont typeface="Arial"/>
+                      <a:defRPr sz="1400" b="0" i="0" u="none" strike="noStrike" cap="none">
+                        <a:solidFill>
+                          <a:srgbClr val="000000"/>
+                        </a:solidFill>
+                        <a:latin typeface="Arial"/>
+                        <a:ea typeface="Arial"/>
+                        <a:cs typeface="Arial"/>
+                        <a:sym typeface="Arial"/>
+                      </a:defRPr>
+                    </a:lvl3pPr>
+                    <a:lvl4pPr marR="0" lvl="3" algn="l" rtl="0">
+                      <a:lnSpc>
+                        <a:spcPct val="100000"/>
+                      </a:lnSpc>
+                      <a:spcBef>
+                        <a:spcPts val="0"/>
+                      </a:spcBef>
+                      <a:spcAft>
+                        <a:spcPts val="0"/>
+                      </a:spcAft>
+                      <a:buClr>
+                        <a:srgbClr val="000000"/>
+                      </a:buClr>
+                      <a:buFont typeface="Arial"/>
+                      <a:defRPr sz="1400" b="0" i="0" u="none" strike="noStrike" cap="none">
+                        <a:solidFill>
+                          <a:srgbClr val="000000"/>
+                        </a:solidFill>
+                        <a:latin typeface="Arial"/>
+                        <a:ea typeface="Arial"/>
+                        <a:cs typeface="Arial"/>
+                        <a:sym typeface="Arial"/>
+                      </a:defRPr>
+                    </a:lvl4pPr>
+                    <a:lvl5pPr marR="0" lvl="4" algn="l" rtl="0">
+                      <a:lnSpc>
+                        <a:spcPct val="100000"/>
+                      </a:lnSpc>
+                      <a:spcBef>
+                        <a:spcPts val="0"/>
+                      </a:spcBef>
+                      <a:spcAft>
+                        <a:spcPts val="0"/>
+                      </a:spcAft>
+                      <a:buClr>
+                        <a:srgbClr val="000000"/>
+                      </a:buClr>
+                      <a:buFont typeface="Arial"/>
+                      <a:defRPr sz="1400" b="0" i="0" u="none" strike="noStrike" cap="none">
+                        <a:solidFill>
+                          <a:srgbClr val="000000"/>
+                        </a:solidFill>
+                        <a:latin typeface="Arial"/>
+                        <a:ea typeface="Arial"/>
+                        <a:cs typeface="Arial"/>
+                        <a:sym typeface="Arial"/>
+                      </a:defRPr>
+                    </a:lvl5pPr>
+                    <a:lvl6pPr marR="0" lvl="5" algn="l" rtl="0">
+                      <a:lnSpc>
+                        <a:spcPct val="100000"/>
+                      </a:lnSpc>
+                      <a:spcBef>
+                        <a:spcPts val="0"/>
+                      </a:spcBef>
+                      <a:spcAft>
+                        <a:spcPts val="0"/>
+                      </a:spcAft>
+                      <a:buClr>
+                        <a:srgbClr val="000000"/>
+                      </a:buClr>
+                      <a:buFont typeface="Arial"/>
+                      <a:defRPr sz="1400" b="0" i="0" u="none" strike="noStrike" cap="none">
+                        <a:solidFill>
+                          <a:srgbClr val="000000"/>
+                        </a:solidFill>
+                        <a:latin typeface="Arial"/>
+                        <a:ea typeface="Arial"/>
+                        <a:cs typeface="Arial"/>
+                        <a:sym typeface="Arial"/>
+                      </a:defRPr>
+                    </a:lvl6pPr>
+                    <a:lvl7pPr marR="0" lvl="6" algn="l" rtl="0">
+                      <a:lnSpc>
+                        <a:spcPct val="100000"/>
+                      </a:lnSpc>
+                      <a:spcBef>
+                        <a:spcPts val="0"/>
+                      </a:spcBef>
+                      <a:spcAft>
+                        <a:spcPts val="0"/>
+                      </a:spcAft>
+                      <a:buClr>
+                        <a:srgbClr val="000000"/>
+                      </a:buClr>
+                      <a:buFont typeface="Arial"/>
+                      <a:defRPr sz="1400" b="0" i="0" u="none" strike="noStrike" cap="none">
+                        <a:solidFill>
+                          <a:srgbClr val="000000"/>
+                        </a:solidFill>
+                        <a:latin typeface="Arial"/>
+                        <a:ea typeface="Arial"/>
+                        <a:cs typeface="Arial"/>
+                        <a:sym typeface="Arial"/>
+                      </a:defRPr>
+                    </a:lvl7pPr>
+                    <a:lvl8pPr marR="0" lvl="7" algn="l" rtl="0">
+                      <a:lnSpc>
+                        <a:spcPct val="100000"/>
+                      </a:lnSpc>
+                      <a:spcBef>
+                        <a:spcPts val="0"/>
+                      </a:spcBef>
+                      <a:spcAft>
+                        <a:spcPts val="0"/>
+                      </a:spcAft>
+                      <a:buClr>
+                        <a:srgbClr val="000000"/>
+                      </a:buClr>
+                      <a:buFont typeface="Arial"/>
+                      <a:defRPr sz="1400" b="0" i="0" u="none" strike="noStrike" cap="none">
+                        <a:solidFill>
+                          <a:srgbClr val="000000"/>
+                        </a:solidFill>
+                        <a:latin typeface="Arial"/>
+                        <a:ea typeface="Arial"/>
+                        <a:cs typeface="Arial"/>
+                        <a:sym typeface="Arial"/>
+                      </a:defRPr>
+                    </a:lvl8pPr>
+                    <a:lvl9pPr marR="0" lvl="8" algn="l" rtl="0">
+                      <a:lnSpc>
+                        <a:spcPct val="100000"/>
+                      </a:lnSpc>
+                      <a:spcBef>
+                        <a:spcPts val="0"/>
+                      </a:spcBef>
+                      <a:spcAft>
+                        <a:spcPts val="0"/>
+                      </a:spcAft>
+                      <a:buClr>
+                        <a:srgbClr val="000000"/>
+                      </a:buClr>
+                      <a:buFont typeface="Arial"/>
+                      <a:defRPr sz="1400" b="0" i="0" u="none" strike="noStrike" cap="none">
+                        <a:solidFill>
+                          <a:srgbClr val="000000"/>
+                        </a:solidFill>
+                        <a:latin typeface="Arial"/>
+                        <a:ea typeface="Arial"/>
+                        <a:cs typeface="Arial"/>
+                        <a:sym typeface="Arial"/>
+                      </a:defRPr>
+                    </a:lvl9pPr>
+                  </a:lstStyle>
+                  <a:p>
+                    <a:pPr marL="0" marR="0" lvl="0" indent="0" algn="ctr" rtl="0">
+                      <a:lnSpc>
+                        <a:spcPct val="100000"/>
+                      </a:lnSpc>
+                      <a:spcBef>
+                        <a:spcPts val="0"/>
+                      </a:spcBef>
+                      <a:spcAft>
+                        <a:spcPts val="0"/>
+                      </a:spcAft>
+                      <a:buClr>
+                        <a:srgbClr val="000000"/>
+                      </a:buClr>
+                      <a:buSzPts val="1400"/>
+                      <a:buFont typeface="Arial"/>
+                      <a:buNone/>
+                    </a:pPr>
+                    <a:endParaRPr sz="1400" b="0" i="0" u="none" strike="noStrike" cap="none">
+                      <a:solidFill>
+                        <a:srgbClr val="000000"/>
+                      </a:solidFill>
+                      <a:latin typeface="Calibri"/>
+                      <a:ea typeface="Calibri"/>
+                      <a:cs typeface="Calibri"/>
+                      <a:sym typeface="Calibri"/>
+                    </a:endParaRPr>
+                  </a:p>
+                </p:txBody>
+              </p:sp>
+              <p:sp>
+                <p:nvSpPr>
+                  <p:cNvPr id="40" name="Google Shape;109;g3d00297c732_0_7">
+                    <a:extLst>
+                      <a:ext uri="{FF2B5EF4-FFF2-40B4-BE49-F238E27FC236}">
+                        <a16:creationId xmlns:a16="http://schemas.microsoft.com/office/drawing/2014/main" id="{8F5B24D7-AE69-644B-B66B-FF346FEDA6F2}"/>
+                      </a:ext>
+                    </a:extLst>
+                  </p:cNvPr>
+                  <p:cNvSpPr/>
+                  <p:nvPr/>
+                </p:nvSpPr>
+                <p:spPr>
+                  <a:xfrm rot="4978645" flipH="1">
+                    <a:off x="16557738" y="12283336"/>
+                    <a:ext cx="312000" cy="121200"/>
+                  </a:xfrm>
+                  <a:prstGeom prst="rightArrow">
+                    <a:avLst>
+                      <a:gd name="adj1" fmla="val 50000"/>
+                      <a:gd name="adj2" fmla="val 50000"/>
+                    </a:avLst>
+                  </a:prstGeom>
+                  <a:solidFill>
+                    <a:schemeClr val="lt2"/>
+                  </a:solidFill>
+                  <a:ln w="9525" cap="flat" cmpd="sng">
+                    <a:solidFill>
+                      <a:schemeClr val="dk2"/>
+                    </a:solidFill>
+                    <a:prstDash val="solid"/>
+                    <a:round/>
+                    <a:headEnd type="none" w="sm" len="sm"/>
+                    <a:tailEnd type="none" w="sm" len="sm"/>
+                  </a:ln>
+                </p:spPr>
+                <p:txBody>
+                  <a:bodyPr spcFirstLastPara="1" wrap="square" lIns="91425" tIns="91425" rIns="91425" bIns="91425" anchor="ctr" anchorCtr="0">
+                    <a:noAutofit/>
+                  </a:bodyPr>
+                  <a:lstStyle>
+                    <a:defPPr marR="0" lvl="0" algn="l" rtl="0">
+                      <a:lnSpc>
+                        <a:spcPct val="100000"/>
+                      </a:lnSpc>
+                      <a:spcBef>
+                        <a:spcPts val="0"/>
+                      </a:spcBef>
+                      <a:spcAft>
+                        <a:spcPts val="0"/>
+                      </a:spcAft>
+                    </a:defPPr>
+                    <a:lvl1pPr marR="0" lvl="0" algn="l" rtl="0">
+                      <a:lnSpc>
+                        <a:spcPct val="100000"/>
+                      </a:lnSpc>
+                      <a:spcBef>
+                        <a:spcPts val="0"/>
+                      </a:spcBef>
+                      <a:spcAft>
+                        <a:spcPts val="0"/>
+                      </a:spcAft>
+                      <a:buClr>
+                        <a:srgbClr val="000000"/>
+                      </a:buClr>
+                      <a:buFont typeface="Arial"/>
+                      <a:defRPr sz="1400" b="0" i="0" u="none" strike="noStrike" cap="none">
+                        <a:solidFill>
+                          <a:srgbClr val="000000"/>
+                        </a:solidFill>
+                        <a:latin typeface="Arial"/>
+                        <a:ea typeface="Arial"/>
+                        <a:cs typeface="Arial"/>
+                        <a:sym typeface="Arial"/>
+                      </a:defRPr>
+                    </a:lvl1pPr>
+                    <a:lvl2pPr marR="0" lvl="1" algn="l" rtl="0">
+                      <a:lnSpc>
+                        <a:spcPct val="100000"/>
+                      </a:lnSpc>
+                      <a:spcBef>
+                        <a:spcPts val="0"/>
+                      </a:spcBef>
+                      <a:spcAft>
+                        <a:spcPts val="0"/>
+                      </a:spcAft>
+                      <a:buClr>
+                        <a:srgbClr val="000000"/>
+                      </a:buClr>
+                      <a:buFont typeface="Arial"/>
+                      <a:defRPr sz="1400" b="0" i="0" u="none" strike="noStrike" cap="none">
+                        <a:solidFill>
+                          <a:srgbClr val="000000"/>
+                        </a:solidFill>
+                        <a:latin typeface="Arial"/>
+                        <a:ea typeface="Arial"/>
+                        <a:cs typeface="Arial"/>
+                        <a:sym typeface="Arial"/>
+                      </a:defRPr>
+                    </a:lvl2pPr>
+                    <a:lvl3pPr marR="0" lvl="2" algn="l" rtl="0">
+                      <a:lnSpc>
+                        <a:spcPct val="100000"/>
+                      </a:lnSpc>
+                      <a:spcBef>
+                        <a:spcPts val="0"/>
+                      </a:spcBef>
+                      <a:spcAft>
+                        <a:spcPts val="0"/>
+                      </a:spcAft>
+                      <a:buClr>
+                        <a:srgbClr val="000000"/>
+                      </a:buClr>
+                      <a:buFont typeface="Arial"/>
+                      <a:defRPr sz="1400" b="0" i="0" u="none" strike="noStrike" cap="none">
+                        <a:solidFill>
+                          <a:srgbClr val="000000"/>
+                        </a:solidFill>
+                        <a:latin typeface="Arial"/>
+                        <a:ea typeface="Arial"/>
+                        <a:cs typeface="Arial"/>
+                        <a:sym typeface="Arial"/>
+                      </a:defRPr>
+                    </a:lvl3pPr>
+                    <a:lvl4pPr marR="0" lvl="3" algn="l" rtl="0">
+                      <a:lnSpc>
+                        <a:spcPct val="100000"/>
+                      </a:lnSpc>
+                      <a:spcBef>
+                        <a:spcPts val="0"/>
+                      </a:spcBef>
+                      <a:spcAft>
+                        <a:spcPts val="0"/>
+                      </a:spcAft>
+                      <a:buClr>
+                        <a:srgbClr val="000000"/>
+                      </a:buClr>
+                      <a:buFont typeface="Arial"/>
+                      <a:defRPr sz="1400" b="0" i="0" u="none" strike="noStrike" cap="none">
+                        <a:solidFill>
+                          <a:srgbClr val="000000"/>
+                        </a:solidFill>
+                        <a:latin typeface="Arial"/>
+                        <a:ea typeface="Arial"/>
+                        <a:cs typeface="Arial"/>
+                        <a:sym typeface="Arial"/>
+                      </a:defRPr>
+                    </a:lvl4pPr>
+                    <a:lvl5pPr marR="0" lvl="4" algn="l" rtl="0">
+                      <a:lnSpc>
+                        <a:spcPct val="100000"/>
+                      </a:lnSpc>
+                      <a:spcBef>
+                        <a:spcPts val="0"/>
+                      </a:spcBef>
+                      <a:spcAft>
+                        <a:spcPts val="0"/>
+                      </a:spcAft>
+                      <a:buClr>
+                        <a:srgbClr val="000000"/>
+                      </a:buClr>
+                      <a:buFont typeface="Arial"/>
+                      <a:defRPr sz="1400" b="0" i="0" u="none" strike="noStrike" cap="none">
+                        <a:solidFill>
+                          <a:srgbClr val="000000"/>
+                        </a:solidFill>
+                        <a:latin typeface="Arial"/>
+                        <a:ea typeface="Arial"/>
+                        <a:cs typeface="Arial"/>
+                        <a:sym typeface="Arial"/>
+                      </a:defRPr>
+                    </a:lvl5pPr>
+                    <a:lvl6pPr marR="0" lvl="5" algn="l" rtl="0">
+                      <a:lnSpc>
+                        <a:spcPct val="100000"/>
+                      </a:lnSpc>
+                      <a:spcBef>
+                        <a:spcPts val="0"/>
+                      </a:spcBef>
+                      <a:spcAft>
+                        <a:spcPts val="0"/>
+                      </a:spcAft>
+                      <a:buClr>
+                        <a:srgbClr val="000000"/>
+                      </a:buClr>
+                      <a:buFont typeface="Arial"/>
+                      <a:defRPr sz="1400" b="0" i="0" u="none" strike="noStrike" cap="none">
+                        <a:solidFill>
+                          <a:srgbClr val="000000"/>
+                        </a:solidFill>
+                        <a:latin typeface="Arial"/>
+                        <a:ea typeface="Arial"/>
+                        <a:cs typeface="Arial"/>
+                        <a:sym typeface="Arial"/>
+                      </a:defRPr>
+                    </a:lvl6pPr>
+                    <a:lvl7pPr marR="0" lvl="6" algn="l" rtl="0">
+                      <a:lnSpc>
+                        <a:spcPct val="100000"/>
+                      </a:lnSpc>
+                      <a:spcBef>
+                        <a:spcPts val="0"/>
+                      </a:spcBef>
+                      <a:spcAft>
+                        <a:spcPts val="0"/>
+                      </a:spcAft>
+                      <a:buClr>
+                        <a:srgbClr val="000000"/>
+                      </a:buClr>
+                      <a:buFont typeface="Arial"/>
+                      <a:defRPr sz="1400" b="0" i="0" u="none" strike="noStrike" cap="none">
+                        <a:solidFill>
+                          <a:srgbClr val="000000"/>
+                        </a:solidFill>
+                        <a:latin typeface="Arial"/>
+                        <a:ea typeface="Arial"/>
+                        <a:cs typeface="Arial"/>
+                        <a:sym typeface="Arial"/>
+                      </a:defRPr>
+                    </a:lvl7pPr>
+                    <a:lvl8pPr marR="0" lvl="7" algn="l" rtl="0">
+                      <a:lnSpc>
+                        <a:spcPct val="100000"/>
+                      </a:lnSpc>
+                      <a:spcBef>
+                        <a:spcPts val="0"/>
+                      </a:spcBef>
+                      <a:spcAft>
+                        <a:spcPts val="0"/>
+                      </a:spcAft>
+                      <a:buClr>
+                        <a:srgbClr val="000000"/>
+                      </a:buClr>
+                      <a:buFont typeface="Arial"/>
+                      <a:defRPr sz="1400" b="0" i="0" u="none" strike="noStrike" cap="none">
+                        <a:solidFill>
+                          <a:srgbClr val="000000"/>
+                        </a:solidFill>
+                        <a:latin typeface="Arial"/>
+                        <a:ea typeface="Arial"/>
+                        <a:cs typeface="Arial"/>
+                        <a:sym typeface="Arial"/>
+                      </a:defRPr>
+                    </a:lvl8pPr>
+                    <a:lvl9pPr marR="0" lvl="8" algn="l" rtl="0">
+                      <a:lnSpc>
+                        <a:spcPct val="100000"/>
+                      </a:lnSpc>
+                      <a:spcBef>
+                        <a:spcPts val="0"/>
+                      </a:spcBef>
+                      <a:spcAft>
+                        <a:spcPts val="0"/>
+                      </a:spcAft>
+                      <a:buClr>
+                        <a:srgbClr val="000000"/>
+                      </a:buClr>
+                      <a:buFont typeface="Arial"/>
+                      <a:defRPr sz="1400" b="0" i="0" u="none" strike="noStrike" cap="none">
+                        <a:solidFill>
+                          <a:srgbClr val="000000"/>
+                        </a:solidFill>
+                        <a:latin typeface="Arial"/>
+                        <a:ea typeface="Arial"/>
+                        <a:cs typeface="Arial"/>
+                        <a:sym typeface="Arial"/>
+                      </a:defRPr>
+                    </a:lvl9pPr>
+                  </a:lstStyle>
+                  <a:p>
+                    <a:pPr marL="0" marR="0" lvl="0" indent="0" algn="ctr" rtl="0">
+                      <a:lnSpc>
+                        <a:spcPct val="100000"/>
+                      </a:lnSpc>
+                      <a:spcBef>
+                        <a:spcPts val="0"/>
+                      </a:spcBef>
+                      <a:spcAft>
+                        <a:spcPts val="0"/>
+                      </a:spcAft>
+                      <a:buClr>
+                        <a:srgbClr val="000000"/>
+                      </a:buClr>
+                      <a:buSzPts val="1400"/>
+                      <a:buFont typeface="Arial"/>
+                      <a:buNone/>
+                    </a:pPr>
+                    <a:endParaRPr sz="1400" b="0" i="0" u="none" strike="noStrike" cap="none" dirty="0">
+                      <a:solidFill>
+                        <a:srgbClr val="000000"/>
+                      </a:solidFill>
+                      <a:latin typeface="Calibri"/>
+                      <a:ea typeface="Calibri"/>
+                      <a:cs typeface="Calibri"/>
+                      <a:sym typeface="Calibri"/>
+                    </a:endParaRPr>
+                  </a:p>
+                </p:txBody>
+              </p:sp>
+            </p:grpSp>
+          </p:grpSp>
+          <p:grpSp>
+            <p:nvGrpSpPr>
+              <p:cNvPr id="59" name="群組 58">
+                <a:extLst>
+                  <a:ext uri="{FF2B5EF4-FFF2-40B4-BE49-F238E27FC236}">
+                    <a16:creationId xmlns:a16="http://schemas.microsoft.com/office/drawing/2014/main" id="{00E8080F-859C-66F9-2CC8-6EAE4A48F847}"/>
+                  </a:ext>
+                </a:extLst>
+              </p:cNvPr>
+              <p:cNvGrpSpPr/>
+              <p:nvPr/>
+            </p:nvGrpSpPr>
+            <p:grpSpPr>
+              <a:xfrm>
+                <a:off x="15567575" y="11532544"/>
+                <a:ext cx="1709724" cy="598276"/>
+                <a:chOff x="15705744" y="11389267"/>
+                <a:chExt cx="1709724" cy="598276"/>
+              </a:xfrm>
+            </p:grpSpPr>
+            <p:pic>
+              <p:nvPicPr>
+                <p:cNvPr id="13" name="Google Shape;103;g3d00297c732_0_7" title="UAV.jpg">
+                  <a:extLst>
+                    <a:ext uri="{FF2B5EF4-FFF2-40B4-BE49-F238E27FC236}">
+                      <a16:creationId xmlns:a16="http://schemas.microsoft.com/office/drawing/2014/main" id="{8DDB2F08-9CE9-EC94-5414-9E477670ADFD}"/>
+                    </a:ext>
+                  </a:extLst>
+                </p:cNvPr>
+                <p:cNvPicPr preferRelativeResize="0"/>
+                <p:nvPr/>
+              </p:nvPicPr>
+              <p:blipFill rotWithShape="1">
+                <a:blip r:embed="rId5">
+                  <a:alphaModFix/>
+                </a:blip>
+                <a:srcRect l="7734" t="19877" r="3576" b="30215"/>
+                <a:stretch>
+                  <a:fillRect/>
+                </a:stretch>
+              </p:blipFill>
+              <p:spPr>
+                <a:xfrm>
+                  <a:off x="15705744" y="11659650"/>
+                  <a:ext cx="595025" cy="327893"/>
+                </a:xfrm>
+                <a:prstGeom prst="rect">
+                  <a:avLst/>
+                </a:prstGeom>
+                <a:noFill/>
+                <a:ln>
+                  <a:noFill/>
+                </a:ln>
+              </p:spPr>
+            </p:pic>
+            <p:pic>
+              <p:nvPicPr>
+                <p:cNvPr id="43" name="Google Shape;103;g3d00297c732_0_7" title="UAV.jpg">
+                  <a:extLst>
+                    <a:ext uri="{FF2B5EF4-FFF2-40B4-BE49-F238E27FC236}">
+                      <a16:creationId xmlns:a16="http://schemas.microsoft.com/office/drawing/2014/main" id="{FCA038A1-70B1-09EE-6173-44B92AF97EFD}"/>
+                    </a:ext>
+                  </a:extLst>
+                </p:cNvPr>
+                <p:cNvPicPr preferRelativeResize="0"/>
+                <p:nvPr/>
+              </p:nvPicPr>
+              <p:blipFill rotWithShape="1">
+                <a:blip r:embed="rId5">
+                  <a:alphaModFix/>
+                </a:blip>
+                <a:srcRect l="7734" t="19877" r="3576" b="30215"/>
+                <a:stretch>
+                  <a:fillRect/>
+                </a:stretch>
+              </p:blipFill>
+              <p:spPr>
+                <a:xfrm>
+                  <a:off x="16220742" y="11389267"/>
+                  <a:ext cx="595025" cy="327893"/>
+                </a:xfrm>
+                <a:prstGeom prst="rect">
+                  <a:avLst/>
+                </a:prstGeom>
+                <a:noFill/>
+                <a:ln>
+                  <a:noFill/>
+                </a:ln>
+              </p:spPr>
+            </p:pic>
+            <p:pic>
+              <p:nvPicPr>
+                <p:cNvPr id="44" name="Google Shape;103;g3d00297c732_0_7" title="UAV.jpg">
+                  <a:extLst>
+                    <a:ext uri="{FF2B5EF4-FFF2-40B4-BE49-F238E27FC236}">
+                      <a16:creationId xmlns:a16="http://schemas.microsoft.com/office/drawing/2014/main" id="{3E3217D9-3E67-5BE2-855A-681F37CEE482}"/>
+                    </a:ext>
+                  </a:extLst>
+                </p:cNvPr>
+                <p:cNvPicPr preferRelativeResize="0"/>
+                <p:nvPr/>
+              </p:nvPicPr>
+              <p:blipFill rotWithShape="1">
+                <a:blip r:embed="rId5">
+                  <a:alphaModFix/>
+                </a:blip>
+                <a:srcRect l="7734" t="19877" r="3576" b="30215"/>
+                <a:stretch>
+                  <a:fillRect/>
+                </a:stretch>
+              </p:blipFill>
+              <p:spPr>
+                <a:xfrm>
+                  <a:off x="16820443" y="11655133"/>
+                  <a:ext cx="595025" cy="327893"/>
+                </a:xfrm>
+                <a:prstGeom prst="rect">
+                  <a:avLst/>
+                </a:prstGeom>
+                <a:noFill/>
+                <a:ln>
+                  <a:noFill/>
+                </a:ln>
+              </p:spPr>
+            </p:pic>
+          </p:grpSp>
+          <p:sp>
+            <p:nvSpPr>
+              <p:cNvPr id="64" name="Google Shape;111;g3d00297c732_0_7">
+                <a:extLst>
+                  <a:ext uri="{FF2B5EF4-FFF2-40B4-BE49-F238E27FC236}">
+                    <a16:creationId xmlns:a16="http://schemas.microsoft.com/office/drawing/2014/main" id="{AED3F276-3891-7EFB-F71D-A3A4507C8558}"/>
+                  </a:ext>
+                </a:extLst>
+              </p:cNvPr>
+              <p:cNvSpPr/>
+              <p:nvPr/>
+            </p:nvSpPr>
+            <p:spPr>
+              <a:xfrm rot="16832188">
+                <a:off x="16200480" y="11158784"/>
+                <a:ext cx="478490" cy="182673"/>
+              </a:xfrm>
+              <a:prstGeom prst="rightArrow">
+                <a:avLst>
+                  <a:gd name="adj1" fmla="val 50000"/>
+                  <a:gd name="adj2" fmla="val 50000"/>
+                </a:avLst>
+              </a:prstGeom>
+              <a:solidFill>
+                <a:srgbClr val="FF0000"/>
+              </a:solidFill>
+              <a:ln w="9525" cap="flat" cmpd="sng">
+                <a:solidFill>
+                  <a:schemeClr val="lt1"/>
+                </a:solidFill>
+                <a:prstDash val="solid"/>
+                <a:round/>
+                <a:headEnd type="none" w="sm" len="sm"/>
+                <a:tailEnd type="none" w="sm" len="sm"/>
+              </a:ln>
+            </p:spPr>
+            <p:txBody>
+              <a:bodyPr spcFirstLastPara="1" wrap="square" lIns="91425" tIns="91425" rIns="91425" bIns="91425" anchor="ctr" anchorCtr="0">
+                <a:noAutofit/>
+              </a:bodyPr>
+              <a:lstStyle>
+                <a:defPPr marR="0" lvl="0" algn="l" rtl="0">
+                  <a:lnSpc>
+                    <a:spcPct val="100000"/>
+                  </a:lnSpc>
+                  <a:spcBef>
+                    <a:spcPts val="0"/>
+                  </a:spcBef>
+                  <a:spcAft>
+                    <a:spcPts val="0"/>
+                  </a:spcAft>
+                </a:defPPr>
+                <a:lvl1pPr marR="0" lvl="0" algn="l" rtl="0">
+                  <a:lnSpc>
+                    <a:spcPct val="100000"/>
+                  </a:lnSpc>
+                  <a:spcBef>
+                    <a:spcPts val="0"/>
+                  </a:spcBef>
+                  <a:spcAft>
+                    <a:spcPts val="0"/>
+                  </a:spcAft>
+                  <a:buClr>
+                    <a:srgbClr val="000000"/>
+                  </a:buClr>
+                  <a:buFont typeface="Arial"/>
+                  <a:defRPr sz="1400" b="0" i="0" u="none" strike="noStrike" cap="none">
+                    <a:solidFill>
+                      <a:srgbClr val="000000"/>
+                    </a:solidFill>
+                    <a:latin typeface="Arial"/>
+                    <a:ea typeface="Arial"/>
+                    <a:cs typeface="Arial"/>
+                    <a:sym typeface="Arial"/>
+                  </a:defRPr>
+                </a:lvl1pPr>
+                <a:lvl2pPr marR="0" lvl="1" algn="l" rtl="0">
+                  <a:lnSpc>
+                    <a:spcPct val="100000"/>
+                  </a:lnSpc>
+                  <a:spcBef>
+                    <a:spcPts val="0"/>
+                  </a:spcBef>
+                  <a:spcAft>
+                    <a:spcPts val="0"/>
+                  </a:spcAft>
+                  <a:buClr>
+                    <a:srgbClr val="000000"/>
+                  </a:buClr>
+                  <a:buFont typeface="Arial"/>
+                  <a:defRPr sz="1400" b="0" i="0" u="none" strike="noStrike" cap="none">
+                    <a:solidFill>
+                      <a:srgbClr val="000000"/>
+                    </a:solidFill>
+                    <a:latin typeface="Arial"/>
+                    <a:ea typeface="Arial"/>
+                    <a:cs typeface="Arial"/>
+                    <a:sym typeface="Arial"/>
+                  </a:defRPr>
+                </a:lvl2pPr>
+                <a:lvl3pPr marR="0" lvl="2" algn="l" rtl="0">
+                  <a:lnSpc>
+                    <a:spcPct val="100000"/>
+                  </a:lnSpc>
+                  <a:spcBef>
+                    <a:spcPts val="0"/>
+                  </a:spcBef>
+                  <a:spcAft>
+                    <a:spcPts val="0"/>
+                  </a:spcAft>
+                  <a:buClr>
+                    <a:srgbClr val="000000"/>
+                  </a:buClr>
+                  <a:buFont typeface="Arial"/>
+                  <a:defRPr sz="1400" b="0" i="0" u="none" strike="noStrike" cap="none">
+                    <a:solidFill>
+                      <a:srgbClr val="000000"/>
+                    </a:solidFill>
+                    <a:latin typeface="Arial"/>
+                    <a:ea typeface="Arial"/>
+                    <a:cs typeface="Arial"/>
+                    <a:sym typeface="Arial"/>
+                  </a:defRPr>
+                </a:lvl3pPr>
+                <a:lvl4pPr marR="0" lvl="3" algn="l" rtl="0">
+                  <a:lnSpc>
+                    <a:spcPct val="100000"/>
+                  </a:lnSpc>
+                  <a:spcBef>
+                    <a:spcPts val="0"/>
+                  </a:spcBef>
+                  <a:spcAft>
+                    <a:spcPts val="0"/>
+                  </a:spcAft>
+                  <a:buClr>
+                    <a:srgbClr val="000000"/>
+                  </a:buClr>
+                  <a:buFont typeface="Arial"/>
+                  <a:defRPr sz="1400" b="0" i="0" u="none" strike="noStrike" cap="none">
+                    <a:solidFill>
+                      <a:srgbClr val="000000"/>
+                    </a:solidFill>
+                    <a:latin typeface="Arial"/>
+                    <a:ea typeface="Arial"/>
+                    <a:cs typeface="Arial"/>
+                    <a:sym typeface="Arial"/>
+                  </a:defRPr>
+                </a:lvl4pPr>
+                <a:lvl5pPr marR="0" lvl="4" algn="l" rtl="0">
+                  <a:lnSpc>
+                    <a:spcPct val="100000"/>
+                  </a:lnSpc>
+                  <a:spcBef>
+                    <a:spcPts val="0"/>
+                  </a:spcBef>
+                  <a:spcAft>
+                    <a:spcPts val="0"/>
+                  </a:spcAft>
+                  <a:buClr>
+                    <a:srgbClr val="000000"/>
+                  </a:buClr>
+                  <a:buFont typeface="Arial"/>
+                  <a:defRPr sz="1400" b="0" i="0" u="none" strike="noStrike" cap="none">
+                    <a:solidFill>
+                      <a:srgbClr val="000000"/>
+                    </a:solidFill>
+                    <a:latin typeface="Arial"/>
+                    <a:ea typeface="Arial"/>
+                    <a:cs typeface="Arial"/>
+                    <a:sym typeface="Arial"/>
+                  </a:defRPr>
+                </a:lvl5pPr>
+                <a:lvl6pPr marR="0" lvl="5" algn="l" rtl="0">
+                  <a:lnSpc>
+                    <a:spcPct val="100000"/>
+                  </a:lnSpc>
+                  <a:spcBef>
+                    <a:spcPts val="0"/>
+                  </a:spcBef>
+                  <a:spcAft>
+                    <a:spcPts val="0"/>
+                  </a:spcAft>
+                  <a:buClr>
+                    <a:srgbClr val="000000"/>
+                  </a:buClr>
+                  <a:buFont typeface="Arial"/>
+                  <a:defRPr sz="1400" b="0" i="0" u="none" strike="noStrike" cap="none">
+                    <a:solidFill>
+                      <a:srgbClr val="000000"/>
+                    </a:solidFill>
+                    <a:latin typeface="Arial"/>
+                    <a:ea typeface="Arial"/>
+                    <a:cs typeface="Arial"/>
+                    <a:sym typeface="Arial"/>
+                  </a:defRPr>
+                </a:lvl6pPr>
+                <a:lvl7pPr marR="0" lvl="6" algn="l" rtl="0">
+                  <a:lnSpc>
+                    <a:spcPct val="100000"/>
+                  </a:lnSpc>
+                  <a:spcBef>
+                    <a:spcPts val="0"/>
+                  </a:spcBef>
+                  <a:spcAft>
+                    <a:spcPts val="0"/>
+                  </a:spcAft>
+                  <a:buClr>
+                    <a:srgbClr val="000000"/>
+                  </a:buClr>
+                  <a:buFont typeface="Arial"/>
+                  <a:defRPr sz="1400" b="0" i="0" u="none" strike="noStrike" cap="none">
+                    <a:solidFill>
+                      <a:srgbClr val="000000"/>
+                    </a:solidFill>
+                    <a:latin typeface="Arial"/>
+                    <a:ea typeface="Arial"/>
+                    <a:cs typeface="Arial"/>
+                    <a:sym typeface="Arial"/>
+                  </a:defRPr>
+                </a:lvl7pPr>
+                <a:lvl8pPr marR="0" lvl="7" algn="l" rtl="0">
+                  <a:lnSpc>
+                    <a:spcPct val="100000"/>
+                  </a:lnSpc>
+                  <a:spcBef>
+                    <a:spcPts val="0"/>
+                  </a:spcBef>
+                  <a:spcAft>
+                    <a:spcPts val="0"/>
+                  </a:spcAft>
+                  <a:buClr>
+                    <a:srgbClr val="000000"/>
+                  </a:buClr>
+                  <a:buFont typeface="Arial"/>
+                  <a:defRPr sz="1400" b="0" i="0" u="none" strike="noStrike" cap="none">
+                    <a:solidFill>
+                      <a:srgbClr val="000000"/>
+                    </a:solidFill>
+                    <a:latin typeface="Arial"/>
+                    <a:ea typeface="Arial"/>
+                    <a:cs typeface="Arial"/>
+                    <a:sym typeface="Arial"/>
+                  </a:defRPr>
+                </a:lvl8pPr>
+                <a:lvl9pPr marR="0" lvl="8" algn="l" rtl="0">
+                  <a:lnSpc>
+                    <a:spcPct val="100000"/>
+                  </a:lnSpc>
+                  <a:spcBef>
+                    <a:spcPts val="0"/>
+                  </a:spcBef>
+                  <a:spcAft>
+                    <a:spcPts val="0"/>
+                  </a:spcAft>
+                  <a:buClr>
+                    <a:srgbClr val="000000"/>
+                  </a:buClr>
+                  <a:buFont typeface="Arial"/>
+                  <a:defRPr sz="1400" b="0" i="0" u="none" strike="noStrike" cap="none">
+                    <a:solidFill>
+                      <a:srgbClr val="000000"/>
+                    </a:solidFill>
+                    <a:latin typeface="Arial"/>
+                    <a:ea typeface="Arial"/>
+                    <a:cs typeface="Arial"/>
+                    <a:sym typeface="Arial"/>
+                  </a:defRPr>
+                </a:lvl9pPr>
+              </a:lstStyle>
+              <a:p>
+                <a:pPr marL="0" marR="0" lvl="0" indent="0" algn="ctr" rtl="0">
+                  <a:lnSpc>
+                    <a:spcPct val="100000"/>
+                  </a:lnSpc>
+                  <a:spcBef>
+                    <a:spcPts val="0"/>
+                  </a:spcBef>
+                  <a:spcAft>
+                    <a:spcPts val="0"/>
+                  </a:spcAft>
+                  <a:buClr>
+                    <a:srgbClr val="000000"/>
+                  </a:buClr>
+                  <a:buSzPts val="1400"/>
+                  <a:buFont typeface="Arial"/>
+                  <a:buNone/>
+                </a:pPr>
+                <a:endParaRPr sz="1400" b="0" i="0" u="none" strike="noStrike" cap="none">
+                  <a:solidFill>
+                    <a:schemeClr val="dk2"/>
+                  </a:solidFill>
+                  <a:latin typeface="Calibri"/>
+                  <a:ea typeface="Calibri"/>
+                  <a:cs typeface="Calibri"/>
+                  <a:sym typeface="Calibri"/>
+                </a:endParaRPr>
+              </a:p>
+            </p:txBody>
+          </p:sp>
+        </p:grpSp>
+        <p:sp>
+          <p:nvSpPr>
+            <p:cNvPr id="69" name="矩形 68">
+              <a:extLst>
+                <a:ext uri="{FF2B5EF4-FFF2-40B4-BE49-F238E27FC236}">
+                  <a16:creationId xmlns:a16="http://schemas.microsoft.com/office/drawing/2014/main" id="{AA792605-CE77-97C9-B167-1903088EC774}"/>
+                </a:ext>
+              </a:extLst>
+            </p:cNvPr>
+            <p:cNvSpPr/>
+            <p:nvPr/>
+          </p:nvSpPr>
+          <p:spPr>
+            <a:xfrm>
+              <a:off x="15291346" y="11759626"/>
+              <a:ext cx="2252511" cy="1096967"/>
+            </a:xfrm>
+            <a:prstGeom prst="rect">
+              <a:avLst/>
+            </a:prstGeom>
+            <a:noFill/>
+            <a:ln w="9525" cap="flat" cmpd="sng" algn="ctr">
+              <a:solidFill>
+                <a:schemeClr val="accent1"/>
+              </a:solidFill>
+              <a:prstDash val="solid"/>
+              <a:round/>
+              <a:headEnd type="none" w="med" len="med"/>
+              <a:tailEnd type="none" w="med" len="med"/>
+            </a:ln>
+          </p:spPr>
+          <p:style>
+            <a:lnRef idx="0">
+              <a:scrgbClr r="0" g="0" b="0"/>
+            </a:lnRef>
+            <a:fillRef idx="0">
+              <a:scrgbClr r="0" g="0" b="0"/>
+            </a:fillRef>
+            <a:effectRef idx="0">
+              <a:scrgbClr r="0" g="0" b="0"/>
+            </a:effectRef>
+            <a:fontRef idx="minor">
+              <a:schemeClr val="accent1"/>
+            </a:fontRef>
+          </p:style>
+          <p:txBody>
+            <a:bodyPr rtlCol="0" anchor="ctr"/>
+            <a:lstStyle/>
+            <a:p>
+              <a:pPr algn="ctr"/>
+              <a:endParaRPr lang="zh-TW" altLang="en-US"/>
+            </a:p>
+          </p:txBody>
+        </p:sp>
+        <p:sp>
+          <p:nvSpPr>
+            <p:cNvPr id="71" name="文字方塊 70">
+              <a:extLst>
+                <a:ext uri="{FF2B5EF4-FFF2-40B4-BE49-F238E27FC236}">
+                  <a16:creationId xmlns:a16="http://schemas.microsoft.com/office/drawing/2014/main" id="{54766214-5C41-4253-1029-5AFA1A0F8BA6}"/>
+                </a:ext>
+              </a:extLst>
+            </p:cNvPr>
+            <p:cNvSpPr txBox="1"/>
+            <p:nvPr/>
+          </p:nvSpPr>
+          <p:spPr>
+            <a:xfrm>
+              <a:off x="15208856" y="11452059"/>
+              <a:ext cx="1069137" cy="369332"/>
+            </a:xfrm>
+            <a:prstGeom prst="rect">
+              <a:avLst/>
+            </a:prstGeom>
+            <a:noFill/>
+          </p:spPr>
+          <p:txBody>
+            <a:bodyPr wrap="square" rtlCol="0">
+              <a:spAutoFit/>
+            </a:bodyPr>
+            <a:lstStyle/>
+            <a:p>
+              <a:r>
+                <a:rPr lang="en-US" altLang="zh-TW" b="1" dirty="0"/>
+                <a:t>Fleet</a:t>
+              </a:r>
+              <a:endParaRPr lang="zh-TW" altLang="en-US" b="1" dirty="0"/>
+            </a:p>
+          </p:txBody>
+        </p:sp>
+      </p:grpSp>
+      <p:grpSp>
+        <p:nvGrpSpPr>
+          <p:cNvPr id="101" name="群組 100">
+            <a:extLst>
+              <a:ext uri="{FF2B5EF4-FFF2-40B4-BE49-F238E27FC236}">
+                <a16:creationId xmlns:a16="http://schemas.microsoft.com/office/drawing/2014/main" id="{33A73AED-5DDB-C16E-211C-8B891E3D8686}"/>
+              </a:ext>
+            </a:extLst>
+          </p:cNvPr>
+          <p:cNvGrpSpPr/>
+          <p:nvPr/>
+        </p:nvGrpSpPr>
+        <p:grpSpPr>
+          <a:xfrm>
+            <a:off x="18147899" y="10707937"/>
+            <a:ext cx="2464386" cy="3116161"/>
+            <a:chOff x="18205594" y="10642766"/>
+            <a:chExt cx="2464386" cy="3116161"/>
+          </a:xfrm>
+        </p:grpSpPr>
+        <p:grpSp>
+          <p:nvGrpSpPr>
+            <p:cNvPr id="100" name="群組 99">
+              <a:extLst>
+                <a:ext uri="{FF2B5EF4-FFF2-40B4-BE49-F238E27FC236}">
+                  <a16:creationId xmlns:a16="http://schemas.microsoft.com/office/drawing/2014/main" id="{69D0B0B7-B46F-FEBA-99A5-D38A4D19FF00}"/>
+                </a:ext>
+              </a:extLst>
+            </p:cNvPr>
+            <p:cNvGrpSpPr/>
+            <p:nvPr/>
+          </p:nvGrpSpPr>
+          <p:grpSpPr>
+            <a:xfrm>
+              <a:off x="19052965" y="11403788"/>
+              <a:ext cx="833960" cy="675061"/>
+              <a:chOff x="17930179" y="13367954"/>
+              <a:chExt cx="833960" cy="675061"/>
+            </a:xfrm>
+          </p:grpSpPr>
+          <p:pic>
+            <p:nvPicPr>
+              <p:cNvPr id="75" name="Google Shape;103;g3d00297c732_0_7" title="UAV.jpg">
+                <a:extLst>
+                  <a:ext uri="{FF2B5EF4-FFF2-40B4-BE49-F238E27FC236}">
+                    <a16:creationId xmlns:a16="http://schemas.microsoft.com/office/drawing/2014/main" id="{AD9C32FB-FE23-9B7C-7E1C-78DBB316D2E7}"/>
+                  </a:ext>
+                </a:extLst>
+              </p:cNvPr>
+              <p:cNvPicPr preferRelativeResize="0"/>
+              <p:nvPr/>
+            </p:nvPicPr>
+            <p:blipFill rotWithShape="1">
+              <a:blip r:embed="rId5">
+                <a:alphaModFix/>
+              </a:blip>
+              <a:srcRect l="7734" t="19877" r="3576" b="30215"/>
+              <a:stretch>
+                <a:fillRect/>
+              </a:stretch>
+            </p:blipFill>
+            <p:spPr>
+              <a:xfrm>
+                <a:off x="17930179" y="13367954"/>
+                <a:ext cx="833960" cy="478014"/>
+              </a:xfrm>
+              <a:prstGeom prst="rect">
+                <a:avLst/>
+              </a:prstGeom>
+              <a:noFill/>
+              <a:ln>
+                <a:noFill/>
+              </a:ln>
+            </p:spPr>
+          </p:pic>
+          <p:sp>
+            <p:nvSpPr>
+              <p:cNvPr id="93" name="文字方塊 92">
+                <a:extLst>
+                  <a:ext uri="{FF2B5EF4-FFF2-40B4-BE49-F238E27FC236}">
+                    <a16:creationId xmlns:a16="http://schemas.microsoft.com/office/drawing/2014/main" id="{D1190B20-D23C-277E-E775-A632FB17790E}"/>
+                  </a:ext>
+                </a:extLst>
+              </p:cNvPr>
+              <p:cNvSpPr txBox="1"/>
+              <p:nvPr/>
+            </p:nvSpPr>
+            <p:spPr>
+              <a:xfrm>
+                <a:off x="17930179" y="13704461"/>
+                <a:ext cx="833960" cy="338554"/>
+              </a:xfrm>
+              <a:prstGeom prst="rect">
+                <a:avLst/>
+              </a:prstGeom>
+              <a:noFill/>
+            </p:spPr>
+            <p:txBody>
+              <a:bodyPr wrap="square" rtlCol="0">
+                <a:spAutoFit/>
+              </a:bodyPr>
+              <a:lstStyle/>
+              <a:p>
+                <a:r>
+                  <a:rPr lang="en-US" altLang="zh-TW" sz="1600" dirty="0"/>
+                  <a:t>Master</a:t>
+                </a:r>
+                <a:endParaRPr lang="zh-TW" altLang="en-US" sz="1600" dirty="0"/>
+              </a:p>
+            </p:txBody>
+          </p:sp>
+        </p:grpSp>
+        <p:grpSp>
+          <p:nvGrpSpPr>
+            <p:cNvPr id="86" name="群組 85">
+              <a:extLst>
+                <a:ext uri="{FF2B5EF4-FFF2-40B4-BE49-F238E27FC236}">
+                  <a16:creationId xmlns:a16="http://schemas.microsoft.com/office/drawing/2014/main" id="{AB19B950-F53E-3617-0726-8BCDB811FDDA}"/>
+                </a:ext>
+              </a:extLst>
+            </p:cNvPr>
+            <p:cNvGrpSpPr/>
+            <p:nvPr/>
+          </p:nvGrpSpPr>
+          <p:grpSpPr>
+            <a:xfrm>
+              <a:off x="18205594" y="12235073"/>
+              <a:ext cx="833960" cy="747005"/>
+              <a:chOff x="18262261" y="12232351"/>
+              <a:chExt cx="833960" cy="747005"/>
+            </a:xfrm>
+          </p:grpSpPr>
+          <p:pic>
+            <p:nvPicPr>
+              <p:cNvPr id="74" name="Google Shape;103;g3d00297c732_0_7" title="UAV.jpg">
+                <a:extLst>
+                  <a:ext uri="{FF2B5EF4-FFF2-40B4-BE49-F238E27FC236}">
+                    <a16:creationId xmlns:a16="http://schemas.microsoft.com/office/drawing/2014/main" id="{3500FDE5-62BD-93F9-D57A-884C2207B732}"/>
+                  </a:ext>
+                </a:extLst>
+              </p:cNvPr>
+              <p:cNvPicPr preferRelativeResize="0"/>
+              <p:nvPr/>
+            </p:nvPicPr>
+            <p:blipFill rotWithShape="1">
+              <a:blip r:embed="rId5">
+                <a:alphaModFix/>
+              </a:blip>
+              <a:srcRect l="7734" t="19877" r="3576" b="30215"/>
+              <a:stretch>
+                <a:fillRect/>
+              </a:stretch>
+            </p:blipFill>
+            <p:spPr>
+              <a:xfrm>
+                <a:off x="18262261" y="12232351"/>
+                <a:ext cx="833960" cy="544279"/>
+              </a:xfrm>
+              <a:prstGeom prst="rect">
+                <a:avLst/>
+              </a:prstGeom>
+              <a:noFill/>
+              <a:ln>
+                <a:noFill/>
+              </a:ln>
+            </p:spPr>
+          </p:pic>
+          <p:sp>
+            <p:nvSpPr>
+              <p:cNvPr id="83" name="文字方塊 82">
+                <a:extLst>
+                  <a:ext uri="{FF2B5EF4-FFF2-40B4-BE49-F238E27FC236}">
+                    <a16:creationId xmlns:a16="http://schemas.microsoft.com/office/drawing/2014/main" id="{7CDACE7F-7D65-5890-8DEC-A1557147FFC2}"/>
+                  </a:ext>
+                </a:extLst>
+              </p:cNvPr>
+              <p:cNvSpPr txBox="1"/>
+              <p:nvPr/>
+            </p:nvSpPr>
+            <p:spPr>
+              <a:xfrm>
+                <a:off x="18318021" y="12640802"/>
+                <a:ext cx="695691" cy="338554"/>
+              </a:xfrm>
+              <a:prstGeom prst="rect">
+                <a:avLst/>
+              </a:prstGeom>
+              <a:noFill/>
+            </p:spPr>
+            <p:txBody>
+              <a:bodyPr wrap="square" rtlCol="0">
+                <a:spAutoFit/>
+              </a:bodyPr>
+              <a:lstStyle/>
+              <a:p>
+                <a:r>
+                  <a:rPr lang="en-US" altLang="zh-TW" sz="1600" dirty="0"/>
+                  <a:t>Slave</a:t>
+                </a:r>
+                <a:endParaRPr lang="zh-TW" altLang="en-US" sz="1600" dirty="0"/>
+              </a:p>
+            </p:txBody>
+          </p:sp>
+        </p:grpSp>
+        <p:grpSp>
+          <p:nvGrpSpPr>
+            <p:cNvPr id="90" name="群組 89">
+              <a:extLst>
+                <a:ext uri="{FF2B5EF4-FFF2-40B4-BE49-F238E27FC236}">
+                  <a16:creationId xmlns:a16="http://schemas.microsoft.com/office/drawing/2014/main" id="{DA614BED-9A5B-91CB-F46C-44C17F760B9D}"/>
+                </a:ext>
+              </a:extLst>
+            </p:cNvPr>
+            <p:cNvGrpSpPr/>
+            <p:nvPr/>
+          </p:nvGrpSpPr>
+          <p:grpSpPr>
+            <a:xfrm>
+              <a:off x="19052965" y="12369168"/>
+              <a:ext cx="833960" cy="747005"/>
+              <a:chOff x="18262261" y="12232351"/>
+              <a:chExt cx="833960" cy="747005"/>
+            </a:xfrm>
+          </p:grpSpPr>
+          <p:pic>
+            <p:nvPicPr>
+              <p:cNvPr id="91" name="Google Shape;103;g3d00297c732_0_7" title="UAV.jpg">
+                <a:extLst>
+                  <a:ext uri="{FF2B5EF4-FFF2-40B4-BE49-F238E27FC236}">
+                    <a16:creationId xmlns:a16="http://schemas.microsoft.com/office/drawing/2014/main" id="{0A77D03A-7E51-B83F-B285-E10C2B264559}"/>
+                  </a:ext>
+                </a:extLst>
+              </p:cNvPr>
+              <p:cNvPicPr preferRelativeResize="0"/>
+              <p:nvPr/>
+            </p:nvPicPr>
+            <p:blipFill rotWithShape="1">
+              <a:blip r:embed="rId5">
+                <a:alphaModFix/>
+              </a:blip>
+              <a:srcRect l="7734" t="19877" r="3576" b="30215"/>
+              <a:stretch>
+                <a:fillRect/>
+              </a:stretch>
+            </p:blipFill>
+            <p:spPr>
+              <a:xfrm>
+                <a:off x="18262261" y="12232351"/>
+                <a:ext cx="833960" cy="544279"/>
+              </a:xfrm>
+              <a:prstGeom prst="rect">
+                <a:avLst/>
+              </a:prstGeom>
+              <a:noFill/>
+              <a:ln>
+                <a:noFill/>
+              </a:ln>
+            </p:spPr>
+          </p:pic>
+          <p:sp>
+            <p:nvSpPr>
+              <p:cNvPr id="92" name="文字方塊 91">
+                <a:extLst>
+                  <a:ext uri="{FF2B5EF4-FFF2-40B4-BE49-F238E27FC236}">
+                    <a16:creationId xmlns:a16="http://schemas.microsoft.com/office/drawing/2014/main" id="{27E41979-8B91-2ED1-CD88-C9CB9E405878}"/>
+                  </a:ext>
+                </a:extLst>
+              </p:cNvPr>
+              <p:cNvSpPr txBox="1"/>
+              <p:nvPr/>
+            </p:nvSpPr>
+            <p:spPr>
+              <a:xfrm>
+                <a:off x="18318021" y="12640802"/>
+                <a:ext cx="695691" cy="338554"/>
+              </a:xfrm>
+              <a:prstGeom prst="rect">
+                <a:avLst/>
+              </a:prstGeom>
+              <a:noFill/>
+            </p:spPr>
+            <p:txBody>
+              <a:bodyPr wrap="square" rtlCol="0">
+                <a:spAutoFit/>
+              </a:bodyPr>
+              <a:lstStyle/>
+              <a:p>
+                <a:r>
+                  <a:rPr lang="en-US" altLang="zh-TW" sz="1600" dirty="0"/>
+                  <a:t>Slave</a:t>
+                </a:r>
+                <a:endParaRPr lang="zh-TW" altLang="en-US" sz="1600" dirty="0"/>
+              </a:p>
+            </p:txBody>
+          </p:sp>
+        </p:grpSp>
+        <p:grpSp>
+          <p:nvGrpSpPr>
+            <p:cNvPr id="87" name="群組 86">
+              <a:extLst>
+                <a:ext uri="{FF2B5EF4-FFF2-40B4-BE49-F238E27FC236}">
+                  <a16:creationId xmlns:a16="http://schemas.microsoft.com/office/drawing/2014/main" id="{3D2FD327-236D-58DC-7045-FBB4C4CCB516}"/>
+                </a:ext>
+              </a:extLst>
+            </p:cNvPr>
+            <p:cNvGrpSpPr/>
+            <p:nvPr/>
+          </p:nvGrpSpPr>
+          <p:grpSpPr>
+            <a:xfrm>
+              <a:off x="19836020" y="12267299"/>
+              <a:ext cx="833960" cy="747005"/>
+              <a:chOff x="18262261" y="12232351"/>
+              <a:chExt cx="833960" cy="747005"/>
+            </a:xfrm>
+          </p:grpSpPr>
+          <p:pic>
+            <p:nvPicPr>
+              <p:cNvPr id="88" name="Google Shape;103;g3d00297c732_0_7" title="UAV.jpg">
+                <a:extLst>
+                  <a:ext uri="{FF2B5EF4-FFF2-40B4-BE49-F238E27FC236}">
+                    <a16:creationId xmlns:a16="http://schemas.microsoft.com/office/drawing/2014/main" id="{17EA5618-7880-300D-82D1-DD8ED36E4369}"/>
+                  </a:ext>
+                </a:extLst>
+              </p:cNvPr>
+              <p:cNvPicPr preferRelativeResize="0"/>
+              <p:nvPr/>
+            </p:nvPicPr>
+            <p:blipFill rotWithShape="1">
+              <a:blip r:embed="rId5">
+                <a:alphaModFix/>
+              </a:blip>
+              <a:srcRect l="7734" t="19877" r="3576" b="30215"/>
+              <a:stretch>
+                <a:fillRect/>
+              </a:stretch>
+            </p:blipFill>
+            <p:spPr>
+              <a:xfrm>
+                <a:off x="18262261" y="12232351"/>
+                <a:ext cx="833960" cy="544279"/>
+              </a:xfrm>
+              <a:prstGeom prst="rect">
+                <a:avLst/>
+              </a:prstGeom>
+              <a:noFill/>
+              <a:ln>
+                <a:noFill/>
+              </a:ln>
+            </p:spPr>
+          </p:pic>
+          <p:sp>
+            <p:nvSpPr>
+              <p:cNvPr id="89" name="文字方塊 88">
+                <a:extLst>
+                  <a:ext uri="{FF2B5EF4-FFF2-40B4-BE49-F238E27FC236}">
+                    <a16:creationId xmlns:a16="http://schemas.microsoft.com/office/drawing/2014/main" id="{77A0BDAA-72F9-369C-E034-1C36D21D9D03}"/>
+                  </a:ext>
+                </a:extLst>
+              </p:cNvPr>
+              <p:cNvSpPr txBox="1"/>
+              <p:nvPr/>
+            </p:nvSpPr>
+            <p:spPr>
+              <a:xfrm>
+                <a:off x="18318021" y="12640802"/>
+                <a:ext cx="695691" cy="338554"/>
+              </a:xfrm>
+              <a:prstGeom prst="rect">
+                <a:avLst/>
+              </a:prstGeom>
+              <a:noFill/>
+            </p:spPr>
+            <p:txBody>
+              <a:bodyPr wrap="square" rtlCol="0">
+                <a:spAutoFit/>
+              </a:bodyPr>
+              <a:lstStyle/>
+              <a:p>
+                <a:r>
+                  <a:rPr lang="en-US" altLang="zh-TW" sz="1600" dirty="0"/>
+                  <a:t>Slave</a:t>
+                </a:r>
+                <a:endParaRPr lang="zh-TW" altLang="en-US" sz="1600" dirty="0"/>
+              </a:p>
+            </p:txBody>
+          </p:sp>
+        </p:grpSp>
+        <p:sp>
+          <p:nvSpPr>
+            <p:cNvPr id="78" name="Google Shape;205;g3d00297c732_0_53">
+              <a:extLst>
+                <a:ext uri="{FF2B5EF4-FFF2-40B4-BE49-F238E27FC236}">
+                  <a16:creationId xmlns:a16="http://schemas.microsoft.com/office/drawing/2014/main" id="{DDD8F5CA-4E26-D90A-94FF-E0B28C59C028}"/>
+                </a:ext>
+              </a:extLst>
+            </p:cNvPr>
+            <p:cNvSpPr/>
+            <p:nvPr/>
+          </p:nvSpPr>
+          <p:spPr>
+            <a:xfrm rot="18163514">
+              <a:off x="18735312" y="12016201"/>
+              <a:ext cx="392101" cy="206100"/>
+            </a:xfrm>
+            <a:prstGeom prst="rightArrow">
+              <a:avLst>
+                <a:gd name="adj1" fmla="val 50000"/>
+                <a:gd name="adj2" fmla="val 50000"/>
+              </a:avLst>
+            </a:prstGeom>
+            <a:solidFill>
+              <a:srgbClr val="FFC000"/>
+            </a:solidFill>
+            <a:ln>
+              <a:noFill/>
+            </a:ln>
+          </p:spPr>
+          <p:txBody>
+            <a:bodyPr spcFirstLastPara="1" wrap="square" lIns="66850" tIns="66850" rIns="66850" bIns="66850" anchor="ctr" anchorCtr="0">
+              <a:noAutofit/>
+            </a:bodyPr>
+            <a:lstStyle>
+              <a:defPPr marR="0" lvl="0" algn="l" rtl="0">
+                <a:lnSpc>
+                  <a:spcPct val="100000"/>
+                </a:lnSpc>
+                <a:spcBef>
+                  <a:spcPts val="0"/>
+                </a:spcBef>
+                <a:spcAft>
+                  <a:spcPts val="0"/>
+                </a:spcAft>
+              </a:defPPr>
+              <a:lvl1pPr marR="0" lvl="0" algn="l" rtl="0">
+                <a:lnSpc>
+                  <a:spcPct val="100000"/>
+                </a:lnSpc>
+                <a:spcBef>
+                  <a:spcPts val="0"/>
+                </a:spcBef>
+                <a:spcAft>
+                  <a:spcPts val="0"/>
+                </a:spcAft>
+                <a:buClr>
+                  <a:srgbClr val="000000"/>
+                </a:buClr>
+                <a:buFont typeface="Arial"/>
+                <a:defRPr sz="1400" b="0" i="0" u="none" strike="noStrike" cap="none">
+                  <a:solidFill>
+                    <a:srgbClr val="000000"/>
+                  </a:solidFill>
+                  <a:latin typeface="Arial"/>
+                  <a:ea typeface="Arial"/>
+                  <a:cs typeface="Arial"/>
+                  <a:sym typeface="Arial"/>
+                </a:defRPr>
+              </a:lvl1pPr>
+              <a:lvl2pPr marR="0" lvl="1" algn="l" rtl="0">
+                <a:lnSpc>
+                  <a:spcPct val="100000"/>
+                </a:lnSpc>
+                <a:spcBef>
+                  <a:spcPts val="0"/>
+                </a:spcBef>
+                <a:spcAft>
+                  <a:spcPts val="0"/>
+                </a:spcAft>
+                <a:buClr>
+                  <a:srgbClr val="000000"/>
+                </a:buClr>
+                <a:buFont typeface="Arial"/>
+                <a:defRPr sz="1400" b="0" i="0" u="none" strike="noStrike" cap="none">
+                  <a:solidFill>
+                    <a:srgbClr val="000000"/>
+                  </a:solidFill>
+                  <a:latin typeface="Arial"/>
+                  <a:ea typeface="Arial"/>
+                  <a:cs typeface="Arial"/>
+                  <a:sym typeface="Arial"/>
+                </a:defRPr>
+              </a:lvl2pPr>
+              <a:lvl3pPr marR="0" lvl="2" algn="l" rtl="0">
+                <a:lnSpc>
+                  <a:spcPct val="100000"/>
+                </a:lnSpc>
+                <a:spcBef>
+                  <a:spcPts val="0"/>
+                </a:spcBef>
+                <a:spcAft>
+                  <a:spcPts val="0"/>
+                </a:spcAft>
+                <a:buClr>
+                  <a:srgbClr val="000000"/>
+                </a:buClr>
+                <a:buFont typeface="Arial"/>
+                <a:defRPr sz="1400" b="0" i="0" u="none" strike="noStrike" cap="none">
+                  <a:solidFill>
+                    <a:srgbClr val="000000"/>
+                  </a:solidFill>
+                  <a:latin typeface="Arial"/>
+                  <a:ea typeface="Arial"/>
+                  <a:cs typeface="Arial"/>
+                  <a:sym typeface="Arial"/>
+                </a:defRPr>
+              </a:lvl3pPr>
+              <a:lvl4pPr marR="0" lvl="3" algn="l" rtl="0">
+                <a:lnSpc>
+                  <a:spcPct val="100000"/>
+                </a:lnSpc>
+                <a:spcBef>
+                  <a:spcPts val="0"/>
+                </a:spcBef>
+                <a:spcAft>
+                  <a:spcPts val="0"/>
+                </a:spcAft>
+                <a:buClr>
+                  <a:srgbClr val="000000"/>
+                </a:buClr>
+                <a:buFont typeface="Arial"/>
+                <a:defRPr sz="1400" b="0" i="0" u="none" strike="noStrike" cap="none">
+                  <a:solidFill>
+                    <a:srgbClr val="000000"/>
+                  </a:solidFill>
+                  <a:latin typeface="Arial"/>
+                  <a:ea typeface="Arial"/>
+                  <a:cs typeface="Arial"/>
+                  <a:sym typeface="Arial"/>
+                </a:defRPr>
+              </a:lvl4pPr>
+              <a:lvl5pPr marR="0" lvl="4" algn="l" rtl="0">
+                <a:lnSpc>
+                  <a:spcPct val="100000"/>
+                </a:lnSpc>
+                <a:spcBef>
+                  <a:spcPts val="0"/>
+                </a:spcBef>
+                <a:spcAft>
+                  <a:spcPts val="0"/>
+                </a:spcAft>
+                <a:buClr>
+                  <a:srgbClr val="000000"/>
+                </a:buClr>
+                <a:buFont typeface="Arial"/>
+                <a:defRPr sz="1400" b="0" i="0" u="none" strike="noStrike" cap="none">
+                  <a:solidFill>
+                    <a:srgbClr val="000000"/>
+                  </a:solidFill>
+                  <a:latin typeface="Arial"/>
+                  <a:ea typeface="Arial"/>
+                  <a:cs typeface="Arial"/>
+                  <a:sym typeface="Arial"/>
+                </a:defRPr>
+              </a:lvl5pPr>
+              <a:lvl6pPr marR="0" lvl="5" algn="l" rtl="0">
+                <a:lnSpc>
+                  <a:spcPct val="100000"/>
+                </a:lnSpc>
+                <a:spcBef>
+                  <a:spcPts val="0"/>
+                </a:spcBef>
+                <a:spcAft>
+                  <a:spcPts val="0"/>
+                </a:spcAft>
+                <a:buClr>
+                  <a:srgbClr val="000000"/>
+                </a:buClr>
+                <a:buFont typeface="Arial"/>
+                <a:defRPr sz="1400" b="0" i="0" u="none" strike="noStrike" cap="none">
+                  <a:solidFill>
+                    <a:srgbClr val="000000"/>
+                  </a:solidFill>
+                  <a:latin typeface="Arial"/>
+                  <a:ea typeface="Arial"/>
+                  <a:cs typeface="Arial"/>
+                  <a:sym typeface="Arial"/>
+                </a:defRPr>
+              </a:lvl6pPr>
+              <a:lvl7pPr marR="0" lvl="6" algn="l" rtl="0">
+                <a:lnSpc>
+                  <a:spcPct val="100000"/>
+                </a:lnSpc>
+                <a:spcBef>
+                  <a:spcPts val="0"/>
+                </a:spcBef>
+                <a:spcAft>
+                  <a:spcPts val="0"/>
+                </a:spcAft>
+                <a:buClr>
+                  <a:srgbClr val="000000"/>
+                </a:buClr>
+                <a:buFont typeface="Arial"/>
+                <a:defRPr sz="1400" b="0" i="0" u="none" strike="noStrike" cap="none">
+                  <a:solidFill>
+                    <a:srgbClr val="000000"/>
+                  </a:solidFill>
+                  <a:latin typeface="Arial"/>
+                  <a:ea typeface="Arial"/>
+                  <a:cs typeface="Arial"/>
+                  <a:sym typeface="Arial"/>
+                </a:defRPr>
+              </a:lvl7pPr>
+              <a:lvl8pPr marR="0" lvl="7" algn="l" rtl="0">
+                <a:lnSpc>
+                  <a:spcPct val="100000"/>
+                </a:lnSpc>
+                <a:spcBef>
+                  <a:spcPts val="0"/>
+                </a:spcBef>
+                <a:spcAft>
+                  <a:spcPts val="0"/>
+                </a:spcAft>
+                <a:buClr>
+                  <a:srgbClr val="000000"/>
+                </a:buClr>
+                <a:buFont typeface="Arial"/>
+                <a:defRPr sz="1400" b="0" i="0" u="none" strike="noStrike" cap="none">
+                  <a:solidFill>
+                    <a:srgbClr val="000000"/>
+                  </a:solidFill>
+                  <a:latin typeface="Arial"/>
+                  <a:ea typeface="Arial"/>
+                  <a:cs typeface="Arial"/>
+                  <a:sym typeface="Arial"/>
+                </a:defRPr>
+              </a:lvl8pPr>
+              <a:lvl9pPr marR="0" lvl="8" algn="l" rtl="0">
+                <a:lnSpc>
+                  <a:spcPct val="100000"/>
+                </a:lnSpc>
+                <a:spcBef>
+                  <a:spcPts val="0"/>
+                </a:spcBef>
+                <a:spcAft>
+                  <a:spcPts val="0"/>
+                </a:spcAft>
+                <a:buClr>
+                  <a:srgbClr val="000000"/>
+                </a:buClr>
+                <a:buFont typeface="Arial"/>
+                <a:defRPr sz="1400" b="0" i="0" u="none" strike="noStrike" cap="none">
+                  <a:solidFill>
+                    <a:srgbClr val="000000"/>
+                  </a:solidFill>
+                  <a:latin typeface="Arial"/>
+                  <a:ea typeface="Arial"/>
+                  <a:cs typeface="Arial"/>
+                  <a:sym typeface="Arial"/>
+                </a:defRPr>
+              </a:lvl9pPr>
+            </a:lstStyle>
+            <a:p>
+              <a:pPr marL="0" marR="0" lvl="0" indent="0" algn="ctr" rtl="0">
+                <a:lnSpc>
+                  <a:spcPct val="100000"/>
+                </a:lnSpc>
+                <a:spcBef>
+                  <a:spcPts val="0"/>
+                </a:spcBef>
+                <a:spcAft>
+                  <a:spcPts val="0"/>
+                </a:spcAft>
+                <a:buClr>
+                  <a:srgbClr val="000000"/>
+                </a:buClr>
+                <a:buSzPts val="1023"/>
+                <a:buFont typeface="Arial"/>
+                <a:buNone/>
+              </a:pPr>
+              <a:endParaRPr sz="1022" b="0" i="0" u="none" strike="noStrike" cap="none" dirty="0">
+                <a:solidFill>
+                  <a:srgbClr val="000000"/>
+                </a:solidFill>
+                <a:latin typeface="Calibri"/>
+                <a:ea typeface="Calibri"/>
+                <a:cs typeface="Calibri"/>
+                <a:sym typeface="Calibri"/>
+              </a:endParaRPr>
+            </a:p>
+          </p:txBody>
+        </p:sp>
+        <p:sp>
+          <p:nvSpPr>
+            <p:cNvPr id="79" name="Google Shape;205;g3d00297c732_0_53">
+              <a:extLst>
+                <a:ext uri="{FF2B5EF4-FFF2-40B4-BE49-F238E27FC236}">
+                  <a16:creationId xmlns:a16="http://schemas.microsoft.com/office/drawing/2014/main" id="{1E362129-B430-6078-D529-42FEEC95C386}"/>
+                </a:ext>
+              </a:extLst>
+            </p:cNvPr>
+            <p:cNvSpPr/>
+            <p:nvPr/>
+          </p:nvSpPr>
+          <p:spPr>
+            <a:xfrm rot="16200000">
+              <a:off x="19260520" y="12101983"/>
+              <a:ext cx="392101" cy="206100"/>
+            </a:xfrm>
+            <a:prstGeom prst="rightArrow">
+              <a:avLst>
+                <a:gd name="adj1" fmla="val 50000"/>
+                <a:gd name="adj2" fmla="val 50000"/>
+              </a:avLst>
+            </a:prstGeom>
+            <a:solidFill>
+              <a:srgbClr val="FFC000"/>
+            </a:solidFill>
+            <a:ln>
+              <a:noFill/>
+            </a:ln>
+          </p:spPr>
+          <p:txBody>
+            <a:bodyPr spcFirstLastPara="1" wrap="square" lIns="66850" tIns="66850" rIns="66850" bIns="66850" anchor="ctr" anchorCtr="0">
+              <a:noAutofit/>
+            </a:bodyPr>
+            <a:lstStyle>
+              <a:defPPr marR="0" lvl="0" algn="l" rtl="0">
+                <a:lnSpc>
+                  <a:spcPct val="100000"/>
+                </a:lnSpc>
+                <a:spcBef>
+                  <a:spcPts val="0"/>
+                </a:spcBef>
+                <a:spcAft>
+                  <a:spcPts val="0"/>
+                </a:spcAft>
+              </a:defPPr>
+              <a:lvl1pPr marR="0" lvl="0" algn="l" rtl="0">
+                <a:lnSpc>
+                  <a:spcPct val="100000"/>
+                </a:lnSpc>
+                <a:spcBef>
+                  <a:spcPts val="0"/>
+                </a:spcBef>
+                <a:spcAft>
+                  <a:spcPts val="0"/>
+                </a:spcAft>
+                <a:buClr>
+                  <a:srgbClr val="000000"/>
+                </a:buClr>
+                <a:buFont typeface="Arial"/>
+                <a:defRPr sz="1400" b="0" i="0" u="none" strike="noStrike" cap="none">
+                  <a:solidFill>
+                    <a:srgbClr val="000000"/>
+                  </a:solidFill>
+                  <a:latin typeface="Arial"/>
+                  <a:ea typeface="Arial"/>
+                  <a:cs typeface="Arial"/>
+                  <a:sym typeface="Arial"/>
+                </a:defRPr>
+              </a:lvl1pPr>
+              <a:lvl2pPr marR="0" lvl="1" algn="l" rtl="0">
+                <a:lnSpc>
+                  <a:spcPct val="100000"/>
+                </a:lnSpc>
+                <a:spcBef>
+                  <a:spcPts val="0"/>
+                </a:spcBef>
+                <a:spcAft>
+                  <a:spcPts val="0"/>
+                </a:spcAft>
+                <a:buClr>
+                  <a:srgbClr val="000000"/>
+                </a:buClr>
+                <a:buFont typeface="Arial"/>
+                <a:defRPr sz="1400" b="0" i="0" u="none" strike="noStrike" cap="none">
+                  <a:solidFill>
+                    <a:srgbClr val="000000"/>
+                  </a:solidFill>
+                  <a:latin typeface="Arial"/>
+                  <a:ea typeface="Arial"/>
+                  <a:cs typeface="Arial"/>
+                  <a:sym typeface="Arial"/>
+                </a:defRPr>
+              </a:lvl2pPr>
+              <a:lvl3pPr marR="0" lvl="2" algn="l" rtl="0">
+                <a:lnSpc>
+                  <a:spcPct val="100000"/>
+                </a:lnSpc>
+                <a:spcBef>
+                  <a:spcPts val="0"/>
+                </a:spcBef>
+                <a:spcAft>
+                  <a:spcPts val="0"/>
+                </a:spcAft>
+                <a:buClr>
+                  <a:srgbClr val="000000"/>
+                </a:buClr>
+                <a:buFont typeface="Arial"/>
+                <a:defRPr sz="1400" b="0" i="0" u="none" strike="noStrike" cap="none">
+                  <a:solidFill>
+                    <a:srgbClr val="000000"/>
+                  </a:solidFill>
+                  <a:latin typeface="Arial"/>
+                  <a:ea typeface="Arial"/>
+                  <a:cs typeface="Arial"/>
+                  <a:sym typeface="Arial"/>
+                </a:defRPr>
+              </a:lvl3pPr>
+              <a:lvl4pPr marR="0" lvl="3" algn="l" rtl="0">
+                <a:lnSpc>
+                  <a:spcPct val="100000"/>
+                </a:lnSpc>
+                <a:spcBef>
+                  <a:spcPts val="0"/>
+                </a:spcBef>
+                <a:spcAft>
+                  <a:spcPts val="0"/>
+                </a:spcAft>
+                <a:buClr>
+                  <a:srgbClr val="000000"/>
+                </a:buClr>
+                <a:buFont typeface="Arial"/>
+                <a:defRPr sz="1400" b="0" i="0" u="none" strike="noStrike" cap="none">
+                  <a:solidFill>
+                    <a:srgbClr val="000000"/>
+                  </a:solidFill>
+                  <a:latin typeface="Arial"/>
+                  <a:ea typeface="Arial"/>
+                  <a:cs typeface="Arial"/>
+                  <a:sym typeface="Arial"/>
+                </a:defRPr>
+              </a:lvl4pPr>
+              <a:lvl5pPr marR="0" lvl="4" algn="l" rtl="0">
+                <a:lnSpc>
+                  <a:spcPct val="100000"/>
+                </a:lnSpc>
+                <a:spcBef>
+                  <a:spcPts val="0"/>
+                </a:spcBef>
+                <a:spcAft>
+                  <a:spcPts val="0"/>
+                </a:spcAft>
+                <a:buClr>
+                  <a:srgbClr val="000000"/>
+                </a:buClr>
+                <a:buFont typeface="Arial"/>
+                <a:defRPr sz="1400" b="0" i="0" u="none" strike="noStrike" cap="none">
+                  <a:solidFill>
+                    <a:srgbClr val="000000"/>
+                  </a:solidFill>
+                  <a:latin typeface="Arial"/>
+                  <a:ea typeface="Arial"/>
+                  <a:cs typeface="Arial"/>
+                  <a:sym typeface="Arial"/>
+                </a:defRPr>
+              </a:lvl5pPr>
+              <a:lvl6pPr marR="0" lvl="5" algn="l" rtl="0">
+                <a:lnSpc>
+                  <a:spcPct val="100000"/>
+                </a:lnSpc>
+                <a:spcBef>
+                  <a:spcPts val="0"/>
+                </a:spcBef>
+                <a:spcAft>
+                  <a:spcPts val="0"/>
+                </a:spcAft>
+                <a:buClr>
+                  <a:srgbClr val="000000"/>
+                </a:buClr>
+                <a:buFont typeface="Arial"/>
+                <a:defRPr sz="1400" b="0" i="0" u="none" strike="noStrike" cap="none">
+                  <a:solidFill>
+                    <a:srgbClr val="000000"/>
+                  </a:solidFill>
+                  <a:latin typeface="Arial"/>
+                  <a:ea typeface="Arial"/>
+                  <a:cs typeface="Arial"/>
+                  <a:sym typeface="Arial"/>
+                </a:defRPr>
+              </a:lvl6pPr>
+              <a:lvl7pPr marR="0" lvl="6" algn="l" rtl="0">
+                <a:lnSpc>
+                  <a:spcPct val="100000"/>
+                </a:lnSpc>
+                <a:spcBef>
+                  <a:spcPts val="0"/>
+                </a:spcBef>
+                <a:spcAft>
+                  <a:spcPts val="0"/>
+                </a:spcAft>
+                <a:buClr>
+                  <a:srgbClr val="000000"/>
+                </a:buClr>
+                <a:buFont typeface="Arial"/>
+                <a:defRPr sz="1400" b="0" i="0" u="none" strike="noStrike" cap="none">
+                  <a:solidFill>
+                    <a:srgbClr val="000000"/>
+                  </a:solidFill>
+                  <a:latin typeface="Arial"/>
+                  <a:ea typeface="Arial"/>
+                  <a:cs typeface="Arial"/>
+                  <a:sym typeface="Arial"/>
+                </a:defRPr>
+              </a:lvl7pPr>
+              <a:lvl8pPr marR="0" lvl="7" algn="l" rtl="0">
+                <a:lnSpc>
+                  <a:spcPct val="100000"/>
+                </a:lnSpc>
+                <a:spcBef>
+                  <a:spcPts val="0"/>
+                </a:spcBef>
+                <a:spcAft>
+                  <a:spcPts val="0"/>
+                </a:spcAft>
+                <a:buClr>
+                  <a:srgbClr val="000000"/>
+                </a:buClr>
+                <a:buFont typeface="Arial"/>
+                <a:defRPr sz="1400" b="0" i="0" u="none" strike="noStrike" cap="none">
+                  <a:solidFill>
+                    <a:srgbClr val="000000"/>
+                  </a:solidFill>
+                  <a:latin typeface="Arial"/>
+                  <a:ea typeface="Arial"/>
+                  <a:cs typeface="Arial"/>
+                  <a:sym typeface="Arial"/>
+                </a:defRPr>
+              </a:lvl8pPr>
+              <a:lvl9pPr marR="0" lvl="8" algn="l" rtl="0">
+                <a:lnSpc>
+                  <a:spcPct val="100000"/>
+                </a:lnSpc>
+                <a:spcBef>
+                  <a:spcPts val="0"/>
+                </a:spcBef>
+                <a:spcAft>
+                  <a:spcPts val="0"/>
+                </a:spcAft>
+                <a:buClr>
+                  <a:srgbClr val="000000"/>
+                </a:buClr>
+                <a:buFont typeface="Arial"/>
+                <a:defRPr sz="1400" b="0" i="0" u="none" strike="noStrike" cap="none">
+                  <a:solidFill>
+                    <a:srgbClr val="000000"/>
+                  </a:solidFill>
+                  <a:latin typeface="Arial"/>
+                  <a:ea typeface="Arial"/>
+                  <a:cs typeface="Arial"/>
+                  <a:sym typeface="Arial"/>
+                </a:defRPr>
+              </a:lvl9pPr>
+            </a:lstStyle>
+            <a:p>
+              <a:pPr marL="0" marR="0" lvl="0" indent="0" algn="ctr" rtl="0">
+                <a:lnSpc>
+                  <a:spcPct val="100000"/>
+                </a:lnSpc>
+                <a:spcBef>
+                  <a:spcPts val="0"/>
+                </a:spcBef>
+                <a:spcAft>
+                  <a:spcPts val="0"/>
+                </a:spcAft>
+                <a:buClr>
+                  <a:srgbClr val="000000"/>
+                </a:buClr>
+                <a:buSzPts val="1023"/>
+                <a:buFont typeface="Arial"/>
+                <a:buNone/>
+              </a:pPr>
+              <a:endParaRPr sz="1022" b="0" i="0" u="none" strike="noStrike" cap="none" dirty="0">
+                <a:solidFill>
+                  <a:srgbClr val="000000"/>
+                </a:solidFill>
+                <a:latin typeface="Calibri"/>
+                <a:ea typeface="Calibri"/>
+                <a:cs typeface="Calibri"/>
+                <a:sym typeface="Calibri"/>
+              </a:endParaRPr>
+            </a:p>
+          </p:txBody>
+        </p:sp>
+        <p:sp>
+          <p:nvSpPr>
+            <p:cNvPr id="80" name="Google Shape;205;g3d00297c732_0_53">
+              <a:extLst>
+                <a:ext uri="{FF2B5EF4-FFF2-40B4-BE49-F238E27FC236}">
+                  <a16:creationId xmlns:a16="http://schemas.microsoft.com/office/drawing/2014/main" id="{76B190AF-97DA-FB2A-86DB-0D63E94DCE35}"/>
+                </a:ext>
+              </a:extLst>
+            </p:cNvPr>
+            <p:cNvSpPr/>
+            <p:nvPr/>
+          </p:nvSpPr>
+          <p:spPr>
+            <a:xfrm rot="13940948">
+              <a:off x="19773319" y="11997080"/>
+              <a:ext cx="392101" cy="206100"/>
+            </a:xfrm>
+            <a:prstGeom prst="rightArrow">
+              <a:avLst>
+                <a:gd name="adj1" fmla="val 50000"/>
+                <a:gd name="adj2" fmla="val 50000"/>
+              </a:avLst>
+            </a:prstGeom>
+            <a:solidFill>
+              <a:srgbClr val="FFC000"/>
+            </a:solidFill>
+            <a:ln>
+              <a:noFill/>
+            </a:ln>
+          </p:spPr>
+          <p:txBody>
+            <a:bodyPr spcFirstLastPara="1" wrap="square" lIns="66850" tIns="66850" rIns="66850" bIns="66850" anchor="ctr" anchorCtr="0">
+              <a:noAutofit/>
+            </a:bodyPr>
+            <a:lstStyle>
+              <a:defPPr marR="0" lvl="0" algn="l" rtl="0">
+                <a:lnSpc>
+                  <a:spcPct val="100000"/>
+                </a:lnSpc>
+                <a:spcBef>
+                  <a:spcPts val="0"/>
+                </a:spcBef>
+                <a:spcAft>
+                  <a:spcPts val="0"/>
+                </a:spcAft>
+              </a:defPPr>
+              <a:lvl1pPr marR="0" lvl="0" algn="l" rtl="0">
+                <a:lnSpc>
+                  <a:spcPct val="100000"/>
+                </a:lnSpc>
+                <a:spcBef>
+                  <a:spcPts val="0"/>
+                </a:spcBef>
+                <a:spcAft>
+                  <a:spcPts val="0"/>
+                </a:spcAft>
+                <a:buClr>
+                  <a:srgbClr val="000000"/>
+                </a:buClr>
+                <a:buFont typeface="Arial"/>
+                <a:defRPr sz="1400" b="0" i="0" u="none" strike="noStrike" cap="none">
+                  <a:solidFill>
+                    <a:srgbClr val="000000"/>
+                  </a:solidFill>
+                  <a:latin typeface="Arial"/>
+                  <a:ea typeface="Arial"/>
+                  <a:cs typeface="Arial"/>
+                  <a:sym typeface="Arial"/>
+                </a:defRPr>
+              </a:lvl1pPr>
+              <a:lvl2pPr marR="0" lvl="1" algn="l" rtl="0">
+                <a:lnSpc>
+                  <a:spcPct val="100000"/>
+                </a:lnSpc>
+                <a:spcBef>
+                  <a:spcPts val="0"/>
+                </a:spcBef>
+                <a:spcAft>
+                  <a:spcPts val="0"/>
+                </a:spcAft>
+                <a:buClr>
+                  <a:srgbClr val="000000"/>
+                </a:buClr>
+                <a:buFont typeface="Arial"/>
+                <a:defRPr sz="1400" b="0" i="0" u="none" strike="noStrike" cap="none">
+                  <a:solidFill>
+                    <a:srgbClr val="000000"/>
+                  </a:solidFill>
+                  <a:latin typeface="Arial"/>
+                  <a:ea typeface="Arial"/>
+                  <a:cs typeface="Arial"/>
+                  <a:sym typeface="Arial"/>
+                </a:defRPr>
+              </a:lvl2pPr>
+              <a:lvl3pPr marR="0" lvl="2" algn="l" rtl="0">
+                <a:lnSpc>
+                  <a:spcPct val="100000"/>
+                </a:lnSpc>
+                <a:spcBef>
+                  <a:spcPts val="0"/>
+                </a:spcBef>
+                <a:spcAft>
+                  <a:spcPts val="0"/>
+                </a:spcAft>
+                <a:buClr>
+                  <a:srgbClr val="000000"/>
+                </a:buClr>
+                <a:buFont typeface="Arial"/>
+                <a:defRPr sz="1400" b="0" i="0" u="none" strike="noStrike" cap="none">
+                  <a:solidFill>
+                    <a:srgbClr val="000000"/>
+                  </a:solidFill>
+                  <a:latin typeface="Arial"/>
+                  <a:ea typeface="Arial"/>
+                  <a:cs typeface="Arial"/>
+                  <a:sym typeface="Arial"/>
+                </a:defRPr>
+              </a:lvl3pPr>
+              <a:lvl4pPr marR="0" lvl="3" algn="l" rtl="0">
+                <a:lnSpc>
+                  <a:spcPct val="100000"/>
+                </a:lnSpc>
+                <a:spcBef>
+                  <a:spcPts val="0"/>
+                </a:spcBef>
+                <a:spcAft>
+                  <a:spcPts val="0"/>
+                </a:spcAft>
+                <a:buClr>
+                  <a:srgbClr val="000000"/>
+                </a:buClr>
+                <a:buFont typeface="Arial"/>
+                <a:defRPr sz="1400" b="0" i="0" u="none" strike="noStrike" cap="none">
+                  <a:solidFill>
+                    <a:srgbClr val="000000"/>
+                  </a:solidFill>
+                  <a:latin typeface="Arial"/>
+                  <a:ea typeface="Arial"/>
+                  <a:cs typeface="Arial"/>
+                  <a:sym typeface="Arial"/>
+                </a:defRPr>
+              </a:lvl4pPr>
+              <a:lvl5pPr marR="0" lvl="4" algn="l" rtl="0">
+                <a:lnSpc>
+                  <a:spcPct val="100000"/>
+                </a:lnSpc>
+                <a:spcBef>
+                  <a:spcPts val="0"/>
+                </a:spcBef>
+                <a:spcAft>
+                  <a:spcPts val="0"/>
+                </a:spcAft>
+                <a:buClr>
+                  <a:srgbClr val="000000"/>
+                </a:buClr>
+                <a:buFont typeface="Arial"/>
+                <a:defRPr sz="1400" b="0" i="0" u="none" strike="noStrike" cap="none">
+                  <a:solidFill>
+                    <a:srgbClr val="000000"/>
+                  </a:solidFill>
+                  <a:latin typeface="Arial"/>
+                  <a:ea typeface="Arial"/>
+                  <a:cs typeface="Arial"/>
+                  <a:sym typeface="Arial"/>
+                </a:defRPr>
+              </a:lvl5pPr>
+              <a:lvl6pPr marR="0" lvl="5" algn="l" rtl="0">
+                <a:lnSpc>
+                  <a:spcPct val="100000"/>
+                </a:lnSpc>
+                <a:spcBef>
+                  <a:spcPts val="0"/>
+                </a:spcBef>
+                <a:spcAft>
+                  <a:spcPts val="0"/>
+                </a:spcAft>
+                <a:buClr>
+                  <a:srgbClr val="000000"/>
+                </a:buClr>
+                <a:buFont typeface="Arial"/>
+                <a:defRPr sz="1400" b="0" i="0" u="none" strike="noStrike" cap="none">
+                  <a:solidFill>
+                    <a:srgbClr val="000000"/>
+                  </a:solidFill>
+                  <a:latin typeface="Arial"/>
+                  <a:ea typeface="Arial"/>
+                  <a:cs typeface="Arial"/>
+                  <a:sym typeface="Arial"/>
+                </a:defRPr>
+              </a:lvl6pPr>
+              <a:lvl7pPr marR="0" lvl="6" algn="l" rtl="0">
+                <a:lnSpc>
+                  <a:spcPct val="100000"/>
+                </a:lnSpc>
+                <a:spcBef>
+                  <a:spcPts val="0"/>
+                </a:spcBef>
+                <a:spcAft>
+                  <a:spcPts val="0"/>
+                </a:spcAft>
+                <a:buClr>
+                  <a:srgbClr val="000000"/>
+                </a:buClr>
+                <a:buFont typeface="Arial"/>
+                <a:defRPr sz="1400" b="0" i="0" u="none" strike="noStrike" cap="none">
+                  <a:solidFill>
+                    <a:srgbClr val="000000"/>
+                  </a:solidFill>
+                  <a:latin typeface="Arial"/>
+                  <a:ea typeface="Arial"/>
+                  <a:cs typeface="Arial"/>
+                  <a:sym typeface="Arial"/>
+                </a:defRPr>
+              </a:lvl7pPr>
+              <a:lvl8pPr marR="0" lvl="7" algn="l" rtl="0">
+                <a:lnSpc>
+                  <a:spcPct val="100000"/>
+                </a:lnSpc>
+                <a:spcBef>
+                  <a:spcPts val="0"/>
+                </a:spcBef>
+                <a:spcAft>
+                  <a:spcPts val="0"/>
+                </a:spcAft>
+                <a:buClr>
+                  <a:srgbClr val="000000"/>
+                </a:buClr>
+                <a:buFont typeface="Arial"/>
+                <a:defRPr sz="1400" b="0" i="0" u="none" strike="noStrike" cap="none">
+                  <a:solidFill>
+                    <a:srgbClr val="000000"/>
+                  </a:solidFill>
+                  <a:latin typeface="Arial"/>
+                  <a:ea typeface="Arial"/>
+                  <a:cs typeface="Arial"/>
+                  <a:sym typeface="Arial"/>
+                </a:defRPr>
+              </a:lvl8pPr>
+              <a:lvl9pPr marR="0" lvl="8" algn="l" rtl="0">
+                <a:lnSpc>
+                  <a:spcPct val="100000"/>
+                </a:lnSpc>
+                <a:spcBef>
+                  <a:spcPts val="0"/>
+                </a:spcBef>
+                <a:spcAft>
+                  <a:spcPts val="0"/>
+                </a:spcAft>
+                <a:buClr>
+                  <a:srgbClr val="000000"/>
+                </a:buClr>
+                <a:buFont typeface="Arial"/>
+                <a:defRPr sz="1400" b="0" i="0" u="none" strike="noStrike" cap="none">
+                  <a:solidFill>
+                    <a:srgbClr val="000000"/>
+                  </a:solidFill>
+                  <a:latin typeface="Arial"/>
+                  <a:ea typeface="Arial"/>
+                  <a:cs typeface="Arial"/>
+                  <a:sym typeface="Arial"/>
+                </a:defRPr>
+              </a:lvl9pPr>
+            </a:lstStyle>
+            <a:p>
+              <a:pPr marL="0" marR="0" lvl="0" indent="0" algn="ctr" rtl="0">
+                <a:lnSpc>
+                  <a:spcPct val="100000"/>
+                </a:lnSpc>
+                <a:spcBef>
+                  <a:spcPts val="0"/>
+                </a:spcBef>
+                <a:spcAft>
+                  <a:spcPts val="0"/>
+                </a:spcAft>
+                <a:buClr>
+                  <a:srgbClr val="000000"/>
+                </a:buClr>
+                <a:buSzPts val="1023"/>
+                <a:buFont typeface="Arial"/>
+                <a:buNone/>
+              </a:pPr>
+              <a:endParaRPr sz="1022" b="0" i="0" u="none" strike="noStrike" cap="none" dirty="0">
+                <a:solidFill>
+                  <a:srgbClr val="000000"/>
+                </a:solidFill>
+                <a:latin typeface="Calibri"/>
+                <a:ea typeface="Calibri"/>
+                <a:cs typeface="Calibri"/>
+                <a:sym typeface="Calibri"/>
+              </a:endParaRPr>
+            </a:p>
+          </p:txBody>
+        </p:sp>
+        <p:sp>
+          <p:nvSpPr>
+            <p:cNvPr id="81" name="Google Shape;205;g3d00297c732_0_53">
+              <a:extLst>
+                <a:ext uri="{FF2B5EF4-FFF2-40B4-BE49-F238E27FC236}">
+                  <a16:creationId xmlns:a16="http://schemas.microsoft.com/office/drawing/2014/main" id="{2D86CE44-8757-1852-7E8C-7E733BE5764E}"/>
+                </a:ext>
+              </a:extLst>
+            </p:cNvPr>
+            <p:cNvSpPr/>
+            <p:nvPr/>
+          </p:nvSpPr>
+          <p:spPr>
+            <a:xfrm rot="16200000">
+              <a:off x="19096073" y="10869718"/>
+              <a:ext cx="720994" cy="267090"/>
+            </a:xfrm>
+            <a:prstGeom prst="rightArrow">
+              <a:avLst>
+                <a:gd name="adj1" fmla="val 50000"/>
+                <a:gd name="adj2" fmla="val 50000"/>
+              </a:avLst>
+            </a:prstGeom>
+            <a:solidFill>
+              <a:srgbClr val="FF0000"/>
+            </a:solidFill>
+            <a:ln>
+              <a:noFill/>
+            </a:ln>
+          </p:spPr>
+          <p:txBody>
+            <a:bodyPr spcFirstLastPara="1" wrap="square" lIns="66850" tIns="66850" rIns="66850" bIns="66850" anchor="ctr" anchorCtr="0">
+              <a:noAutofit/>
+            </a:bodyPr>
+            <a:lstStyle>
+              <a:defPPr marR="0" lvl="0" algn="l" rtl="0">
+                <a:lnSpc>
+                  <a:spcPct val="100000"/>
+                </a:lnSpc>
+                <a:spcBef>
+                  <a:spcPts val="0"/>
+                </a:spcBef>
+                <a:spcAft>
+                  <a:spcPts val="0"/>
+                </a:spcAft>
+              </a:defPPr>
+              <a:lvl1pPr marR="0" lvl="0" algn="l" rtl="0">
+                <a:lnSpc>
+                  <a:spcPct val="100000"/>
+                </a:lnSpc>
+                <a:spcBef>
+                  <a:spcPts val="0"/>
+                </a:spcBef>
+                <a:spcAft>
+                  <a:spcPts val="0"/>
+                </a:spcAft>
+                <a:buClr>
+                  <a:srgbClr val="000000"/>
+                </a:buClr>
+                <a:buFont typeface="Arial"/>
+                <a:defRPr sz="1400" b="0" i="0" u="none" strike="noStrike" cap="none">
+                  <a:solidFill>
+                    <a:srgbClr val="000000"/>
+                  </a:solidFill>
+                  <a:latin typeface="Arial"/>
+                  <a:ea typeface="Arial"/>
+                  <a:cs typeface="Arial"/>
+                  <a:sym typeface="Arial"/>
+                </a:defRPr>
+              </a:lvl1pPr>
+              <a:lvl2pPr marR="0" lvl="1" algn="l" rtl="0">
+                <a:lnSpc>
+                  <a:spcPct val="100000"/>
+                </a:lnSpc>
+                <a:spcBef>
+                  <a:spcPts val="0"/>
+                </a:spcBef>
+                <a:spcAft>
+                  <a:spcPts val="0"/>
+                </a:spcAft>
+                <a:buClr>
+                  <a:srgbClr val="000000"/>
+                </a:buClr>
+                <a:buFont typeface="Arial"/>
+                <a:defRPr sz="1400" b="0" i="0" u="none" strike="noStrike" cap="none">
+                  <a:solidFill>
+                    <a:srgbClr val="000000"/>
+                  </a:solidFill>
+                  <a:latin typeface="Arial"/>
+                  <a:ea typeface="Arial"/>
+                  <a:cs typeface="Arial"/>
+                  <a:sym typeface="Arial"/>
+                </a:defRPr>
+              </a:lvl2pPr>
+              <a:lvl3pPr marR="0" lvl="2" algn="l" rtl="0">
+                <a:lnSpc>
+                  <a:spcPct val="100000"/>
+                </a:lnSpc>
+                <a:spcBef>
+                  <a:spcPts val="0"/>
+                </a:spcBef>
+                <a:spcAft>
+                  <a:spcPts val="0"/>
+                </a:spcAft>
+                <a:buClr>
+                  <a:srgbClr val="000000"/>
+                </a:buClr>
+                <a:buFont typeface="Arial"/>
+                <a:defRPr sz="1400" b="0" i="0" u="none" strike="noStrike" cap="none">
+                  <a:solidFill>
+                    <a:srgbClr val="000000"/>
+                  </a:solidFill>
+                  <a:latin typeface="Arial"/>
+                  <a:ea typeface="Arial"/>
+                  <a:cs typeface="Arial"/>
+                  <a:sym typeface="Arial"/>
+                </a:defRPr>
+              </a:lvl3pPr>
+              <a:lvl4pPr marR="0" lvl="3" algn="l" rtl="0">
+                <a:lnSpc>
+                  <a:spcPct val="100000"/>
+                </a:lnSpc>
+                <a:spcBef>
+                  <a:spcPts val="0"/>
+                </a:spcBef>
+                <a:spcAft>
+                  <a:spcPts val="0"/>
+                </a:spcAft>
+                <a:buClr>
+                  <a:srgbClr val="000000"/>
+                </a:buClr>
+                <a:buFont typeface="Arial"/>
+                <a:defRPr sz="1400" b="0" i="0" u="none" strike="noStrike" cap="none">
+                  <a:solidFill>
+                    <a:srgbClr val="000000"/>
+                  </a:solidFill>
+                  <a:latin typeface="Arial"/>
+                  <a:ea typeface="Arial"/>
+                  <a:cs typeface="Arial"/>
+                  <a:sym typeface="Arial"/>
+                </a:defRPr>
+              </a:lvl4pPr>
+              <a:lvl5pPr marR="0" lvl="4" algn="l" rtl="0">
+                <a:lnSpc>
+                  <a:spcPct val="100000"/>
+                </a:lnSpc>
+                <a:spcBef>
+                  <a:spcPts val="0"/>
+                </a:spcBef>
+                <a:spcAft>
+                  <a:spcPts val="0"/>
+                </a:spcAft>
+                <a:buClr>
+                  <a:srgbClr val="000000"/>
+                </a:buClr>
+                <a:buFont typeface="Arial"/>
+                <a:defRPr sz="1400" b="0" i="0" u="none" strike="noStrike" cap="none">
+                  <a:solidFill>
+                    <a:srgbClr val="000000"/>
+                  </a:solidFill>
+                  <a:latin typeface="Arial"/>
+                  <a:ea typeface="Arial"/>
+                  <a:cs typeface="Arial"/>
+                  <a:sym typeface="Arial"/>
+                </a:defRPr>
+              </a:lvl5pPr>
+              <a:lvl6pPr marR="0" lvl="5" algn="l" rtl="0">
+                <a:lnSpc>
+                  <a:spcPct val="100000"/>
+                </a:lnSpc>
+                <a:spcBef>
+                  <a:spcPts val="0"/>
+                </a:spcBef>
+                <a:spcAft>
+                  <a:spcPts val="0"/>
+                </a:spcAft>
+                <a:buClr>
+                  <a:srgbClr val="000000"/>
+                </a:buClr>
+                <a:buFont typeface="Arial"/>
+                <a:defRPr sz="1400" b="0" i="0" u="none" strike="noStrike" cap="none">
+                  <a:solidFill>
+                    <a:srgbClr val="000000"/>
+                  </a:solidFill>
+                  <a:latin typeface="Arial"/>
+                  <a:ea typeface="Arial"/>
+                  <a:cs typeface="Arial"/>
+                  <a:sym typeface="Arial"/>
+                </a:defRPr>
+              </a:lvl6pPr>
+              <a:lvl7pPr marR="0" lvl="6" algn="l" rtl="0">
+                <a:lnSpc>
+                  <a:spcPct val="100000"/>
+                </a:lnSpc>
+                <a:spcBef>
+                  <a:spcPts val="0"/>
+                </a:spcBef>
+                <a:spcAft>
+                  <a:spcPts val="0"/>
+                </a:spcAft>
+                <a:buClr>
+                  <a:srgbClr val="000000"/>
+                </a:buClr>
+                <a:buFont typeface="Arial"/>
+                <a:defRPr sz="1400" b="0" i="0" u="none" strike="noStrike" cap="none">
+                  <a:solidFill>
+                    <a:srgbClr val="000000"/>
+                  </a:solidFill>
+                  <a:latin typeface="Arial"/>
+                  <a:ea typeface="Arial"/>
+                  <a:cs typeface="Arial"/>
+                  <a:sym typeface="Arial"/>
+                </a:defRPr>
+              </a:lvl7pPr>
+              <a:lvl8pPr marR="0" lvl="7" algn="l" rtl="0">
+                <a:lnSpc>
+                  <a:spcPct val="100000"/>
+                </a:lnSpc>
+                <a:spcBef>
+                  <a:spcPts val="0"/>
+                </a:spcBef>
+                <a:spcAft>
+                  <a:spcPts val="0"/>
+                </a:spcAft>
+                <a:buClr>
+                  <a:srgbClr val="000000"/>
+                </a:buClr>
+                <a:buFont typeface="Arial"/>
+                <a:defRPr sz="1400" b="0" i="0" u="none" strike="noStrike" cap="none">
+                  <a:solidFill>
+                    <a:srgbClr val="000000"/>
+                  </a:solidFill>
+                  <a:latin typeface="Arial"/>
+                  <a:ea typeface="Arial"/>
+                  <a:cs typeface="Arial"/>
+                  <a:sym typeface="Arial"/>
+                </a:defRPr>
+              </a:lvl8pPr>
+              <a:lvl9pPr marR="0" lvl="8" algn="l" rtl="0">
+                <a:lnSpc>
+                  <a:spcPct val="100000"/>
+                </a:lnSpc>
+                <a:spcBef>
+                  <a:spcPts val="0"/>
+                </a:spcBef>
+                <a:spcAft>
+                  <a:spcPts val="0"/>
+                </a:spcAft>
+                <a:buClr>
+                  <a:srgbClr val="000000"/>
+                </a:buClr>
+                <a:buFont typeface="Arial"/>
+                <a:defRPr sz="1400" b="0" i="0" u="none" strike="noStrike" cap="none">
+                  <a:solidFill>
+                    <a:srgbClr val="000000"/>
+                  </a:solidFill>
+                  <a:latin typeface="Arial"/>
+                  <a:ea typeface="Arial"/>
+                  <a:cs typeface="Arial"/>
+                  <a:sym typeface="Arial"/>
+                </a:defRPr>
+              </a:lvl9pPr>
+            </a:lstStyle>
+            <a:p>
+              <a:pPr marL="0" marR="0" lvl="0" indent="0" algn="ctr" rtl="0">
+                <a:lnSpc>
+                  <a:spcPct val="100000"/>
+                </a:lnSpc>
+                <a:spcBef>
+                  <a:spcPts val="0"/>
+                </a:spcBef>
+                <a:spcAft>
+                  <a:spcPts val="0"/>
+                </a:spcAft>
+                <a:buClr>
+                  <a:srgbClr val="000000"/>
+                </a:buClr>
+                <a:buSzPts val="1023"/>
+                <a:buFont typeface="Arial"/>
+                <a:buNone/>
+              </a:pPr>
+              <a:endParaRPr sz="1022" b="0" i="0" u="none" strike="noStrike" cap="none" dirty="0">
+                <a:solidFill>
+                  <a:srgbClr val="000000"/>
+                </a:solidFill>
+                <a:latin typeface="Calibri"/>
+                <a:ea typeface="Calibri"/>
+                <a:cs typeface="Calibri"/>
+                <a:sym typeface="Calibri"/>
+              </a:endParaRPr>
+            </a:p>
+          </p:txBody>
+        </p:sp>
+        <p:sp>
+          <p:nvSpPr>
+            <p:cNvPr id="82" name="Google Shape;109;g3d00297c732_0_7">
+              <a:extLst>
+                <a:ext uri="{FF2B5EF4-FFF2-40B4-BE49-F238E27FC236}">
+                  <a16:creationId xmlns:a16="http://schemas.microsoft.com/office/drawing/2014/main" id="{2C89A118-B899-8313-9D64-B8E3A095C271}"/>
+                </a:ext>
+              </a:extLst>
+            </p:cNvPr>
+            <p:cNvSpPr/>
+            <p:nvPr/>
+          </p:nvSpPr>
+          <p:spPr>
+            <a:xfrm rot="5400000" flipH="1">
+              <a:off x="19144233" y="13327601"/>
+              <a:ext cx="617206" cy="245446"/>
+            </a:xfrm>
+            <a:prstGeom prst="rightArrow">
+              <a:avLst>
+                <a:gd name="adj1" fmla="val 50000"/>
+                <a:gd name="adj2" fmla="val 50000"/>
+              </a:avLst>
+            </a:prstGeom>
+            <a:solidFill>
+              <a:schemeClr val="lt2"/>
+            </a:solidFill>
+            <a:ln w="9525" cap="flat" cmpd="sng">
+              <a:solidFill>
+                <a:schemeClr val="dk2"/>
+              </a:solidFill>
+              <a:prstDash val="solid"/>
+              <a:round/>
+              <a:headEnd type="none" w="sm" len="sm"/>
+              <a:tailEnd type="none" w="sm" len="sm"/>
+            </a:ln>
+          </p:spPr>
+          <p:txBody>
+            <a:bodyPr spcFirstLastPara="1" wrap="square" lIns="91425" tIns="91425" rIns="91425" bIns="91425" anchor="ctr" anchorCtr="0">
+              <a:noAutofit/>
+            </a:bodyPr>
+            <a:lstStyle>
+              <a:defPPr marR="0" lvl="0" algn="l" rtl="0">
+                <a:lnSpc>
+                  <a:spcPct val="100000"/>
+                </a:lnSpc>
+                <a:spcBef>
+                  <a:spcPts val="0"/>
+                </a:spcBef>
+                <a:spcAft>
+                  <a:spcPts val="0"/>
+                </a:spcAft>
+              </a:defPPr>
+              <a:lvl1pPr marR="0" lvl="0" algn="l" rtl="0">
+                <a:lnSpc>
+                  <a:spcPct val="100000"/>
+                </a:lnSpc>
+                <a:spcBef>
+                  <a:spcPts val="0"/>
+                </a:spcBef>
+                <a:spcAft>
+                  <a:spcPts val="0"/>
+                </a:spcAft>
+                <a:buClr>
+                  <a:srgbClr val="000000"/>
+                </a:buClr>
+                <a:buFont typeface="Arial"/>
+                <a:defRPr sz="1400" b="0" i="0" u="none" strike="noStrike" cap="none">
+                  <a:solidFill>
+                    <a:srgbClr val="000000"/>
+                  </a:solidFill>
+                  <a:latin typeface="Arial"/>
+                  <a:ea typeface="Arial"/>
+                  <a:cs typeface="Arial"/>
+                  <a:sym typeface="Arial"/>
+                </a:defRPr>
+              </a:lvl1pPr>
+              <a:lvl2pPr marR="0" lvl="1" algn="l" rtl="0">
+                <a:lnSpc>
+                  <a:spcPct val="100000"/>
+                </a:lnSpc>
+                <a:spcBef>
+                  <a:spcPts val="0"/>
+                </a:spcBef>
+                <a:spcAft>
+                  <a:spcPts val="0"/>
+                </a:spcAft>
+                <a:buClr>
+                  <a:srgbClr val="000000"/>
+                </a:buClr>
+                <a:buFont typeface="Arial"/>
+                <a:defRPr sz="1400" b="0" i="0" u="none" strike="noStrike" cap="none">
+                  <a:solidFill>
+                    <a:srgbClr val="000000"/>
+                  </a:solidFill>
+                  <a:latin typeface="Arial"/>
+                  <a:ea typeface="Arial"/>
+                  <a:cs typeface="Arial"/>
+                  <a:sym typeface="Arial"/>
+                </a:defRPr>
+              </a:lvl2pPr>
+              <a:lvl3pPr marR="0" lvl="2" algn="l" rtl="0">
+                <a:lnSpc>
+                  <a:spcPct val="100000"/>
+                </a:lnSpc>
+                <a:spcBef>
+                  <a:spcPts val="0"/>
+                </a:spcBef>
+                <a:spcAft>
+                  <a:spcPts val="0"/>
+                </a:spcAft>
+                <a:buClr>
+                  <a:srgbClr val="000000"/>
+                </a:buClr>
+                <a:buFont typeface="Arial"/>
+                <a:defRPr sz="1400" b="0" i="0" u="none" strike="noStrike" cap="none">
+                  <a:solidFill>
+                    <a:srgbClr val="000000"/>
+                  </a:solidFill>
+                  <a:latin typeface="Arial"/>
+                  <a:ea typeface="Arial"/>
+                  <a:cs typeface="Arial"/>
+                  <a:sym typeface="Arial"/>
+                </a:defRPr>
+              </a:lvl3pPr>
+              <a:lvl4pPr marR="0" lvl="3" algn="l" rtl="0">
+                <a:lnSpc>
+                  <a:spcPct val="100000"/>
+                </a:lnSpc>
+                <a:spcBef>
+                  <a:spcPts val="0"/>
+                </a:spcBef>
+                <a:spcAft>
+                  <a:spcPts val="0"/>
+                </a:spcAft>
+                <a:buClr>
+                  <a:srgbClr val="000000"/>
+                </a:buClr>
+                <a:buFont typeface="Arial"/>
+                <a:defRPr sz="1400" b="0" i="0" u="none" strike="noStrike" cap="none">
+                  <a:solidFill>
+                    <a:srgbClr val="000000"/>
+                  </a:solidFill>
+                  <a:latin typeface="Arial"/>
+                  <a:ea typeface="Arial"/>
+                  <a:cs typeface="Arial"/>
+                  <a:sym typeface="Arial"/>
+                </a:defRPr>
+              </a:lvl4pPr>
+              <a:lvl5pPr marR="0" lvl="4" algn="l" rtl="0">
+                <a:lnSpc>
+                  <a:spcPct val="100000"/>
+                </a:lnSpc>
+                <a:spcBef>
+                  <a:spcPts val="0"/>
+                </a:spcBef>
+                <a:spcAft>
+                  <a:spcPts val="0"/>
+                </a:spcAft>
+                <a:buClr>
+                  <a:srgbClr val="000000"/>
+                </a:buClr>
+                <a:buFont typeface="Arial"/>
+                <a:defRPr sz="1400" b="0" i="0" u="none" strike="noStrike" cap="none">
+                  <a:solidFill>
+                    <a:srgbClr val="000000"/>
+                  </a:solidFill>
+                  <a:latin typeface="Arial"/>
+                  <a:ea typeface="Arial"/>
+                  <a:cs typeface="Arial"/>
+                  <a:sym typeface="Arial"/>
+                </a:defRPr>
+              </a:lvl5pPr>
+              <a:lvl6pPr marR="0" lvl="5" algn="l" rtl="0">
+                <a:lnSpc>
+                  <a:spcPct val="100000"/>
+                </a:lnSpc>
+                <a:spcBef>
+                  <a:spcPts val="0"/>
+                </a:spcBef>
+                <a:spcAft>
+                  <a:spcPts val="0"/>
+                </a:spcAft>
+                <a:buClr>
+                  <a:srgbClr val="000000"/>
+                </a:buClr>
+                <a:buFont typeface="Arial"/>
+                <a:defRPr sz="1400" b="0" i="0" u="none" strike="noStrike" cap="none">
+                  <a:solidFill>
+                    <a:srgbClr val="000000"/>
+                  </a:solidFill>
+                  <a:latin typeface="Arial"/>
+                  <a:ea typeface="Arial"/>
+                  <a:cs typeface="Arial"/>
+                  <a:sym typeface="Arial"/>
+                </a:defRPr>
+              </a:lvl6pPr>
+              <a:lvl7pPr marR="0" lvl="6" algn="l" rtl="0">
+                <a:lnSpc>
+                  <a:spcPct val="100000"/>
+                </a:lnSpc>
+                <a:spcBef>
+                  <a:spcPts val="0"/>
+                </a:spcBef>
+                <a:spcAft>
+                  <a:spcPts val="0"/>
+                </a:spcAft>
+                <a:buClr>
+                  <a:srgbClr val="000000"/>
+                </a:buClr>
+                <a:buFont typeface="Arial"/>
+                <a:defRPr sz="1400" b="0" i="0" u="none" strike="noStrike" cap="none">
+                  <a:solidFill>
+                    <a:srgbClr val="000000"/>
+                  </a:solidFill>
+                  <a:latin typeface="Arial"/>
+                  <a:ea typeface="Arial"/>
+                  <a:cs typeface="Arial"/>
+                  <a:sym typeface="Arial"/>
+                </a:defRPr>
+              </a:lvl7pPr>
+              <a:lvl8pPr marR="0" lvl="7" algn="l" rtl="0">
+                <a:lnSpc>
+                  <a:spcPct val="100000"/>
+                </a:lnSpc>
+                <a:spcBef>
+                  <a:spcPts val="0"/>
+                </a:spcBef>
+                <a:spcAft>
+                  <a:spcPts val="0"/>
+                </a:spcAft>
+                <a:buClr>
+                  <a:srgbClr val="000000"/>
+                </a:buClr>
+                <a:buFont typeface="Arial"/>
+                <a:defRPr sz="1400" b="0" i="0" u="none" strike="noStrike" cap="none">
+                  <a:solidFill>
+                    <a:srgbClr val="000000"/>
+                  </a:solidFill>
+                  <a:latin typeface="Arial"/>
+                  <a:ea typeface="Arial"/>
+                  <a:cs typeface="Arial"/>
+                  <a:sym typeface="Arial"/>
+                </a:defRPr>
+              </a:lvl8pPr>
+              <a:lvl9pPr marR="0" lvl="8" algn="l" rtl="0">
+                <a:lnSpc>
+                  <a:spcPct val="100000"/>
+                </a:lnSpc>
+                <a:spcBef>
+                  <a:spcPts val="0"/>
+                </a:spcBef>
+                <a:spcAft>
+                  <a:spcPts val="0"/>
+                </a:spcAft>
+                <a:buClr>
+                  <a:srgbClr val="000000"/>
+                </a:buClr>
+                <a:buFont typeface="Arial"/>
+                <a:defRPr sz="1400" b="0" i="0" u="none" strike="noStrike" cap="none">
+                  <a:solidFill>
+                    <a:srgbClr val="000000"/>
+                  </a:solidFill>
+                  <a:latin typeface="Arial"/>
+                  <a:ea typeface="Arial"/>
+                  <a:cs typeface="Arial"/>
+                  <a:sym typeface="Arial"/>
+                </a:defRPr>
+              </a:lvl9pPr>
+            </a:lstStyle>
+            <a:p>
+              <a:pPr marL="0" marR="0" lvl="0" indent="0" algn="ctr" rtl="0">
+                <a:lnSpc>
+                  <a:spcPct val="100000"/>
+                </a:lnSpc>
+                <a:spcBef>
+                  <a:spcPts val="0"/>
+                </a:spcBef>
+                <a:spcAft>
+                  <a:spcPts val="0"/>
+                </a:spcAft>
+                <a:buClr>
+                  <a:srgbClr val="000000"/>
+                </a:buClr>
+                <a:buSzPts val="1400"/>
+                <a:buFont typeface="Arial"/>
+                <a:buNone/>
+              </a:pPr>
+              <a:endParaRPr sz="1400" b="0" i="0" u="none" strike="noStrike" cap="none" dirty="0">
+                <a:solidFill>
+                  <a:srgbClr val="000000"/>
+                </a:solidFill>
+                <a:latin typeface="Calibri"/>
+                <a:ea typeface="Calibri"/>
+                <a:cs typeface="Calibri"/>
+                <a:sym typeface="Calibri"/>
+              </a:endParaRPr>
+            </a:p>
+          </p:txBody>
+        </p:sp>
+      </p:grpSp>
       <p:cxnSp>
         <p:nvCxnSpPr>
-          <p:cNvPr id="65" name="直線單箭頭接點 64">
+          <p:cNvPr id="103" name="直線接點 102">
             <a:extLst>
               <a:ext uri="{FF2B5EF4-FFF2-40B4-BE49-F238E27FC236}">
-                <a16:creationId xmlns:a16="http://schemas.microsoft.com/office/drawing/2014/main" id="{CA04B8C9-C1DF-85DF-FCEA-05CB4FD47E58}"/>
+                <a16:creationId xmlns:a16="http://schemas.microsoft.com/office/drawing/2014/main" id="{8A906D82-FDDB-B13B-575D-6BA71AEEBF29}"/>
               </a:ext>
             </a:extLst>
           </p:cNvPr>
@@ -3735,26 +8236,23 @@
           <p:nvPr/>
         </p:nvCxnSpPr>
         <p:spPr>
-          <a:xfrm>
-            <a:off x="13437617" y="11408510"/>
-            <a:ext cx="1681316" cy="0"/>
+          <a:xfrm flipH="1">
+            <a:off x="17516779" y="10606884"/>
+            <a:ext cx="1194699" cy="1300731"/>
           </a:xfrm>
-          <a:prstGeom prst="straightConnector1">
+          <a:prstGeom prst="line">
             <a:avLst/>
           </a:prstGeom>
-          <a:ln w="50800">
-            <a:tailEnd type="triangle"/>
-          </a:ln>
         </p:spPr>
         <p:style>
           <a:lnRef idx="2">
-            <a:schemeClr val="dk1"/>
+            <a:schemeClr val="accent1"/>
           </a:lnRef>
           <a:fillRef idx="0">
-            <a:schemeClr val="dk1"/>
+            <a:schemeClr val="accent1"/>
           </a:fillRef>
           <a:effectRef idx="1">
-            <a:schemeClr val="dk1"/>
+            <a:schemeClr val="accent1"/>
           </a:effectRef>
           <a:fontRef idx="minor">
             <a:schemeClr val="tx1"/>
@@ -3763,10 +8261,10 @@
       </p:cxnSp>
       <p:cxnSp>
         <p:nvCxnSpPr>
-          <p:cNvPr id="67" name="直線單箭頭接點 66">
+          <p:cNvPr id="105" name="直線接點 104">
             <a:extLst>
               <a:ext uri="{FF2B5EF4-FFF2-40B4-BE49-F238E27FC236}">
-                <a16:creationId xmlns:a16="http://schemas.microsoft.com/office/drawing/2014/main" id="{E0A2A168-BD67-8137-F349-217B6C693F73}"/>
+                <a16:creationId xmlns:a16="http://schemas.microsoft.com/office/drawing/2014/main" id="{069443FF-E5E3-0A02-9E10-6AB3E79BEFC9}"/>
               </a:ext>
             </a:extLst>
           </p:cNvPr>
@@ -3776,73 +8274,471 @@
           <p:nvPr/>
         </p:nvCxnSpPr>
         <p:spPr>
-          <a:xfrm>
-            <a:off x="13146385" y="16524796"/>
-            <a:ext cx="1681316" cy="0"/>
+          <a:xfrm flipH="1" flipV="1">
+            <a:off x="17534808" y="12706478"/>
+            <a:ext cx="1183639" cy="1313675"/>
           </a:xfrm>
-          <a:prstGeom prst="straightConnector1">
+          <a:prstGeom prst="line">
             <a:avLst/>
           </a:prstGeom>
-          <a:ln w="50800">
-            <a:tailEnd type="triangle"/>
-          </a:ln>
         </p:spPr>
         <p:style>
           <a:lnRef idx="2">
-            <a:schemeClr val="dk1"/>
+            <a:schemeClr val="accent1"/>
           </a:lnRef>
           <a:fillRef idx="0">
-            <a:schemeClr val="dk1"/>
+            <a:schemeClr val="accent1"/>
           </a:fillRef>
           <a:effectRef idx="1">
-            <a:schemeClr val="dk1"/>
+            <a:schemeClr val="accent1"/>
           </a:effectRef>
           <a:fontRef idx="minor">
             <a:schemeClr val="tx1"/>
           </a:fontRef>
         </p:style>
       </p:cxnSp>
-      <p:cxnSp>
-        <p:nvCxnSpPr>
-          <p:cNvPr id="68" name="直線單箭頭接點 67">
+      <p:grpSp>
+        <p:nvGrpSpPr>
+          <p:cNvPr id="110" name="群組 109">
             <a:extLst>
               <a:ext uri="{FF2B5EF4-FFF2-40B4-BE49-F238E27FC236}">
-                <a16:creationId xmlns:a16="http://schemas.microsoft.com/office/drawing/2014/main" id="{83B18D41-B269-DC5B-4D77-440C69B12328}"/>
+                <a16:creationId xmlns:a16="http://schemas.microsoft.com/office/drawing/2014/main" id="{DC002FAC-5F11-5307-B175-6C7693871C86}"/>
               </a:ext>
             </a:extLst>
           </p:cNvPr>
-          <p:cNvCxnSpPr>
-            <a:cxnSpLocks/>
-          </p:cNvCxnSpPr>
+          <p:cNvGrpSpPr/>
           <p:nvPr/>
-        </p:nvCxnSpPr>
-        <p:spPr>
+        </p:nvGrpSpPr>
+        <p:grpSpPr>
           <a:xfrm>
-            <a:off x="13187108" y="21353698"/>
-            <a:ext cx="1681316" cy="0"/>
+            <a:off x="15001056" y="14703277"/>
+            <a:ext cx="5542630" cy="7919166"/>
+            <a:chOff x="1290621" y="7222458"/>
+            <a:chExt cx="6762752" cy="9198005"/>
           </a:xfrm>
-          <a:prstGeom prst="straightConnector1">
-            <a:avLst/>
-          </a:prstGeom>
-          <a:ln w="50800">
-            <a:tailEnd type="triangle"/>
-          </a:ln>
-        </p:spPr>
-        <p:style>
-          <a:lnRef idx="2">
-            <a:schemeClr val="dk1"/>
-          </a:lnRef>
-          <a:fillRef idx="0">
-            <a:schemeClr val="dk1"/>
-          </a:fillRef>
-          <a:effectRef idx="1">
-            <a:schemeClr val="dk1"/>
-          </a:effectRef>
-          <a:fontRef idx="minor">
-            <a:schemeClr val="tx1"/>
-          </a:fontRef>
-        </p:style>
-      </p:cxnSp>
+        </p:grpSpPr>
+        <p:sp>
+          <p:nvSpPr>
+            <p:cNvPr id="111" name="矩形: 圓角 110">
+              <a:extLst>
+                <a:ext uri="{FF2B5EF4-FFF2-40B4-BE49-F238E27FC236}">
+                  <a16:creationId xmlns:a16="http://schemas.microsoft.com/office/drawing/2014/main" id="{8F59A182-8B59-4063-98F3-8BBDA6B1F5CC}"/>
+                </a:ext>
+              </a:extLst>
+            </p:cNvPr>
+            <p:cNvSpPr/>
+            <p:nvPr/>
+          </p:nvSpPr>
+          <p:spPr>
+            <a:xfrm>
+              <a:off x="1290621" y="7222458"/>
+              <a:ext cx="6762752" cy="1509923"/>
+            </a:xfrm>
+            <a:prstGeom prst="roundRect">
+              <a:avLst/>
+            </a:prstGeom>
+            <a:solidFill>
+              <a:schemeClr val="accent6">
+                <a:lumMod val="40000"/>
+                <a:lumOff val="60000"/>
+                <a:alpha val="50000"/>
+              </a:schemeClr>
+            </a:solidFill>
+            <a:ln>
+              <a:noFill/>
+            </a:ln>
+          </p:spPr>
+          <p:style>
+            <a:lnRef idx="0">
+              <a:scrgbClr r="0" g="0" b="0"/>
+            </a:lnRef>
+            <a:fillRef idx="0">
+              <a:scrgbClr r="0" g="0" b="0"/>
+            </a:fillRef>
+            <a:effectRef idx="0">
+              <a:scrgbClr r="0" g="0" b="0"/>
+            </a:effectRef>
+            <a:fontRef idx="minor">
+              <a:schemeClr val="lt1"/>
+            </a:fontRef>
+          </p:style>
+          <p:txBody>
+            <a:bodyPr rtlCol="0" anchor="ctr"/>
+            <a:lstStyle/>
+            <a:p>
+              <a:pPr algn="ctr"/>
+              <a:endParaRPr lang="zh-TW" altLang="en-US"/>
+            </a:p>
+          </p:txBody>
+        </p:sp>
+        <p:sp>
+          <p:nvSpPr>
+            <p:cNvPr id="112" name="矩形: 圓角 111">
+              <a:extLst>
+                <a:ext uri="{FF2B5EF4-FFF2-40B4-BE49-F238E27FC236}">
+                  <a16:creationId xmlns:a16="http://schemas.microsoft.com/office/drawing/2014/main" id="{EFDD276B-6007-FD82-D1C4-BBA845CC3542}"/>
+                </a:ext>
+              </a:extLst>
+            </p:cNvPr>
+            <p:cNvSpPr/>
+            <p:nvPr/>
+          </p:nvSpPr>
+          <p:spPr>
+            <a:xfrm>
+              <a:off x="1290621" y="8887188"/>
+              <a:ext cx="6762752" cy="3583267"/>
+            </a:xfrm>
+            <a:prstGeom prst="roundRect">
+              <a:avLst/>
+            </a:prstGeom>
+            <a:solidFill>
+              <a:schemeClr val="accent4">
+                <a:lumMod val="40000"/>
+                <a:lumOff val="60000"/>
+                <a:alpha val="50000"/>
+              </a:schemeClr>
+            </a:solidFill>
+            <a:ln>
+              <a:noFill/>
+            </a:ln>
+          </p:spPr>
+          <p:style>
+            <a:lnRef idx="0">
+              <a:scrgbClr r="0" g="0" b="0"/>
+            </a:lnRef>
+            <a:fillRef idx="0">
+              <a:scrgbClr r="0" g="0" b="0"/>
+            </a:fillRef>
+            <a:effectRef idx="0">
+              <a:scrgbClr r="0" g="0" b="0"/>
+            </a:effectRef>
+            <a:fontRef idx="minor">
+              <a:schemeClr val="lt1"/>
+            </a:fontRef>
+          </p:style>
+          <p:txBody>
+            <a:bodyPr rtlCol="0" anchor="ctr"/>
+            <a:lstStyle/>
+            <a:p>
+              <a:pPr algn="ctr"/>
+              <a:endParaRPr lang="zh-TW" altLang="en-US"/>
+            </a:p>
+          </p:txBody>
+        </p:sp>
+        <p:sp>
+          <p:nvSpPr>
+            <p:cNvPr id="113" name="矩形: 圓角 112">
+              <a:extLst>
+                <a:ext uri="{FF2B5EF4-FFF2-40B4-BE49-F238E27FC236}">
+                  <a16:creationId xmlns:a16="http://schemas.microsoft.com/office/drawing/2014/main" id="{9C7516FE-7C8D-DFC4-4A39-035BACEDC6D9}"/>
+                </a:ext>
+              </a:extLst>
+            </p:cNvPr>
+            <p:cNvSpPr/>
+            <p:nvPr/>
+          </p:nvSpPr>
+          <p:spPr>
+            <a:xfrm>
+              <a:off x="1347781" y="12648935"/>
+              <a:ext cx="6705592" cy="3771528"/>
+            </a:xfrm>
+            <a:prstGeom prst="roundRect">
+              <a:avLst/>
+            </a:prstGeom>
+            <a:solidFill>
+              <a:schemeClr val="accent5">
+                <a:lumMod val="20000"/>
+                <a:lumOff val="80000"/>
+                <a:alpha val="50000"/>
+              </a:schemeClr>
+            </a:solidFill>
+            <a:ln>
+              <a:noFill/>
+            </a:ln>
+          </p:spPr>
+          <p:style>
+            <a:lnRef idx="0">
+              <a:scrgbClr r="0" g="0" b="0"/>
+            </a:lnRef>
+            <a:fillRef idx="0">
+              <a:scrgbClr r="0" g="0" b="0"/>
+            </a:fillRef>
+            <a:effectRef idx="0">
+              <a:scrgbClr r="0" g="0" b="0"/>
+            </a:effectRef>
+            <a:fontRef idx="minor">
+              <a:schemeClr val="lt1"/>
+            </a:fontRef>
+          </p:style>
+          <p:txBody>
+            <a:bodyPr rtlCol="0" anchor="ctr"/>
+            <a:lstStyle/>
+            <a:p>
+              <a:pPr algn="ctr"/>
+              <a:endParaRPr lang="zh-TW" altLang="en-US" dirty="0"/>
+            </a:p>
+          </p:txBody>
+        </p:sp>
+        <p:sp>
+          <p:nvSpPr>
+            <p:cNvPr id="114" name="文字方塊 113">
+              <a:extLst>
+                <a:ext uri="{FF2B5EF4-FFF2-40B4-BE49-F238E27FC236}">
+                  <a16:creationId xmlns:a16="http://schemas.microsoft.com/office/drawing/2014/main" id="{CE1C5CB5-2266-4D4C-DB15-E0C1D396C33C}"/>
+                </a:ext>
+              </a:extLst>
+            </p:cNvPr>
+            <p:cNvSpPr txBox="1"/>
+            <p:nvPr/>
+          </p:nvSpPr>
+          <p:spPr>
+            <a:xfrm>
+              <a:off x="2196627" y="11357328"/>
+              <a:ext cx="5000625" cy="607713"/>
+            </a:xfrm>
+            <a:prstGeom prst="rect">
+              <a:avLst/>
+            </a:prstGeom>
+            <a:noFill/>
+          </p:spPr>
+          <p:txBody>
+            <a:bodyPr wrap="square" rtlCol="0">
+              <a:spAutoFit/>
+            </a:bodyPr>
+            <a:lstStyle/>
+            <a:p>
+              <a:pPr algn="ctr"/>
+              <a:r>
+                <a:rPr lang="en-US" altLang="zh-TW" sz="2800" dirty="0"/>
+                <a:t>Scheduler</a:t>
+              </a:r>
+              <a:endParaRPr lang="zh-TW" altLang="en-US" sz="2800" dirty="0"/>
+            </a:p>
+          </p:txBody>
+        </p:sp>
+        <p:sp>
+          <p:nvSpPr>
+            <p:cNvPr id="115" name="文字方塊 114">
+              <a:extLst>
+                <a:ext uri="{FF2B5EF4-FFF2-40B4-BE49-F238E27FC236}">
+                  <a16:creationId xmlns:a16="http://schemas.microsoft.com/office/drawing/2014/main" id="{FF827D4C-1165-F0E3-E604-EF2BE39399F9}"/>
+                </a:ext>
+              </a:extLst>
+            </p:cNvPr>
+            <p:cNvSpPr txBox="1"/>
+            <p:nvPr/>
+          </p:nvSpPr>
+          <p:spPr>
+            <a:xfrm>
+              <a:off x="2270658" y="15272381"/>
+              <a:ext cx="5000625" cy="607713"/>
+            </a:xfrm>
+            <a:prstGeom prst="rect">
+              <a:avLst/>
+            </a:prstGeom>
+            <a:noFill/>
+          </p:spPr>
+          <p:txBody>
+            <a:bodyPr wrap="square" rtlCol="0">
+              <a:spAutoFit/>
+            </a:bodyPr>
+            <a:lstStyle/>
+            <a:p>
+              <a:pPr algn="ctr"/>
+              <a:r>
+                <a:rPr lang="en-US" altLang="zh-TW" sz="2800" dirty="0"/>
+                <a:t>Focused Fleet</a:t>
+              </a:r>
+              <a:endParaRPr lang="zh-TW" altLang="en-US" sz="2800" dirty="0"/>
+            </a:p>
+          </p:txBody>
+        </p:sp>
+        <p:sp>
+          <p:nvSpPr>
+            <p:cNvPr id="116" name="文字方塊 115">
+              <a:extLst>
+                <a:ext uri="{FF2B5EF4-FFF2-40B4-BE49-F238E27FC236}">
+                  <a16:creationId xmlns:a16="http://schemas.microsoft.com/office/drawing/2014/main" id="{27071513-5C3A-50F2-3856-F4C7EEB6D704}"/>
+                </a:ext>
+              </a:extLst>
+            </p:cNvPr>
+            <p:cNvSpPr txBox="1"/>
+            <p:nvPr/>
+          </p:nvSpPr>
+          <p:spPr>
+            <a:xfrm>
+              <a:off x="2228847" y="14227862"/>
+              <a:ext cx="5000625" cy="607713"/>
+            </a:xfrm>
+            <a:prstGeom prst="rect">
+              <a:avLst/>
+            </a:prstGeom>
+            <a:noFill/>
+          </p:spPr>
+          <p:txBody>
+            <a:bodyPr wrap="square" rtlCol="0">
+              <a:spAutoFit/>
+            </a:bodyPr>
+            <a:lstStyle/>
+            <a:p>
+              <a:pPr algn="ctr"/>
+              <a:r>
+                <a:rPr lang="en-US" altLang="zh-TW" sz="2800" dirty="0"/>
+                <a:t>UAV-to-UAV Probe</a:t>
+              </a:r>
+              <a:endParaRPr lang="zh-TW" altLang="en-US" sz="2800" dirty="0"/>
+            </a:p>
+          </p:txBody>
+        </p:sp>
+        <p:sp>
+          <p:nvSpPr>
+            <p:cNvPr id="117" name="文字方塊 116">
+              <a:extLst>
+                <a:ext uri="{FF2B5EF4-FFF2-40B4-BE49-F238E27FC236}">
+                  <a16:creationId xmlns:a16="http://schemas.microsoft.com/office/drawing/2014/main" id="{D2571339-AEB4-9862-F6D2-3615E1B5A554}"/>
+                </a:ext>
+              </a:extLst>
+            </p:cNvPr>
+            <p:cNvSpPr txBox="1"/>
+            <p:nvPr/>
+          </p:nvSpPr>
+          <p:spPr>
+            <a:xfrm>
+              <a:off x="2228846" y="13085741"/>
+              <a:ext cx="5000625" cy="607713"/>
+            </a:xfrm>
+            <a:prstGeom prst="rect">
+              <a:avLst/>
+            </a:prstGeom>
+            <a:noFill/>
+          </p:spPr>
+          <p:txBody>
+            <a:bodyPr wrap="square" rtlCol="0">
+              <a:spAutoFit/>
+            </a:bodyPr>
+            <a:lstStyle/>
+            <a:p>
+              <a:pPr algn="ctr"/>
+              <a:r>
+                <a:rPr lang="en-US" altLang="zh-TW" sz="2800" dirty="0"/>
+                <a:t>Probe CSV</a:t>
+              </a:r>
+              <a:endParaRPr lang="zh-TW" altLang="en-US" sz="2800" dirty="0"/>
+            </a:p>
+          </p:txBody>
+        </p:sp>
+        <p:sp>
+          <p:nvSpPr>
+            <p:cNvPr id="118" name="文字方塊 117">
+              <a:extLst>
+                <a:ext uri="{FF2B5EF4-FFF2-40B4-BE49-F238E27FC236}">
+                  <a16:creationId xmlns:a16="http://schemas.microsoft.com/office/drawing/2014/main" id="{32F35919-AD7A-71F4-1896-3E56007BA246}"/>
+                </a:ext>
+              </a:extLst>
+            </p:cNvPr>
+            <p:cNvSpPr txBox="1"/>
+            <p:nvPr/>
+          </p:nvSpPr>
+          <p:spPr>
+            <a:xfrm>
+              <a:off x="2196627" y="7701006"/>
+              <a:ext cx="5000625" cy="607713"/>
+            </a:xfrm>
+            <a:prstGeom prst="rect">
+              <a:avLst/>
+            </a:prstGeom>
+            <a:noFill/>
+          </p:spPr>
+          <p:txBody>
+            <a:bodyPr wrap="square" rtlCol="0">
+              <a:spAutoFit/>
+            </a:bodyPr>
+            <a:lstStyle/>
+            <a:p>
+              <a:pPr algn="ctr"/>
+              <a:r>
+                <a:rPr lang="en-US" altLang="zh-TW" sz="2800" dirty="0"/>
+                <a:t>UAV-to-LEO Uplink</a:t>
+              </a:r>
+              <a:endParaRPr lang="zh-TW" altLang="en-US" sz="2800" dirty="0"/>
+            </a:p>
+          </p:txBody>
+        </p:sp>
+        <p:sp>
+          <p:nvSpPr>
+            <p:cNvPr id="119" name="文字方塊 118">
+              <a:extLst>
+                <a:ext uri="{FF2B5EF4-FFF2-40B4-BE49-F238E27FC236}">
+                  <a16:creationId xmlns:a16="http://schemas.microsoft.com/office/drawing/2014/main" id="{F7344145-9F70-4D1D-96C4-FA4E714DC269}"/>
+                </a:ext>
+              </a:extLst>
+            </p:cNvPr>
+            <p:cNvSpPr txBox="1"/>
+            <p:nvPr/>
+          </p:nvSpPr>
+          <p:spPr>
+            <a:xfrm>
+              <a:off x="1290621" y="9363569"/>
+              <a:ext cx="6762752" cy="607713"/>
+            </a:xfrm>
+            <a:prstGeom prst="rect">
+              <a:avLst/>
+            </a:prstGeom>
+            <a:noFill/>
+          </p:spPr>
+          <p:txBody>
+            <a:bodyPr wrap="square" rtlCol="0">
+              <a:spAutoFit/>
+            </a:bodyPr>
+            <a:lstStyle/>
+            <a:p>
+              <a:pPr algn="ctr"/>
+              <a:r>
+                <a:rPr lang="en-US" altLang="zh-TW" sz="2800" dirty="0"/>
+                <a:t>NS-3 Replay / Verification</a:t>
+              </a:r>
+              <a:endParaRPr lang="zh-TW" altLang="en-US" sz="2800" dirty="0"/>
+            </a:p>
+          </p:txBody>
+        </p:sp>
+        <p:sp>
+          <p:nvSpPr>
+            <p:cNvPr id="120" name="文字方塊 119">
+              <a:extLst>
+                <a:ext uri="{FF2B5EF4-FFF2-40B4-BE49-F238E27FC236}">
+                  <a16:creationId xmlns:a16="http://schemas.microsoft.com/office/drawing/2014/main" id="{1E8AE58D-461E-AE55-5DEB-7EF12243DC24}"/>
+                </a:ext>
+              </a:extLst>
+            </p:cNvPr>
+            <p:cNvSpPr txBox="1"/>
+            <p:nvPr/>
+          </p:nvSpPr>
+          <p:spPr>
+            <a:xfrm>
+              <a:off x="2180682" y="10393436"/>
+              <a:ext cx="5000625" cy="607713"/>
+            </a:xfrm>
+            <a:prstGeom prst="rect">
+              <a:avLst/>
+            </a:prstGeom>
+            <a:noFill/>
+          </p:spPr>
+          <p:txBody>
+            <a:bodyPr wrap="square" rtlCol="0">
+              <a:spAutoFit/>
+            </a:bodyPr>
+            <a:lstStyle/>
+            <a:p>
+              <a:pPr algn="ctr"/>
+              <a:r>
+                <a:rPr lang="en-US" altLang="zh-TW" sz="2800" dirty="0"/>
+                <a:t>Schedule JSON</a:t>
+              </a:r>
+              <a:endParaRPr lang="zh-TW" altLang="en-US" sz="2800" dirty="0"/>
+            </a:p>
+          </p:txBody>
+        </p:sp>
+      </p:grpSp>
     </p:spTree>
     <p:extLst>
       <p:ext uri="{BB962C8B-B14F-4D97-AF65-F5344CB8AC3E}">
@@ -3879,6 +8775,448 @@
           <a:chExt cx="0" cy="0"/>
         </a:xfrm>
       </p:grpSpPr>
+      <p:grpSp>
+        <p:nvGrpSpPr>
+          <p:cNvPr id="13" name="群組 12">
+            <a:extLst>
+              <a:ext uri="{FF2B5EF4-FFF2-40B4-BE49-F238E27FC236}">
+                <a16:creationId xmlns:a16="http://schemas.microsoft.com/office/drawing/2014/main" id="{4AF22CEF-CB90-80A3-0E73-F593FD1431B1}"/>
+              </a:ext>
+            </a:extLst>
+          </p:cNvPr>
+          <p:cNvGrpSpPr/>
+          <p:nvPr/>
+        </p:nvGrpSpPr>
+        <p:grpSpPr>
+          <a:xfrm>
+            <a:off x="1290621" y="7146318"/>
+            <a:ext cx="6819912" cy="9274145"/>
+            <a:chOff x="1290621" y="7146318"/>
+            <a:chExt cx="6819912" cy="9274145"/>
+          </a:xfrm>
+        </p:grpSpPr>
+        <p:sp>
+          <p:nvSpPr>
+            <p:cNvPr id="12" name="矩形: 圓角 11">
+              <a:extLst>
+                <a:ext uri="{FF2B5EF4-FFF2-40B4-BE49-F238E27FC236}">
+                  <a16:creationId xmlns:a16="http://schemas.microsoft.com/office/drawing/2014/main" id="{36632D2D-1589-ACA8-EEE5-374FD9E7D528}"/>
+                </a:ext>
+              </a:extLst>
+            </p:cNvPr>
+            <p:cNvSpPr/>
+            <p:nvPr/>
+          </p:nvSpPr>
+          <p:spPr>
+            <a:xfrm>
+              <a:off x="1290621" y="7146318"/>
+              <a:ext cx="6762752" cy="2557097"/>
+            </a:xfrm>
+            <a:prstGeom prst="roundRect">
+              <a:avLst/>
+            </a:prstGeom>
+            <a:solidFill>
+              <a:schemeClr val="accent6">
+                <a:lumMod val="40000"/>
+                <a:lumOff val="60000"/>
+                <a:alpha val="50000"/>
+              </a:schemeClr>
+            </a:solidFill>
+            <a:ln>
+              <a:noFill/>
+            </a:ln>
+          </p:spPr>
+          <p:style>
+            <a:lnRef idx="0">
+              <a:scrgbClr r="0" g="0" b="0"/>
+            </a:lnRef>
+            <a:fillRef idx="0">
+              <a:scrgbClr r="0" g="0" b="0"/>
+            </a:fillRef>
+            <a:effectRef idx="0">
+              <a:scrgbClr r="0" g="0" b="0"/>
+            </a:effectRef>
+            <a:fontRef idx="minor">
+              <a:schemeClr val="lt1"/>
+            </a:fontRef>
+          </p:style>
+          <p:txBody>
+            <a:bodyPr rtlCol="0" anchor="ctr"/>
+            <a:lstStyle/>
+            <a:p>
+              <a:pPr algn="ctr"/>
+              <a:endParaRPr lang="zh-TW" altLang="en-US"/>
+            </a:p>
+          </p:txBody>
+        </p:sp>
+        <p:sp>
+          <p:nvSpPr>
+            <p:cNvPr id="10" name="矩形: 圓角 9">
+              <a:extLst>
+                <a:ext uri="{FF2B5EF4-FFF2-40B4-BE49-F238E27FC236}">
+                  <a16:creationId xmlns:a16="http://schemas.microsoft.com/office/drawing/2014/main" id="{867194AC-ADB8-9A12-2336-21F113E13283}"/>
+                </a:ext>
+              </a:extLst>
+            </p:cNvPr>
+            <p:cNvSpPr/>
+            <p:nvPr/>
+          </p:nvSpPr>
+          <p:spPr>
+            <a:xfrm>
+              <a:off x="1290621" y="9913357"/>
+              <a:ext cx="6762752" cy="2557097"/>
+            </a:xfrm>
+            <a:prstGeom prst="roundRect">
+              <a:avLst/>
+            </a:prstGeom>
+            <a:solidFill>
+              <a:schemeClr val="accent4">
+                <a:lumMod val="40000"/>
+                <a:lumOff val="60000"/>
+                <a:alpha val="50000"/>
+              </a:schemeClr>
+            </a:solidFill>
+            <a:ln>
+              <a:noFill/>
+            </a:ln>
+          </p:spPr>
+          <p:style>
+            <a:lnRef idx="0">
+              <a:scrgbClr r="0" g="0" b="0"/>
+            </a:lnRef>
+            <a:fillRef idx="0">
+              <a:scrgbClr r="0" g="0" b="0"/>
+            </a:fillRef>
+            <a:effectRef idx="0">
+              <a:scrgbClr r="0" g="0" b="0"/>
+            </a:effectRef>
+            <a:fontRef idx="minor">
+              <a:schemeClr val="lt1"/>
+            </a:fontRef>
+          </p:style>
+          <p:txBody>
+            <a:bodyPr rtlCol="0" anchor="ctr"/>
+            <a:lstStyle/>
+            <a:p>
+              <a:pPr algn="ctr"/>
+              <a:endParaRPr lang="zh-TW" altLang="en-US"/>
+            </a:p>
+          </p:txBody>
+        </p:sp>
+        <p:sp>
+          <p:nvSpPr>
+            <p:cNvPr id="9" name="矩形: 圓角 8">
+              <a:extLst>
+                <a:ext uri="{FF2B5EF4-FFF2-40B4-BE49-F238E27FC236}">
+                  <a16:creationId xmlns:a16="http://schemas.microsoft.com/office/drawing/2014/main" id="{1EE6D3B3-1EDD-42D2-D073-6CA51AC18A9C}"/>
+                </a:ext>
+              </a:extLst>
+            </p:cNvPr>
+            <p:cNvSpPr/>
+            <p:nvPr/>
+          </p:nvSpPr>
+          <p:spPr>
+            <a:xfrm>
+              <a:off x="1347781" y="12648935"/>
+              <a:ext cx="6705592" cy="3771528"/>
+            </a:xfrm>
+            <a:prstGeom prst="roundRect">
+              <a:avLst/>
+            </a:prstGeom>
+            <a:solidFill>
+              <a:schemeClr val="accent5">
+                <a:lumMod val="40000"/>
+                <a:lumOff val="60000"/>
+                <a:alpha val="50000"/>
+              </a:schemeClr>
+            </a:solidFill>
+            <a:ln>
+              <a:noFill/>
+            </a:ln>
+          </p:spPr>
+          <p:style>
+            <a:lnRef idx="0">
+              <a:scrgbClr r="0" g="0" b="0"/>
+            </a:lnRef>
+            <a:fillRef idx="0">
+              <a:scrgbClr r="0" g="0" b="0"/>
+            </a:fillRef>
+            <a:effectRef idx="0">
+              <a:scrgbClr r="0" g="0" b="0"/>
+            </a:effectRef>
+            <a:fontRef idx="minor">
+              <a:schemeClr val="lt1"/>
+            </a:fontRef>
+          </p:style>
+          <p:txBody>
+            <a:bodyPr rtlCol="0" anchor="ctr"/>
+            <a:lstStyle/>
+            <a:p>
+              <a:pPr algn="ctr"/>
+              <a:endParaRPr lang="zh-TW" altLang="en-US"/>
+            </a:p>
+          </p:txBody>
+        </p:sp>
+        <p:sp>
+          <p:nvSpPr>
+            <p:cNvPr id="2" name="文字方塊 1">
+              <a:extLst>
+                <a:ext uri="{FF2B5EF4-FFF2-40B4-BE49-F238E27FC236}">
+                  <a16:creationId xmlns:a16="http://schemas.microsoft.com/office/drawing/2014/main" id="{C3E9BC8E-A950-87A2-78CD-FF66CB2BDAFF}"/>
+                </a:ext>
+              </a:extLst>
+            </p:cNvPr>
+            <p:cNvSpPr txBox="1"/>
+            <p:nvPr/>
+          </p:nvSpPr>
+          <p:spPr>
+            <a:xfrm>
+              <a:off x="2228848" y="11492284"/>
+              <a:ext cx="5000625" cy="646331"/>
+            </a:xfrm>
+            <a:prstGeom prst="rect">
+              <a:avLst/>
+            </a:prstGeom>
+            <a:noFill/>
+          </p:spPr>
+          <p:txBody>
+            <a:bodyPr wrap="square" rtlCol="0">
+              <a:spAutoFit/>
+            </a:bodyPr>
+            <a:lstStyle/>
+            <a:p>
+              <a:pPr algn="ctr"/>
+              <a:r>
+                <a:rPr lang="en-US" altLang="zh-TW" sz="3600" dirty="0"/>
+                <a:t>Scheduler</a:t>
+              </a:r>
+              <a:endParaRPr lang="zh-TW" altLang="en-US" sz="3600" dirty="0"/>
+            </a:p>
+          </p:txBody>
+        </p:sp>
+        <p:sp>
+          <p:nvSpPr>
+            <p:cNvPr id="3" name="文字方塊 2">
+              <a:extLst>
+                <a:ext uri="{FF2B5EF4-FFF2-40B4-BE49-F238E27FC236}">
+                  <a16:creationId xmlns:a16="http://schemas.microsoft.com/office/drawing/2014/main" id="{F7B37C88-2481-39EC-6ADE-31969A89D947}"/>
+                </a:ext>
+              </a:extLst>
+            </p:cNvPr>
+            <p:cNvSpPr txBox="1"/>
+            <p:nvPr/>
+          </p:nvSpPr>
+          <p:spPr>
+            <a:xfrm>
+              <a:off x="2228846" y="15595651"/>
+              <a:ext cx="5000625" cy="646331"/>
+            </a:xfrm>
+            <a:prstGeom prst="rect">
+              <a:avLst/>
+            </a:prstGeom>
+            <a:noFill/>
+          </p:spPr>
+          <p:txBody>
+            <a:bodyPr wrap="square" rtlCol="0">
+              <a:spAutoFit/>
+            </a:bodyPr>
+            <a:lstStyle/>
+            <a:p>
+              <a:pPr algn="ctr"/>
+              <a:r>
+                <a:rPr lang="en-US" altLang="zh-TW" sz="3600" dirty="0"/>
+                <a:t>Focused Fleet</a:t>
+              </a:r>
+              <a:endParaRPr lang="zh-TW" altLang="en-US" sz="3600" dirty="0"/>
+            </a:p>
+          </p:txBody>
+        </p:sp>
+        <p:sp>
+          <p:nvSpPr>
+            <p:cNvPr id="4" name="文字方塊 3">
+              <a:extLst>
+                <a:ext uri="{FF2B5EF4-FFF2-40B4-BE49-F238E27FC236}">
+                  <a16:creationId xmlns:a16="http://schemas.microsoft.com/office/drawing/2014/main" id="{81B356D5-149D-64AD-363F-C90079F9F3F9}"/>
+                </a:ext>
+              </a:extLst>
+            </p:cNvPr>
+            <p:cNvSpPr txBox="1"/>
+            <p:nvPr/>
+          </p:nvSpPr>
+          <p:spPr>
+            <a:xfrm>
+              <a:off x="2228847" y="14227862"/>
+              <a:ext cx="5000625" cy="646331"/>
+            </a:xfrm>
+            <a:prstGeom prst="rect">
+              <a:avLst/>
+            </a:prstGeom>
+            <a:noFill/>
+          </p:spPr>
+          <p:txBody>
+            <a:bodyPr wrap="square" rtlCol="0">
+              <a:spAutoFit/>
+            </a:bodyPr>
+            <a:lstStyle/>
+            <a:p>
+              <a:pPr algn="ctr"/>
+              <a:r>
+                <a:rPr lang="en-US" altLang="zh-TW" sz="3600" dirty="0"/>
+                <a:t>UAV-to-UAV Probe</a:t>
+              </a:r>
+              <a:endParaRPr lang="zh-TW" altLang="en-US" sz="3600" dirty="0"/>
+            </a:p>
+          </p:txBody>
+        </p:sp>
+        <p:sp>
+          <p:nvSpPr>
+            <p:cNvPr id="5" name="文字方塊 4">
+              <a:extLst>
+                <a:ext uri="{FF2B5EF4-FFF2-40B4-BE49-F238E27FC236}">
+                  <a16:creationId xmlns:a16="http://schemas.microsoft.com/office/drawing/2014/main" id="{BAD52B45-B5EB-9CB9-FE48-4DD4F0F83E4A}"/>
+                </a:ext>
+              </a:extLst>
+            </p:cNvPr>
+            <p:cNvSpPr txBox="1"/>
+            <p:nvPr/>
+          </p:nvSpPr>
+          <p:spPr>
+            <a:xfrm>
+              <a:off x="2228848" y="12860073"/>
+              <a:ext cx="5000625" cy="646331"/>
+            </a:xfrm>
+            <a:prstGeom prst="rect">
+              <a:avLst/>
+            </a:prstGeom>
+            <a:noFill/>
+          </p:spPr>
+          <p:txBody>
+            <a:bodyPr wrap="square" rtlCol="0">
+              <a:spAutoFit/>
+            </a:bodyPr>
+            <a:lstStyle/>
+            <a:p>
+              <a:pPr algn="ctr"/>
+              <a:r>
+                <a:rPr lang="en-US" altLang="zh-TW" sz="3600" dirty="0"/>
+                <a:t>Probe CSV</a:t>
+              </a:r>
+              <a:endParaRPr lang="zh-TW" altLang="en-US" sz="3600" dirty="0"/>
+            </a:p>
+          </p:txBody>
+        </p:sp>
+        <p:sp>
+          <p:nvSpPr>
+            <p:cNvPr id="6" name="文字方塊 5">
+              <a:extLst>
+                <a:ext uri="{FF2B5EF4-FFF2-40B4-BE49-F238E27FC236}">
+                  <a16:creationId xmlns:a16="http://schemas.microsoft.com/office/drawing/2014/main" id="{8758937C-F0D6-E50F-A5DB-1646AAE61E34}"/>
+                </a:ext>
+              </a:extLst>
+            </p:cNvPr>
+            <p:cNvSpPr txBox="1"/>
+            <p:nvPr/>
+          </p:nvSpPr>
+          <p:spPr>
+            <a:xfrm>
+              <a:off x="2228845" y="7388917"/>
+              <a:ext cx="5000625" cy="646331"/>
+            </a:xfrm>
+            <a:prstGeom prst="rect">
+              <a:avLst/>
+            </a:prstGeom>
+            <a:noFill/>
+          </p:spPr>
+          <p:txBody>
+            <a:bodyPr wrap="square" rtlCol="0">
+              <a:spAutoFit/>
+            </a:bodyPr>
+            <a:lstStyle/>
+            <a:p>
+              <a:pPr algn="ctr"/>
+              <a:r>
+                <a:rPr lang="en-US" altLang="zh-TW" sz="3600" dirty="0"/>
+                <a:t>UAV-to-LEO Uplink</a:t>
+              </a:r>
+              <a:endParaRPr lang="zh-TW" altLang="en-US" sz="3600" dirty="0"/>
+            </a:p>
+          </p:txBody>
+        </p:sp>
+        <p:sp>
+          <p:nvSpPr>
+            <p:cNvPr id="7" name="文字方塊 6">
+              <a:extLst>
+                <a:ext uri="{FF2B5EF4-FFF2-40B4-BE49-F238E27FC236}">
+                  <a16:creationId xmlns:a16="http://schemas.microsoft.com/office/drawing/2014/main" id="{7CDA19FF-67A7-E269-6322-9A29143EB8F8}"/>
+                </a:ext>
+              </a:extLst>
+            </p:cNvPr>
+            <p:cNvSpPr txBox="1"/>
+            <p:nvPr/>
+          </p:nvSpPr>
+          <p:spPr>
+            <a:xfrm>
+              <a:off x="1347781" y="8756706"/>
+              <a:ext cx="6762752" cy="646331"/>
+            </a:xfrm>
+            <a:prstGeom prst="rect">
+              <a:avLst/>
+            </a:prstGeom>
+            <a:noFill/>
+          </p:spPr>
+          <p:txBody>
+            <a:bodyPr wrap="square" rtlCol="0">
+              <a:spAutoFit/>
+            </a:bodyPr>
+            <a:lstStyle/>
+            <a:p>
+              <a:pPr algn="ctr"/>
+              <a:r>
+                <a:rPr lang="en-US" altLang="zh-TW" sz="3600" dirty="0"/>
+                <a:t>NS-3 Replay / Verification</a:t>
+              </a:r>
+              <a:endParaRPr lang="zh-TW" altLang="en-US" sz="3600" dirty="0"/>
+            </a:p>
+          </p:txBody>
+        </p:sp>
+        <p:sp>
+          <p:nvSpPr>
+            <p:cNvPr id="8" name="文字方塊 7">
+              <a:extLst>
+                <a:ext uri="{FF2B5EF4-FFF2-40B4-BE49-F238E27FC236}">
+                  <a16:creationId xmlns:a16="http://schemas.microsoft.com/office/drawing/2014/main" id="{73EE68CB-458B-D79B-C139-BF42E8897322}"/>
+                </a:ext>
+              </a:extLst>
+            </p:cNvPr>
+            <p:cNvSpPr txBox="1"/>
+            <p:nvPr/>
+          </p:nvSpPr>
+          <p:spPr>
+            <a:xfrm>
+              <a:off x="2228845" y="10124495"/>
+              <a:ext cx="5000625" cy="646331"/>
+            </a:xfrm>
+            <a:prstGeom prst="rect">
+              <a:avLst/>
+            </a:prstGeom>
+            <a:noFill/>
+          </p:spPr>
+          <p:txBody>
+            <a:bodyPr wrap="square" rtlCol="0">
+              <a:spAutoFit/>
+            </a:bodyPr>
+            <a:lstStyle/>
+            <a:p>
+              <a:pPr algn="ctr"/>
+              <a:r>
+                <a:rPr lang="en-US" altLang="zh-TW" sz="3600" dirty="0"/>
+                <a:t>Schedule JSON</a:t>
+              </a:r>
+              <a:endParaRPr lang="zh-TW" altLang="en-US" sz="3600" dirty="0"/>
+            </a:p>
+          </p:txBody>
+        </p:sp>
+      </p:grpSp>
     </p:spTree>
     <p:extLst>
       <p:ext uri="{BB962C8B-B14F-4D97-AF65-F5344CB8AC3E}">

--- a/docs/Report.pptx
+++ b/docs/Report.pptx
@@ -3687,7 +3687,7 @@
           </p:nvSpPr>
           <p:spPr>
             <a:xfrm>
-              <a:off x="3292987" y="9632697"/>
+              <a:off x="3292987" y="9661758"/>
               <a:ext cx="2228590" cy="567308"/>
             </a:xfrm>
             <a:prstGeom prst="rect">
@@ -4003,27 +4003,50 @@
                 <a:latin typeface="Times New Roman" panose="02020603050405020304" pitchFamily="18" charset="0"/>
                 <a:cs typeface="Times New Roman" panose="02020603050405020304" pitchFamily="18" charset="0"/>
               </a:rPr>
-              <a:t>The Cluster Head UAV maintains uplink across multiple LEO satellites over successive visible windows. As each satellite rises and sets, the simulation tracks geometry changes — slant distance and elevation angle — to compute FSPL, SNR, and Shannon capacity (</a:t>
+              <a:t>This section aims to establish a high-capacity uplink between the Cluster Head UAV and a fast-moving LEO satellite, the backhaul bottleneck of the entire SAGIN.</a:t>
             </a:r>
-            <a:r>
-              <a:rPr lang="en-US" altLang="zh-TW" sz="2800" i="1" dirty="0">
-                <a:latin typeface="Times New Roman" panose="02020603050405020304" pitchFamily="18" charset="0"/>
-                <a:cs typeface="Times New Roman" panose="02020603050405020304" pitchFamily="18" charset="0"/>
-              </a:rPr>
-              <a:t>C = B log₂(1+SNR)</a:t>
-            </a:r>
+          </a:p>
+          <a:p>
+            <a:pPr marL="514350" indent="-514350">
+              <a:buFont typeface="+mj-lt"/>
+              <a:buAutoNum type="arabicPeriod"/>
+            </a:pPr>
             <a:r>
               <a:rPr lang="en-US" altLang="zh-TW" sz="2800" dirty="0">
                 <a:latin typeface="Times New Roman" panose="02020603050405020304" pitchFamily="18" charset="0"/>
+                <a:ea typeface="標楷體" panose="03000509000000000000" pitchFamily="65" charset="-120"/>
                 <a:cs typeface="Times New Roman" panose="02020603050405020304" pitchFamily="18" charset="0"/>
               </a:rPr>
-              <a:t>). Hybrid beamforming (ULA array factor, elevation taper) steers the beam toward the current serving satellite, while SNR-adaptive rate control smoothly hands throughput between windows.</a:t>
+              <a:t>Link Budget Model: Pipeline: FSPL → SNR → Shannon capacity.</a:t>
             </a:r>
-            <a:endParaRPr lang="zh-TW" altLang="en-US" sz="2800" dirty="0">
-              <a:latin typeface="Times New Roman" panose="02020603050405020304" pitchFamily="18" charset="0"/>
-              <a:ea typeface="標楷體" panose="03000509000000000000" pitchFamily="65" charset="-120"/>
-              <a:cs typeface="Times New Roman" panose="02020603050405020304" pitchFamily="18" charset="0"/>
-            </a:endParaRPr>
+          </a:p>
+          <a:p>
+            <a:pPr marL="514350" indent="-514350">
+              <a:buFont typeface="+mj-lt"/>
+              <a:buAutoNum type="arabicPeriod"/>
+            </a:pPr>
+            <a:r>
+              <a:rPr lang="en-US" altLang="zh-TW" sz="2800" dirty="0">
+                <a:latin typeface="Times New Roman" panose="02020603050405020304" pitchFamily="18" charset="0"/>
+                <a:ea typeface="標楷體" panose="03000509000000000000" pitchFamily="65" charset="-120"/>
+                <a:cs typeface="Times New Roman" panose="02020603050405020304" pitchFamily="18" charset="0"/>
+              </a:rPr>
+              <a:t>Hybrid Beamforming Gain: Physical Model (Fig. 1)</a:t>
+            </a:r>
+          </a:p>
+          <a:p>
+            <a:pPr marL="514350" indent="-514350">
+              <a:buFont typeface="+mj-lt"/>
+              <a:buAutoNum type="arabicPeriod"/>
+            </a:pPr>
+            <a:r>
+              <a:rPr lang="en-US" altLang="zh-TW" sz="2800" dirty="0">
+                <a:latin typeface="Times New Roman" panose="02020603050405020304" pitchFamily="18" charset="0"/>
+                <a:ea typeface="標楷體" panose="03000509000000000000" pitchFamily="65" charset="-120"/>
+                <a:cs typeface="Times New Roman" panose="02020603050405020304" pitchFamily="18" charset="0"/>
+              </a:rPr>
+              <a:t>SNR-Adaptive Rate Control: Recompute SNR from current geometry.</a:t>
+            </a:r>
           </a:p>
         </p:txBody>
       </p:sp>
@@ -8622,7 +8645,7 @@
         </p:nvSpPr>
         <p:spPr>
           <a:xfrm>
-            <a:off x="10195676" y="22996726"/>
+            <a:off x="10087911" y="23122212"/>
             <a:ext cx="3268875" cy="707886"/>
           </a:xfrm>
           <a:prstGeom prst="rect">
@@ -8638,10 +8661,16 @@
           <a:p>
             <a:pPr algn="ctr"/>
             <a:r>
-              <a:rPr lang="en-US" altLang="zh-TW" sz="2000" dirty="0"/>
+              <a:rPr lang="en-US" altLang="zh-TW" sz="2000" dirty="0">
+                <a:latin typeface="Times New Roman" panose="02020603050405020304" pitchFamily="18" charset="0"/>
+                <a:cs typeface="Times New Roman" panose="02020603050405020304" pitchFamily="18" charset="0"/>
+              </a:rPr>
               <a:t>Fig. 1: Polar Beamforming Patterns</a:t>
             </a:r>
-            <a:endParaRPr lang="zh-TW" altLang="en-US" sz="2000" dirty="0"/>
+            <a:endParaRPr lang="zh-TW" altLang="en-US" sz="2000" dirty="0">
+              <a:latin typeface="Times New Roman" panose="02020603050405020304" pitchFamily="18" charset="0"/>
+              <a:cs typeface="Times New Roman" panose="02020603050405020304" pitchFamily="18" charset="0"/>
+            </a:endParaRPr>
           </a:p>
         </p:txBody>
       </p:sp>
@@ -8682,42 +8711,6 @@
           </a:p>
         </p:txBody>
       </p:sp>
-      <p:pic>
-        <p:nvPicPr>
-          <p:cNvPr id="123" name="圖形 122">
-            <a:extLst>
-              <a:ext uri="{FF2B5EF4-FFF2-40B4-BE49-F238E27FC236}">
-                <a16:creationId xmlns:a16="http://schemas.microsoft.com/office/drawing/2014/main" id="{46FF9D9C-A2EC-C35F-A357-A45EB98096CB}"/>
-              </a:ext>
-            </a:extLst>
-          </p:cNvPr>
-          <p:cNvPicPr>
-            <a:picLocks noChangeAspect="1"/>
-          </p:cNvPicPr>
-          <p:nvPr/>
-        </p:nvPicPr>
-        <p:blipFill>
-          <a:blip>
-            <a:extLst>
-              <a:ext uri="{96DAC541-7B7A-43D3-8B79-37D633B846F1}">
-                <asvg:svgBlip xmlns:asvg="http://schemas.microsoft.com/office/drawing/2016/SVG/main" r:embed="rId7"/>
-              </a:ext>
-            </a:extLst>
-          </a:blip>
-          <a:stretch>
-            <a:fillRect/>
-          </a:stretch>
-        </p:blipFill>
-        <p:spPr>
-          <a:xfrm>
-            <a:off x="14838234" y="13788476"/>
-            <a:ext cx="5669023" cy="3921150"/>
-          </a:xfrm>
-          <a:prstGeom prst="rect">
-            <a:avLst/>
-          </a:prstGeom>
-        </p:spPr>
-      </p:pic>
       <p:sp>
         <p:nvSpPr>
           <p:cNvPr id="124" name="文字方塊 123">
@@ -8732,7 +8725,7 @@
         </p:nvSpPr>
         <p:spPr>
           <a:xfrm>
-            <a:off x="14477174" y="17695827"/>
+            <a:off x="14477174" y="17740677"/>
             <a:ext cx="6384302" cy="400110"/>
           </a:xfrm>
           <a:prstGeom prst="rect">
@@ -8769,8 +8762,8 @@
         </p:nvSpPr>
         <p:spPr>
           <a:xfrm>
-            <a:off x="14631135" y="18083646"/>
-            <a:ext cx="6208932" cy="5693866"/>
+            <a:off x="14631134" y="18132484"/>
+            <a:ext cx="6208932" cy="5262979"/>
           </a:xfrm>
           <a:prstGeom prst="rect">
             <a:avLst/>
@@ -8783,21 +8776,397 @@
           </a:bodyPr>
           <a:lstStyle/>
           <a:p>
+            <a:pPr marL="457200" indent="-457200">
+              <a:buFont typeface="Arial" panose="020B0604020202020204" pitchFamily="34" charset="0"/>
+              <a:buChar char="•"/>
+            </a:pPr>
             <a:r>
               <a:rPr lang="en-US" altLang="zh-TW" sz="2800" dirty="0">
                 <a:latin typeface="Times New Roman" panose="02020603050405020304" pitchFamily="18" charset="0"/>
                 <a:cs typeface="Times New Roman" panose="02020603050405020304" pitchFamily="18" charset="0"/>
               </a:rPr>
-              <a:t>Three NS-3 simulation modules operate in pipeline. A Focused Fleet of UAVs performs pairwise UAV-to-UAV Probing, logging link quality measurements into a Probe CSV. An external Scheduler produces a Schedule JSON defining the communication task plan. The NS-3 Replay &amp; Verification engine ingests both files to replay the schedule and validate deadline feasibility. Verified uplink traffic is finally handed to UAV-to-LEO Uplink, where the Cluster Head UAV transmits the aggregated data to the LEO satellite.</a:t>
+              <a:t>SAGIN hierarchy: Sensor → Slave UAV → CH UAV → LEO satellite</a:t>
             </a:r>
-            <a:endParaRPr lang="zh-TW" altLang="en-US" sz="2800" dirty="0">
-              <a:latin typeface="Times New Roman" panose="02020603050405020304" pitchFamily="18" charset="0"/>
-              <a:ea typeface="標楷體" panose="03000509000000000000" pitchFamily="65" charset="-120"/>
-              <a:cs typeface="Times New Roman" panose="02020603050405020304" pitchFamily="18" charset="0"/>
-            </a:endParaRPr>
+          </a:p>
+          <a:p>
+            <a:pPr marL="457200" indent="-457200">
+              <a:buFont typeface="Arial" panose="020B0604020202020204" pitchFamily="34" charset="0"/>
+              <a:buChar char="•"/>
+            </a:pPr>
+            <a:r>
+              <a:rPr lang="en-US" altLang="zh-TW" sz="2800" dirty="0">
+                <a:latin typeface="Times New Roman" panose="02020603050405020304" pitchFamily="18" charset="0"/>
+                <a:cs typeface="Times New Roman" panose="02020603050405020304" pitchFamily="18" charset="0"/>
+              </a:rPr>
+              <a:t>Role split: Slave UAVs collect IoT data; CH UAV holds the satellite backhaul</a:t>
+            </a:r>
+          </a:p>
+          <a:p>
+            <a:pPr marL="457200" indent="-457200">
+              <a:buFont typeface="Arial" panose="020B0604020202020204" pitchFamily="34" charset="0"/>
+              <a:buChar char="•"/>
+            </a:pPr>
+            <a:r>
+              <a:rPr lang="en-US" altLang="zh-TW" sz="2800" dirty="0">
+                <a:latin typeface="Times New Roman" panose="02020603050405020304" pitchFamily="18" charset="0"/>
+                <a:cs typeface="Times New Roman" panose="02020603050405020304" pitchFamily="18" charset="0"/>
+              </a:rPr>
+              <a:t>Why pipeline? Intermittent LEO visibility + massive access congestion demand offline scheduling before uplink</a:t>
+            </a:r>
+          </a:p>
+          <a:p>
+            <a:pPr marL="457200" indent="-457200">
+              <a:buFont typeface="Arial" panose="020B0604020202020204" pitchFamily="34" charset="0"/>
+              <a:buChar char="•"/>
+            </a:pPr>
+            <a:r>
+              <a:rPr lang="en-US" altLang="zh-TW" sz="2800" dirty="0">
+                <a:latin typeface="Times New Roman" panose="02020603050405020304" pitchFamily="18" charset="0"/>
+                <a:cs typeface="Times New Roman" panose="02020603050405020304" pitchFamily="18" charset="0"/>
+              </a:rPr>
+              <a:t>NS-3.35 + ns-3-leo: each link simulated independently: uas-probe.cc (intra-fleet), uav-to-leo.cc (backhaul)</a:t>
+            </a:r>
           </a:p>
         </p:txBody>
       </p:sp>
+      <p:pic>
+        <p:nvPicPr>
+          <p:cNvPr id="8" name="圖片 7">
+            <a:extLst>
+              <a:ext uri="{FF2B5EF4-FFF2-40B4-BE49-F238E27FC236}">
+                <a16:creationId xmlns:a16="http://schemas.microsoft.com/office/drawing/2014/main" id="{2B97F92C-5FA1-9D94-2E5F-9A433226617B}"/>
+              </a:ext>
+            </a:extLst>
+          </p:cNvPr>
+          <p:cNvPicPr>
+            <a:picLocks noChangeAspect="1"/>
+          </p:cNvPicPr>
+          <p:nvPr/>
+        </p:nvPicPr>
+        <p:blipFill>
+          <a:blip r:embed="rId7">
+            <a:extLst>
+              <a:ext uri="{28A0092B-C50C-407E-A947-70E740481C1C}">
+                <a14:useLocalDpi xmlns:a14="http://schemas.microsoft.com/office/drawing/2010/main" val="0"/>
+              </a:ext>
+            </a:extLst>
+          </a:blip>
+          <a:stretch>
+            <a:fillRect/>
+          </a:stretch>
+        </p:blipFill>
+        <p:spPr>
+          <a:xfrm>
+            <a:off x="14631134" y="13762590"/>
+            <a:ext cx="6072687" cy="4048458"/>
+          </a:xfrm>
+          <a:prstGeom prst="rect">
+            <a:avLst/>
+          </a:prstGeom>
+        </p:spPr>
+      </p:pic>
+      <p:cxnSp>
+        <p:nvCxnSpPr>
+          <p:cNvPr id="19" name="直線單箭頭接點 18">
+            <a:extLst>
+              <a:ext uri="{FF2B5EF4-FFF2-40B4-BE49-F238E27FC236}">
+                <a16:creationId xmlns:a16="http://schemas.microsoft.com/office/drawing/2014/main" id="{7DEEF859-54D4-C2BF-D61E-30FCCFF23DDB}"/>
+              </a:ext>
+            </a:extLst>
+          </p:cNvPr>
+          <p:cNvCxnSpPr>
+            <a:cxnSpLocks/>
+          </p:cNvCxnSpPr>
+          <p:nvPr/>
+        </p:nvCxnSpPr>
+        <p:spPr>
+          <a:xfrm>
+            <a:off x="13954964" y="16263051"/>
+            <a:ext cx="809548" cy="0"/>
+          </a:xfrm>
+          <a:prstGeom prst="straightConnector1">
+            <a:avLst/>
+          </a:prstGeom>
+          <a:ln w="28575">
+            <a:solidFill>
+              <a:srgbClr val="FF0000"/>
+            </a:solidFill>
+            <a:tailEnd type="triangle"/>
+          </a:ln>
+        </p:spPr>
+        <p:style>
+          <a:lnRef idx="2">
+            <a:schemeClr val="accent1"/>
+          </a:lnRef>
+          <a:fillRef idx="0">
+            <a:schemeClr val="accent1"/>
+          </a:fillRef>
+          <a:effectRef idx="1">
+            <a:schemeClr val="accent1"/>
+          </a:effectRef>
+          <a:fontRef idx="minor">
+            <a:schemeClr val="tx1"/>
+          </a:fontRef>
+        </p:style>
+      </p:cxnSp>
+      <p:cxnSp>
+        <p:nvCxnSpPr>
+          <p:cNvPr id="134" name="直線接點 133">
+            <a:extLst>
+              <a:ext uri="{FF2B5EF4-FFF2-40B4-BE49-F238E27FC236}">
+                <a16:creationId xmlns:a16="http://schemas.microsoft.com/office/drawing/2014/main" id="{ED7D9CE6-CD08-1C69-969F-5AF60A4F7662}"/>
+              </a:ext>
+            </a:extLst>
+          </p:cNvPr>
+          <p:cNvCxnSpPr>
+            <a:cxnSpLocks/>
+            <a:stCxn id="26" idx="3"/>
+          </p:cNvCxnSpPr>
+          <p:nvPr/>
+        </p:nvCxnSpPr>
+        <p:spPr>
+          <a:xfrm flipV="1">
+            <a:off x="13941479" y="21511534"/>
+            <a:ext cx="313691" cy="4"/>
+          </a:xfrm>
+          <a:prstGeom prst="line">
+            <a:avLst/>
+          </a:prstGeom>
+          <a:ln w="28575">
+            <a:solidFill>
+              <a:srgbClr val="FF0000"/>
+            </a:solidFill>
+          </a:ln>
+        </p:spPr>
+        <p:style>
+          <a:lnRef idx="2">
+            <a:schemeClr val="accent1"/>
+          </a:lnRef>
+          <a:fillRef idx="0">
+            <a:schemeClr val="accent1"/>
+          </a:fillRef>
+          <a:effectRef idx="1">
+            <a:schemeClr val="accent1"/>
+          </a:effectRef>
+          <a:fontRef idx="minor">
+            <a:schemeClr val="tx1"/>
+          </a:fontRef>
+        </p:style>
+      </p:cxnSp>
+      <p:cxnSp>
+        <p:nvCxnSpPr>
+          <p:cNvPr id="136" name="直線接點 135">
+            <a:extLst>
+              <a:ext uri="{FF2B5EF4-FFF2-40B4-BE49-F238E27FC236}">
+                <a16:creationId xmlns:a16="http://schemas.microsoft.com/office/drawing/2014/main" id="{C94570F3-5C22-B00A-5D46-04CDEBF393D1}"/>
+              </a:ext>
+            </a:extLst>
+          </p:cNvPr>
+          <p:cNvCxnSpPr/>
+          <p:nvPr/>
+        </p:nvCxnSpPr>
+        <p:spPr>
+          <a:xfrm flipV="1">
+            <a:off x="14240256" y="17337024"/>
+            <a:ext cx="0" cy="4174513"/>
+          </a:xfrm>
+          <a:prstGeom prst="line">
+            <a:avLst/>
+          </a:prstGeom>
+          <a:ln w="28575">
+            <a:solidFill>
+              <a:srgbClr val="FF0000"/>
+            </a:solidFill>
+          </a:ln>
+        </p:spPr>
+        <p:style>
+          <a:lnRef idx="2">
+            <a:schemeClr val="accent1"/>
+          </a:lnRef>
+          <a:fillRef idx="0">
+            <a:schemeClr val="accent1"/>
+          </a:fillRef>
+          <a:effectRef idx="1">
+            <a:schemeClr val="accent1"/>
+          </a:effectRef>
+          <a:fontRef idx="minor">
+            <a:schemeClr val="tx1"/>
+          </a:fontRef>
+        </p:style>
+      </p:cxnSp>
+      <p:cxnSp>
+        <p:nvCxnSpPr>
+          <p:cNvPr id="138" name="直線單箭頭接點 137">
+            <a:extLst>
+              <a:ext uri="{FF2B5EF4-FFF2-40B4-BE49-F238E27FC236}">
+                <a16:creationId xmlns:a16="http://schemas.microsoft.com/office/drawing/2014/main" id="{43883191-3195-0783-B384-21511476990B}"/>
+              </a:ext>
+            </a:extLst>
+          </p:cNvPr>
+          <p:cNvCxnSpPr/>
+          <p:nvPr/>
+        </p:nvCxnSpPr>
+        <p:spPr>
+          <a:xfrm>
+            <a:off x="14225696" y="17337024"/>
+            <a:ext cx="2406396" cy="0"/>
+          </a:xfrm>
+          <a:prstGeom prst="straightConnector1">
+            <a:avLst/>
+          </a:prstGeom>
+          <a:ln w="28575">
+            <a:solidFill>
+              <a:srgbClr val="FF0000"/>
+            </a:solidFill>
+            <a:tailEnd type="triangle"/>
+          </a:ln>
+        </p:spPr>
+        <p:style>
+          <a:lnRef idx="2">
+            <a:schemeClr val="accent1"/>
+          </a:lnRef>
+          <a:fillRef idx="0">
+            <a:schemeClr val="accent1"/>
+          </a:fillRef>
+          <a:effectRef idx="1">
+            <a:schemeClr val="accent1"/>
+          </a:effectRef>
+          <a:fontRef idx="minor">
+            <a:schemeClr val="tx1"/>
+          </a:fontRef>
+        </p:style>
+      </p:cxnSp>
+      <p:cxnSp>
+        <p:nvCxnSpPr>
+          <p:cNvPr id="139" name="直線接點 138">
+            <a:extLst>
+              <a:ext uri="{FF2B5EF4-FFF2-40B4-BE49-F238E27FC236}">
+                <a16:creationId xmlns:a16="http://schemas.microsoft.com/office/drawing/2014/main" id="{715F88FD-1371-3CB8-B728-7AB18F6B071B}"/>
+              </a:ext>
+            </a:extLst>
+          </p:cNvPr>
+          <p:cNvCxnSpPr>
+            <a:cxnSpLocks/>
+            <a:stCxn id="16" idx="3"/>
+          </p:cNvCxnSpPr>
+          <p:nvPr/>
+        </p:nvCxnSpPr>
+        <p:spPr>
+          <a:xfrm>
+            <a:off x="13931846" y="11387392"/>
+            <a:ext cx="308410" cy="0"/>
+          </a:xfrm>
+          <a:prstGeom prst="line">
+            <a:avLst/>
+          </a:prstGeom>
+          <a:ln w="28575">
+            <a:solidFill>
+              <a:srgbClr val="FF0000"/>
+            </a:solidFill>
+          </a:ln>
+        </p:spPr>
+        <p:style>
+          <a:lnRef idx="2">
+            <a:schemeClr val="accent1"/>
+          </a:lnRef>
+          <a:fillRef idx="0">
+            <a:schemeClr val="accent1"/>
+          </a:fillRef>
+          <a:effectRef idx="1">
+            <a:schemeClr val="accent1"/>
+          </a:effectRef>
+          <a:fontRef idx="minor">
+            <a:schemeClr val="tx1"/>
+          </a:fontRef>
+        </p:style>
+      </p:cxnSp>
+      <p:cxnSp>
+        <p:nvCxnSpPr>
+          <p:cNvPr id="140" name="直線接點 139">
+            <a:extLst>
+              <a:ext uri="{FF2B5EF4-FFF2-40B4-BE49-F238E27FC236}">
+                <a16:creationId xmlns:a16="http://schemas.microsoft.com/office/drawing/2014/main" id="{12B514FA-2D54-6AB9-58F2-A50A56F8B3A8}"/>
+              </a:ext>
+            </a:extLst>
+          </p:cNvPr>
+          <p:cNvCxnSpPr>
+            <a:cxnSpLocks/>
+          </p:cNvCxnSpPr>
+          <p:nvPr/>
+        </p:nvCxnSpPr>
+        <p:spPr>
+          <a:xfrm flipV="1">
+            <a:off x="14230623" y="11387391"/>
+            <a:ext cx="0" cy="3910919"/>
+          </a:xfrm>
+          <a:prstGeom prst="line">
+            <a:avLst/>
+          </a:prstGeom>
+          <a:ln w="28575">
+            <a:solidFill>
+              <a:srgbClr val="FF0000"/>
+            </a:solidFill>
+          </a:ln>
+        </p:spPr>
+        <p:style>
+          <a:lnRef idx="2">
+            <a:schemeClr val="accent1"/>
+          </a:lnRef>
+          <a:fillRef idx="0">
+            <a:schemeClr val="accent1"/>
+          </a:fillRef>
+          <a:effectRef idx="1">
+            <a:schemeClr val="accent1"/>
+          </a:effectRef>
+          <a:fontRef idx="minor">
+            <a:schemeClr val="tx1"/>
+          </a:fontRef>
+        </p:style>
+      </p:cxnSp>
+      <p:cxnSp>
+        <p:nvCxnSpPr>
+          <p:cNvPr id="143" name="直線單箭頭接點 142">
+            <a:extLst>
+              <a:ext uri="{FF2B5EF4-FFF2-40B4-BE49-F238E27FC236}">
+                <a16:creationId xmlns:a16="http://schemas.microsoft.com/office/drawing/2014/main" id="{B0E69C56-A713-9171-0995-F54FA708FB6C}"/>
+              </a:ext>
+            </a:extLst>
+          </p:cNvPr>
+          <p:cNvCxnSpPr>
+            <a:cxnSpLocks/>
+          </p:cNvCxnSpPr>
+          <p:nvPr/>
+        </p:nvCxnSpPr>
+        <p:spPr>
+          <a:xfrm>
+            <a:off x="14217161" y="15298310"/>
+            <a:ext cx="544439" cy="0"/>
+          </a:xfrm>
+          <a:prstGeom prst="straightConnector1">
+            <a:avLst/>
+          </a:prstGeom>
+          <a:ln w="28575">
+            <a:solidFill>
+              <a:srgbClr val="FF0000"/>
+            </a:solidFill>
+            <a:tailEnd type="triangle"/>
+          </a:ln>
+        </p:spPr>
+        <p:style>
+          <a:lnRef idx="2">
+            <a:schemeClr val="accent1"/>
+          </a:lnRef>
+          <a:fillRef idx="0">
+            <a:schemeClr val="accent1"/>
+          </a:fillRef>
+          <a:effectRef idx="1">
+            <a:schemeClr val="accent1"/>
+          </a:effectRef>
+          <a:fontRef idx="minor">
+            <a:schemeClr val="tx1"/>
+          </a:fontRef>
+        </p:style>
+      </p:cxnSp>
     </p:spTree>
     <p:extLst>
       <p:ext uri="{BB962C8B-B14F-4D97-AF65-F5344CB8AC3E}">
@@ -9124,4 +9493,26 @@
     </a:ext>
   </a:extLst>
 </a:theme>
+</file>
+
+<file path=ppt/webextensions/taskpanes.xml><?xml version="1.0" encoding="utf-8"?>
+<wetp:taskpanes xmlns:wetp="http://schemas.microsoft.com/office/webextensions/taskpanes/2010/11">
+  <wetp:taskpane dockstate="right" visibility="0" width="438" row="7">
+    <wetp:webextensionref xmlns:r="http://schemas.openxmlformats.org/officeDocument/2006/relationships" r:id="rId1"/>
+  </wetp:taskpane>
+</wetp:taskpanes>
+</file>
+
+<file path=ppt/webextensions/webextension1.xml><?xml version="1.0" encoding="utf-8"?>
+<we:webextension xmlns:we="http://schemas.microsoft.com/office/webextensions/webextension/2010/11" id="{B01747F6-A2D4-4110-A5FA-5607DAE5FF0E}">
+  <we:reference id="wa200010001" version="1.0.0.1" store="en-US" storeType="OMEX"/>
+  <we:alternateReferences>
+    <we:reference id="wa200010001" version="1.0.0.1" store="en-US" storeType="OMEX"/>
+  </we:alternateReferences>
+  <we:properties>
+    <we:property name="claude.fileId" value="&quot;1135e1cd-4394-4472-a204-845e7f069d5c&quot;"/>
+  </we:properties>
+  <we:bindings/>
+  <we:snapshot xmlns:r="http://schemas.openxmlformats.org/officeDocument/2006/relationships"/>
+</we:webextension>
 </file>
--- a/docs/Report.pptx
+++ b/docs/Report.pptx
@@ -243,7 +243,7 @@
           <a:p>
             <a:fld id="{643FB994-8C7A-432F-9145-2B89982E5304}" type="datetimeFigureOut">
               <a:rPr lang="zh-TW" altLang="en-US" smtClean="0"/>
-              <a:t>2026/5/4</a:t>
+              <a:t>2026/5/6</a:t>
             </a:fld>
             <a:endParaRPr lang="zh-TW" altLang="en-US"/>
           </a:p>
@@ -413,7 +413,7 @@
           <a:p>
             <a:fld id="{643FB994-8C7A-432F-9145-2B89982E5304}" type="datetimeFigureOut">
               <a:rPr lang="zh-TW" altLang="en-US" smtClean="0"/>
-              <a:t>2026/5/4</a:t>
+              <a:t>2026/5/6</a:t>
             </a:fld>
             <a:endParaRPr lang="zh-TW" altLang="en-US"/>
           </a:p>
@@ -593,7 +593,7 @@
           <a:p>
             <a:fld id="{643FB994-8C7A-432F-9145-2B89982E5304}" type="datetimeFigureOut">
               <a:rPr lang="zh-TW" altLang="en-US" smtClean="0"/>
-              <a:t>2026/5/4</a:t>
+              <a:t>2026/5/6</a:t>
             </a:fld>
             <a:endParaRPr lang="zh-TW" altLang="en-US"/>
           </a:p>
@@ -763,7 +763,7 @@
           <a:p>
             <a:fld id="{643FB994-8C7A-432F-9145-2B89982E5304}" type="datetimeFigureOut">
               <a:rPr lang="zh-TW" altLang="en-US" smtClean="0"/>
-              <a:t>2026/5/4</a:t>
+              <a:t>2026/5/6</a:t>
             </a:fld>
             <a:endParaRPr lang="zh-TW" altLang="en-US"/>
           </a:p>
@@ -1009,7 +1009,7 @@
           <a:p>
             <a:fld id="{643FB994-8C7A-432F-9145-2B89982E5304}" type="datetimeFigureOut">
               <a:rPr lang="zh-TW" altLang="en-US" smtClean="0"/>
-              <a:t>2026/5/4</a:t>
+              <a:t>2026/5/6</a:t>
             </a:fld>
             <a:endParaRPr lang="zh-TW" altLang="en-US"/>
           </a:p>
@@ -1241,7 +1241,7 @@
           <a:p>
             <a:fld id="{643FB994-8C7A-432F-9145-2B89982E5304}" type="datetimeFigureOut">
               <a:rPr lang="zh-TW" altLang="en-US" smtClean="0"/>
-              <a:t>2026/5/4</a:t>
+              <a:t>2026/5/6</a:t>
             </a:fld>
             <a:endParaRPr lang="zh-TW" altLang="en-US"/>
           </a:p>
@@ -1608,7 +1608,7 @@
           <a:p>
             <a:fld id="{643FB994-8C7A-432F-9145-2B89982E5304}" type="datetimeFigureOut">
               <a:rPr lang="zh-TW" altLang="en-US" smtClean="0"/>
-              <a:t>2026/5/4</a:t>
+              <a:t>2026/5/6</a:t>
             </a:fld>
             <a:endParaRPr lang="zh-TW" altLang="en-US"/>
           </a:p>
@@ -1726,7 +1726,7 @@
           <a:p>
             <a:fld id="{643FB994-8C7A-432F-9145-2B89982E5304}" type="datetimeFigureOut">
               <a:rPr lang="zh-TW" altLang="en-US" smtClean="0"/>
-              <a:t>2026/5/4</a:t>
+              <a:t>2026/5/6</a:t>
             </a:fld>
             <a:endParaRPr lang="zh-TW" altLang="en-US"/>
           </a:p>
@@ -1821,7 +1821,7 @@
           <a:p>
             <a:fld id="{643FB994-8C7A-432F-9145-2B89982E5304}" type="datetimeFigureOut">
               <a:rPr lang="zh-TW" altLang="en-US" smtClean="0"/>
-              <a:t>2026/5/4</a:t>
+              <a:t>2026/5/6</a:t>
             </a:fld>
             <a:endParaRPr lang="zh-TW" altLang="en-US"/>
           </a:p>
@@ -2098,7 +2098,7 @@
           <a:p>
             <a:fld id="{643FB994-8C7A-432F-9145-2B89982E5304}" type="datetimeFigureOut">
               <a:rPr lang="zh-TW" altLang="en-US" smtClean="0"/>
-              <a:t>2026/5/4</a:t>
+              <a:t>2026/5/6</a:t>
             </a:fld>
             <a:endParaRPr lang="zh-TW" altLang="en-US"/>
           </a:p>
@@ -2355,7 +2355,7 @@
           <a:p>
             <a:fld id="{643FB994-8C7A-432F-9145-2B89982E5304}" type="datetimeFigureOut">
               <a:rPr lang="zh-TW" altLang="en-US" smtClean="0"/>
-              <a:t>2026/5/4</a:t>
+              <a:t>2026/5/6</a:t>
             </a:fld>
             <a:endParaRPr lang="zh-TW" altLang="en-US"/>
           </a:p>
@@ -2568,7 +2568,7 @@
           <a:p>
             <a:fld id="{643FB994-8C7A-432F-9145-2B89982E5304}" type="datetimeFigureOut">
               <a:rPr lang="zh-TW" altLang="en-US" smtClean="0"/>
-              <a:t>2026/5/4</a:t>
+              <a:t>2026/5/6</a:t>
             </a:fld>
             <a:endParaRPr lang="zh-TW" altLang="en-US"/>
           </a:p>
@@ -2973,6 +2973,815 @@
           <a:chExt cx="0" cy="0"/>
         </a:xfrm>
       </p:grpSpPr>
+      <p:grpSp>
+        <p:nvGrpSpPr>
+          <p:cNvPr id="43" name="群組 42">
+            <a:extLst>
+              <a:ext uri="{FF2B5EF4-FFF2-40B4-BE49-F238E27FC236}">
+                <a16:creationId xmlns:a16="http://schemas.microsoft.com/office/drawing/2014/main" id="{9EC42D2E-2BE8-CE40-4DA3-94BA8AA79D2C}"/>
+              </a:ext>
+            </a:extLst>
+          </p:cNvPr>
+          <p:cNvGrpSpPr/>
+          <p:nvPr/>
+        </p:nvGrpSpPr>
+        <p:grpSpPr>
+          <a:xfrm>
+            <a:off x="10937797" y="12065713"/>
+            <a:ext cx="1813156" cy="1486293"/>
+            <a:chOff x="11452052" y="9350311"/>
+            <a:chExt cx="2602438" cy="2066339"/>
+          </a:xfrm>
+        </p:grpSpPr>
+        <p:grpSp>
+          <p:nvGrpSpPr>
+            <p:cNvPr id="10" name="群組 9">
+              <a:extLst>
+                <a:ext uri="{FF2B5EF4-FFF2-40B4-BE49-F238E27FC236}">
+                  <a16:creationId xmlns:a16="http://schemas.microsoft.com/office/drawing/2014/main" id="{CC6C6C7E-EEDA-04EC-7E2C-22CB0C298DE6}"/>
+                </a:ext>
+              </a:extLst>
+            </p:cNvPr>
+            <p:cNvGrpSpPr/>
+            <p:nvPr/>
+          </p:nvGrpSpPr>
+          <p:grpSpPr>
+            <a:xfrm>
+              <a:off x="11452052" y="9350311"/>
+              <a:ext cx="2369088" cy="2066339"/>
+              <a:chOff x="13531736" y="8046847"/>
+              <a:chExt cx="2369088" cy="1661086"/>
+            </a:xfrm>
+          </p:grpSpPr>
+          <p:pic>
+            <p:nvPicPr>
+              <p:cNvPr id="37" name="Google Shape;103;g3d00297c732_0_7" title="UAV.jpg">
+                <a:extLst>
+                  <a:ext uri="{FF2B5EF4-FFF2-40B4-BE49-F238E27FC236}">
+                    <a16:creationId xmlns:a16="http://schemas.microsoft.com/office/drawing/2014/main" id="{D8E118A8-0280-2823-FDB4-6089F61AE98A}"/>
+                  </a:ext>
+                </a:extLst>
+              </p:cNvPr>
+              <p:cNvPicPr preferRelativeResize="0"/>
+              <p:nvPr/>
+            </p:nvPicPr>
+            <p:blipFill rotWithShape="1">
+              <a:blip r:embed="rId2">
+                <a:alphaModFix/>
+              </a:blip>
+              <a:srcRect l="7734" t="19877" r="3576" b="30215"/>
+              <a:stretch>
+                <a:fillRect/>
+              </a:stretch>
+            </p:blipFill>
+            <p:spPr>
+              <a:xfrm>
+                <a:off x="14173254" y="8046847"/>
+                <a:ext cx="1110501" cy="577138"/>
+              </a:xfrm>
+              <a:prstGeom prst="rect">
+                <a:avLst/>
+              </a:prstGeom>
+              <a:noFill/>
+              <a:ln>
+                <a:noFill/>
+              </a:ln>
+            </p:spPr>
+          </p:pic>
+          <p:pic>
+            <p:nvPicPr>
+              <p:cNvPr id="35" name="Google Shape;103;g3d00297c732_0_7" title="UAV.jpg">
+                <a:extLst>
+                  <a:ext uri="{FF2B5EF4-FFF2-40B4-BE49-F238E27FC236}">
+                    <a16:creationId xmlns:a16="http://schemas.microsoft.com/office/drawing/2014/main" id="{1FA300D6-9F3B-DA5E-72A7-E2CDF3BEBC74}"/>
+                  </a:ext>
+                </a:extLst>
+              </p:cNvPr>
+              <p:cNvPicPr preferRelativeResize="0"/>
+              <p:nvPr/>
+            </p:nvPicPr>
+            <p:blipFill rotWithShape="1">
+              <a:blip r:embed="rId2">
+                <a:alphaModFix/>
+              </a:blip>
+              <a:srcRect l="7734" t="19877" r="3576" b="30215"/>
+              <a:stretch>
+                <a:fillRect/>
+              </a:stretch>
+            </p:blipFill>
+            <p:spPr>
+              <a:xfrm>
+                <a:off x="13531736" y="9110731"/>
+                <a:ext cx="1060270" cy="597202"/>
+              </a:xfrm>
+              <a:prstGeom prst="rect">
+                <a:avLst/>
+              </a:prstGeom>
+              <a:noFill/>
+              <a:ln>
+                <a:noFill/>
+              </a:ln>
+            </p:spPr>
+          </p:pic>
+          <p:pic>
+            <p:nvPicPr>
+              <p:cNvPr id="33" name="Google Shape;103;g3d00297c732_0_7" title="UAV.jpg">
+                <a:extLst>
+                  <a:ext uri="{FF2B5EF4-FFF2-40B4-BE49-F238E27FC236}">
+                    <a16:creationId xmlns:a16="http://schemas.microsoft.com/office/drawing/2014/main" id="{0CD416DE-EE29-437E-A485-EB668BD70E13}"/>
+                  </a:ext>
+                </a:extLst>
+              </p:cNvPr>
+              <p:cNvPicPr preferRelativeResize="0"/>
+              <p:nvPr/>
+            </p:nvPicPr>
+            <p:blipFill rotWithShape="1">
+              <a:blip r:embed="rId2">
+                <a:alphaModFix/>
+              </a:blip>
+              <a:srcRect l="7734" t="19877" r="3576" b="30215"/>
+              <a:stretch>
+                <a:fillRect/>
+              </a:stretch>
+            </p:blipFill>
+            <p:spPr>
+              <a:xfrm>
+                <a:off x="14801481" y="9105694"/>
+                <a:ext cx="1099343" cy="602239"/>
+              </a:xfrm>
+              <a:prstGeom prst="rect">
+                <a:avLst/>
+              </a:prstGeom>
+              <a:noFill/>
+              <a:ln>
+                <a:noFill/>
+              </a:ln>
+            </p:spPr>
+          </p:pic>
+        </p:grpSp>
+        <p:sp>
+          <p:nvSpPr>
+            <p:cNvPr id="39" name="Google Shape;205;g3d00297c732_0_53">
+              <a:extLst>
+                <a:ext uri="{FF2B5EF4-FFF2-40B4-BE49-F238E27FC236}">
+                  <a16:creationId xmlns:a16="http://schemas.microsoft.com/office/drawing/2014/main" id="{DA7CAE6B-49DD-5D84-6FFD-E2B22A567A11}"/>
+                </a:ext>
+              </a:extLst>
+            </p:cNvPr>
+            <p:cNvSpPr/>
+            <p:nvPr/>
+          </p:nvSpPr>
+          <p:spPr>
+            <a:xfrm rot="17168672">
+              <a:off x="11743325" y="10198668"/>
+              <a:ext cx="916218" cy="364204"/>
+            </a:xfrm>
+            <a:prstGeom prst="rightArrow">
+              <a:avLst>
+                <a:gd name="adj1" fmla="val 50000"/>
+                <a:gd name="adj2" fmla="val 50000"/>
+              </a:avLst>
+            </a:prstGeom>
+            <a:solidFill>
+              <a:srgbClr val="FFC000"/>
+            </a:solidFill>
+            <a:ln>
+              <a:noFill/>
+            </a:ln>
+          </p:spPr>
+          <p:txBody>
+            <a:bodyPr spcFirstLastPara="1" wrap="square" lIns="66850" tIns="66850" rIns="66850" bIns="66850" anchor="ctr" anchorCtr="0">
+              <a:noAutofit/>
+            </a:bodyPr>
+            <a:lstStyle>
+              <a:defPPr marR="0" lvl="0" algn="l" rtl="0">
+                <a:lnSpc>
+                  <a:spcPct val="100000"/>
+                </a:lnSpc>
+                <a:spcBef>
+                  <a:spcPts val="0"/>
+                </a:spcBef>
+                <a:spcAft>
+                  <a:spcPts val="0"/>
+                </a:spcAft>
+              </a:defPPr>
+              <a:lvl1pPr marR="0" lvl="0" algn="l" rtl="0">
+                <a:lnSpc>
+                  <a:spcPct val="100000"/>
+                </a:lnSpc>
+                <a:spcBef>
+                  <a:spcPts val="0"/>
+                </a:spcBef>
+                <a:spcAft>
+                  <a:spcPts val="0"/>
+                </a:spcAft>
+                <a:buClr>
+                  <a:srgbClr val="000000"/>
+                </a:buClr>
+                <a:buFont typeface="Arial"/>
+                <a:defRPr sz="1400" b="0" i="0" u="none" strike="noStrike" cap="none">
+                  <a:solidFill>
+                    <a:srgbClr val="000000"/>
+                  </a:solidFill>
+                  <a:latin typeface="Arial"/>
+                  <a:ea typeface="Arial"/>
+                  <a:cs typeface="Arial"/>
+                  <a:sym typeface="Arial"/>
+                </a:defRPr>
+              </a:lvl1pPr>
+              <a:lvl2pPr marR="0" lvl="1" algn="l" rtl="0">
+                <a:lnSpc>
+                  <a:spcPct val="100000"/>
+                </a:lnSpc>
+                <a:spcBef>
+                  <a:spcPts val="0"/>
+                </a:spcBef>
+                <a:spcAft>
+                  <a:spcPts val="0"/>
+                </a:spcAft>
+                <a:buClr>
+                  <a:srgbClr val="000000"/>
+                </a:buClr>
+                <a:buFont typeface="Arial"/>
+                <a:defRPr sz="1400" b="0" i="0" u="none" strike="noStrike" cap="none">
+                  <a:solidFill>
+                    <a:srgbClr val="000000"/>
+                  </a:solidFill>
+                  <a:latin typeface="Arial"/>
+                  <a:ea typeface="Arial"/>
+                  <a:cs typeface="Arial"/>
+                  <a:sym typeface="Arial"/>
+                </a:defRPr>
+              </a:lvl2pPr>
+              <a:lvl3pPr marR="0" lvl="2" algn="l" rtl="0">
+                <a:lnSpc>
+                  <a:spcPct val="100000"/>
+                </a:lnSpc>
+                <a:spcBef>
+                  <a:spcPts val="0"/>
+                </a:spcBef>
+                <a:spcAft>
+                  <a:spcPts val="0"/>
+                </a:spcAft>
+                <a:buClr>
+                  <a:srgbClr val="000000"/>
+                </a:buClr>
+                <a:buFont typeface="Arial"/>
+                <a:defRPr sz="1400" b="0" i="0" u="none" strike="noStrike" cap="none">
+                  <a:solidFill>
+                    <a:srgbClr val="000000"/>
+                  </a:solidFill>
+                  <a:latin typeface="Arial"/>
+                  <a:ea typeface="Arial"/>
+                  <a:cs typeface="Arial"/>
+                  <a:sym typeface="Arial"/>
+                </a:defRPr>
+              </a:lvl3pPr>
+              <a:lvl4pPr marR="0" lvl="3" algn="l" rtl="0">
+                <a:lnSpc>
+                  <a:spcPct val="100000"/>
+                </a:lnSpc>
+                <a:spcBef>
+                  <a:spcPts val="0"/>
+                </a:spcBef>
+                <a:spcAft>
+                  <a:spcPts val="0"/>
+                </a:spcAft>
+                <a:buClr>
+                  <a:srgbClr val="000000"/>
+                </a:buClr>
+                <a:buFont typeface="Arial"/>
+                <a:defRPr sz="1400" b="0" i="0" u="none" strike="noStrike" cap="none">
+                  <a:solidFill>
+                    <a:srgbClr val="000000"/>
+                  </a:solidFill>
+                  <a:latin typeface="Arial"/>
+                  <a:ea typeface="Arial"/>
+                  <a:cs typeface="Arial"/>
+                  <a:sym typeface="Arial"/>
+                </a:defRPr>
+              </a:lvl4pPr>
+              <a:lvl5pPr marR="0" lvl="4" algn="l" rtl="0">
+                <a:lnSpc>
+                  <a:spcPct val="100000"/>
+                </a:lnSpc>
+                <a:spcBef>
+                  <a:spcPts val="0"/>
+                </a:spcBef>
+                <a:spcAft>
+                  <a:spcPts val="0"/>
+                </a:spcAft>
+                <a:buClr>
+                  <a:srgbClr val="000000"/>
+                </a:buClr>
+                <a:buFont typeface="Arial"/>
+                <a:defRPr sz="1400" b="0" i="0" u="none" strike="noStrike" cap="none">
+                  <a:solidFill>
+                    <a:srgbClr val="000000"/>
+                  </a:solidFill>
+                  <a:latin typeface="Arial"/>
+                  <a:ea typeface="Arial"/>
+                  <a:cs typeface="Arial"/>
+                  <a:sym typeface="Arial"/>
+                </a:defRPr>
+              </a:lvl5pPr>
+              <a:lvl6pPr marR="0" lvl="5" algn="l" rtl="0">
+                <a:lnSpc>
+                  <a:spcPct val="100000"/>
+                </a:lnSpc>
+                <a:spcBef>
+                  <a:spcPts val="0"/>
+                </a:spcBef>
+                <a:spcAft>
+                  <a:spcPts val="0"/>
+                </a:spcAft>
+                <a:buClr>
+                  <a:srgbClr val="000000"/>
+                </a:buClr>
+                <a:buFont typeface="Arial"/>
+                <a:defRPr sz="1400" b="0" i="0" u="none" strike="noStrike" cap="none">
+                  <a:solidFill>
+                    <a:srgbClr val="000000"/>
+                  </a:solidFill>
+                  <a:latin typeface="Arial"/>
+                  <a:ea typeface="Arial"/>
+                  <a:cs typeface="Arial"/>
+                  <a:sym typeface="Arial"/>
+                </a:defRPr>
+              </a:lvl6pPr>
+              <a:lvl7pPr marR="0" lvl="6" algn="l" rtl="0">
+                <a:lnSpc>
+                  <a:spcPct val="100000"/>
+                </a:lnSpc>
+                <a:spcBef>
+                  <a:spcPts val="0"/>
+                </a:spcBef>
+                <a:spcAft>
+                  <a:spcPts val="0"/>
+                </a:spcAft>
+                <a:buClr>
+                  <a:srgbClr val="000000"/>
+                </a:buClr>
+                <a:buFont typeface="Arial"/>
+                <a:defRPr sz="1400" b="0" i="0" u="none" strike="noStrike" cap="none">
+                  <a:solidFill>
+                    <a:srgbClr val="000000"/>
+                  </a:solidFill>
+                  <a:latin typeface="Arial"/>
+                  <a:ea typeface="Arial"/>
+                  <a:cs typeface="Arial"/>
+                  <a:sym typeface="Arial"/>
+                </a:defRPr>
+              </a:lvl7pPr>
+              <a:lvl8pPr marR="0" lvl="7" algn="l" rtl="0">
+                <a:lnSpc>
+                  <a:spcPct val="100000"/>
+                </a:lnSpc>
+                <a:spcBef>
+                  <a:spcPts val="0"/>
+                </a:spcBef>
+                <a:spcAft>
+                  <a:spcPts val="0"/>
+                </a:spcAft>
+                <a:buClr>
+                  <a:srgbClr val="000000"/>
+                </a:buClr>
+                <a:buFont typeface="Arial"/>
+                <a:defRPr sz="1400" b="0" i="0" u="none" strike="noStrike" cap="none">
+                  <a:solidFill>
+                    <a:srgbClr val="000000"/>
+                  </a:solidFill>
+                  <a:latin typeface="Arial"/>
+                  <a:ea typeface="Arial"/>
+                  <a:cs typeface="Arial"/>
+                  <a:sym typeface="Arial"/>
+                </a:defRPr>
+              </a:lvl8pPr>
+              <a:lvl9pPr marR="0" lvl="8" algn="l" rtl="0">
+                <a:lnSpc>
+                  <a:spcPct val="100000"/>
+                </a:lnSpc>
+                <a:spcBef>
+                  <a:spcPts val="0"/>
+                </a:spcBef>
+                <a:spcAft>
+                  <a:spcPts val="0"/>
+                </a:spcAft>
+                <a:buClr>
+                  <a:srgbClr val="000000"/>
+                </a:buClr>
+                <a:buFont typeface="Arial"/>
+                <a:defRPr sz="1400" b="0" i="0" u="none" strike="noStrike" cap="none">
+                  <a:solidFill>
+                    <a:srgbClr val="000000"/>
+                  </a:solidFill>
+                  <a:latin typeface="Arial"/>
+                  <a:ea typeface="Arial"/>
+                  <a:cs typeface="Arial"/>
+                  <a:sym typeface="Arial"/>
+                </a:defRPr>
+              </a:lvl9pPr>
+            </a:lstStyle>
+            <a:p>
+              <a:pPr marL="0" marR="0" lvl="0" indent="0" algn="ctr" rtl="0">
+                <a:lnSpc>
+                  <a:spcPct val="100000"/>
+                </a:lnSpc>
+                <a:spcBef>
+                  <a:spcPts val="0"/>
+                </a:spcBef>
+                <a:spcAft>
+                  <a:spcPts val="0"/>
+                </a:spcAft>
+                <a:buClr>
+                  <a:srgbClr val="000000"/>
+                </a:buClr>
+                <a:buSzPts val="1023"/>
+                <a:buFont typeface="Arial"/>
+                <a:buNone/>
+              </a:pPr>
+              <a:endParaRPr sz="1022" b="0" i="0" u="none" strike="noStrike" cap="none" dirty="0">
+                <a:solidFill>
+                  <a:srgbClr val="000000"/>
+                </a:solidFill>
+                <a:latin typeface="Calibri"/>
+                <a:ea typeface="Calibri"/>
+                <a:cs typeface="Calibri"/>
+                <a:sym typeface="Calibri"/>
+              </a:endParaRPr>
+            </a:p>
+          </p:txBody>
+        </p:sp>
+        <p:sp>
+          <p:nvSpPr>
+            <p:cNvPr id="41" name="Google Shape;205;g3d00297c732_0_53">
+              <a:extLst>
+                <a:ext uri="{FF2B5EF4-FFF2-40B4-BE49-F238E27FC236}">
+                  <a16:creationId xmlns:a16="http://schemas.microsoft.com/office/drawing/2014/main" id="{C525DE75-DCF7-0DD2-FC9B-B5BFC4ACEB0F}"/>
+                </a:ext>
+              </a:extLst>
+            </p:cNvPr>
+            <p:cNvSpPr/>
+            <p:nvPr/>
+          </p:nvSpPr>
+          <p:spPr>
+            <a:xfrm rot="15631595">
+              <a:off x="12525926" y="10208020"/>
+              <a:ext cx="916218" cy="364204"/>
+            </a:xfrm>
+            <a:prstGeom prst="rightArrow">
+              <a:avLst>
+                <a:gd name="adj1" fmla="val 50000"/>
+                <a:gd name="adj2" fmla="val 50000"/>
+              </a:avLst>
+            </a:prstGeom>
+            <a:solidFill>
+              <a:srgbClr val="FFC000"/>
+            </a:solidFill>
+            <a:ln>
+              <a:noFill/>
+            </a:ln>
+          </p:spPr>
+          <p:txBody>
+            <a:bodyPr spcFirstLastPara="1" wrap="square" lIns="66850" tIns="66850" rIns="66850" bIns="66850" anchor="ctr" anchorCtr="0">
+              <a:noAutofit/>
+            </a:bodyPr>
+            <a:lstStyle>
+              <a:defPPr marR="0" lvl="0" algn="l" rtl="0">
+                <a:lnSpc>
+                  <a:spcPct val="100000"/>
+                </a:lnSpc>
+                <a:spcBef>
+                  <a:spcPts val="0"/>
+                </a:spcBef>
+                <a:spcAft>
+                  <a:spcPts val="0"/>
+                </a:spcAft>
+              </a:defPPr>
+              <a:lvl1pPr marR="0" lvl="0" algn="l" rtl="0">
+                <a:lnSpc>
+                  <a:spcPct val="100000"/>
+                </a:lnSpc>
+                <a:spcBef>
+                  <a:spcPts val="0"/>
+                </a:spcBef>
+                <a:spcAft>
+                  <a:spcPts val="0"/>
+                </a:spcAft>
+                <a:buClr>
+                  <a:srgbClr val="000000"/>
+                </a:buClr>
+                <a:buFont typeface="Arial"/>
+                <a:defRPr sz="1400" b="0" i="0" u="none" strike="noStrike" cap="none">
+                  <a:solidFill>
+                    <a:srgbClr val="000000"/>
+                  </a:solidFill>
+                  <a:latin typeface="Arial"/>
+                  <a:ea typeface="Arial"/>
+                  <a:cs typeface="Arial"/>
+                  <a:sym typeface="Arial"/>
+                </a:defRPr>
+              </a:lvl1pPr>
+              <a:lvl2pPr marR="0" lvl="1" algn="l" rtl="0">
+                <a:lnSpc>
+                  <a:spcPct val="100000"/>
+                </a:lnSpc>
+                <a:spcBef>
+                  <a:spcPts val="0"/>
+                </a:spcBef>
+                <a:spcAft>
+                  <a:spcPts val="0"/>
+                </a:spcAft>
+                <a:buClr>
+                  <a:srgbClr val="000000"/>
+                </a:buClr>
+                <a:buFont typeface="Arial"/>
+                <a:defRPr sz="1400" b="0" i="0" u="none" strike="noStrike" cap="none">
+                  <a:solidFill>
+                    <a:srgbClr val="000000"/>
+                  </a:solidFill>
+                  <a:latin typeface="Arial"/>
+                  <a:ea typeface="Arial"/>
+                  <a:cs typeface="Arial"/>
+                  <a:sym typeface="Arial"/>
+                </a:defRPr>
+              </a:lvl2pPr>
+              <a:lvl3pPr marR="0" lvl="2" algn="l" rtl="0">
+                <a:lnSpc>
+                  <a:spcPct val="100000"/>
+                </a:lnSpc>
+                <a:spcBef>
+                  <a:spcPts val="0"/>
+                </a:spcBef>
+                <a:spcAft>
+                  <a:spcPts val="0"/>
+                </a:spcAft>
+                <a:buClr>
+                  <a:srgbClr val="000000"/>
+                </a:buClr>
+                <a:buFont typeface="Arial"/>
+                <a:defRPr sz="1400" b="0" i="0" u="none" strike="noStrike" cap="none">
+                  <a:solidFill>
+                    <a:srgbClr val="000000"/>
+                  </a:solidFill>
+                  <a:latin typeface="Arial"/>
+                  <a:ea typeface="Arial"/>
+                  <a:cs typeface="Arial"/>
+                  <a:sym typeface="Arial"/>
+                </a:defRPr>
+              </a:lvl3pPr>
+              <a:lvl4pPr marR="0" lvl="3" algn="l" rtl="0">
+                <a:lnSpc>
+                  <a:spcPct val="100000"/>
+                </a:lnSpc>
+                <a:spcBef>
+                  <a:spcPts val="0"/>
+                </a:spcBef>
+                <a:spcAft>
+                  <a:spcPts val="0"/>
+                </a:spcAft>
+                <a:buClr>
+                  <a:srgbClr val="000000"/>
+                </a:buClr>
+                <a:buFont typeface="Arial"/>
+                <a:defRPr sz="1400" b="0" i="0" u="none" strike="noStrike" cap="none">
+                  <a:solidFill>
+                    <a:srgbClr val="000000"/>
+                  </a:solidFill>
+                  <a:latin typeface="Arial"/>
+                  <a:ea typeface="Arial"/>
+                  <a:cs typeface="Arial"/>
+                  <a:sym typeface="Arial"/>
+                </a:defRPr>
+              </a:lvl4pPr>
+              <a:lvl5pPr marR="0" lvl="4" algn="l" rtl="0">
+                <a:lnSpc>
+                  <a:spcPct val="100000"/>
+                </a:lnSpc>
+                <a:spcBef>
+                  <a:spcPts val="0"/>
+                </a:spcBef>
+                <a:spcAft>
+                  <a:spcPts val="0"/>
+                </a:spcAft>
+                <a:buClr>
+                  <a:srgbClr val="000000"/>
+                </a:buClr>
+                <a:buFont typeface="Arial"/>
+                <a:defRPr sz="1400" b="0" i="0" u="none" strike="noStrike" cap="none">
+                  <a:solidFill>
+                    <a:srgbClr val="000000"/>
+                  </a:solidFill>
+                  <a:latin typeface="Arial"/>
+                  <a:ea typeface="Arial"/>
+                  <a:cs typeface="Arial"/>
+                  <a:sym typeface="Arial"/>
+                </a:defRPr>
+              </a:lvl5pPr>
+              <a:lvl6pPr marR="0" lvl="5" algn="l" rtl="0">
+                <a:lnSpc>
+                  <a:spcPct val="100000"/>
+                </a:lnSpc>
+                <a:spcBef>
+                  <a:spcPts val="0"/>
+                </a:spcBef>
+                <a:spcAft>
+                  <a:spcPts val="0"/>
+                </a:spcAft>
+                <a:buClr>
+                  <a:srgbClr val="000000"/>
+                </a:buClr>
+                <a:buFont typeface="Arial"/>
+                <a:defRPr sz="1400" b="0" i="0" u="none" strike="noStrike" cap="none">
+                  <a:solidFill>
+                    <a:srgbClr val="000000"/>
+                  </a:solidFill>
+                  <a:latin typeface="Arial"/>
+                  <a:ea typeface="Arial"/>
+                  <a:cs typeface="Arial"/>
+                  <a:sym typeface="Arial"/>
+                </a:defRPr>
+              </a:lvl6pPr>
+              <a:lvl7pPr marR="0" lvl="6" algn="l" rtl="0">
+                <a:lnSpc>
+                  <a:spcPct val="100000"/>
+                </a:lnSpc>
+                <a:spcBef>
+                  <a:spcPts val="0"/>
+                </a:spcBef>
+                <a:spcAft>
+                  <a:spcPts val="0"/>
+                </a:spcAft>
+                <a:buClr>
+                  <a:srgbClr val="000000"/>
+                </a:buClr>
+                <a:buFont typeface="Arial"/>
+                <a:defRPr sz="1400" b="0" i="0" u="none" strike="noStrike" cap="none">
+                  <a:solidFill>
+                    <a:srgbClr val="000000"/>
+                  </a:solidFill>
+                  <a:latin typeface="Arial"/>
+                  <a:ea typeface="Arial"/>
+                  <a:cs typeface="Arial"/>
+                  <a:sym typeface="Arial"/>
+                </a:defRPr>
+              </a:lvl7pPr>
+              <a:lvl8pPr marR="0" lvl="7" algn="l" rtl="0">
+                <a:lnSpc>
+                  <a:spcPct val="100000"/>
+                </a:lnSpc>
+                <a:spcBef>
+                  <a:spcPts val="0"/>
+                </a:spcBef>
+                <a:spcAft>
+                  <a:spcPts val="0"/>
+                </a:spcAft>
+                <a:buClr>
+                  <a:srgbClr val="000000"/>
+                </a:buClr>
+                <a:buFont typeface="Arial"/>
+                <a:defRPr sz="1400" b="0" i="0" u="none" strike="noStrike" cap="none">
+                  <a:solidFill>
+                    <a:srgbClr val="000000"/>
+                  </a:solidFill>
+                  <a:latin typeface="Arial"/>
+                  <a:ea typeface="Arial"/>
+                  <a:cs typeface="Arial"/>
+                  <a:sym typeface="Arial"/>
+                </a:defRPr>
+              </a:lvl8pPr>
+              <a:lvl9pPr marR="0" lvl="8" algn="l" rtl="0">
+                <a:lnSpc>
+                  <a:spcPct val="100000"/>
+                </a:lnSpc>
+                <a:spcBef>
+                  <a:spcPts val="0"/>
+                </a:spcBef>
+                <a:spcAft>
+                  <a:spcPts val="0"/>
+                </a:spcAft>
+                <a:buClr>
+                  <a:srgbClr val="000000"/>
+                </a:buClr>
+                <a:buFont typeface="Arial"/>
+                <a:defRPr sz="1400" b="0" i="0" u="none" strike="noStrike" cap="none">
+                  <a:solidFill>
+                    <a:srgbClr val="000000"/>
+                  </a:solidFill>
+                  <a:latin typeface="Arial"/>
+                  <a:ea typeface="Arial"/>
+                  <a:cs typeface="Arial"/>
+                  <a:sym typeface="Arial"/>
+                </a:defRPr>
+              </a:lvl9pPr>
+            </a:lstStyle>
+            <a:p>
+              <a:pPr marL="0" marR="0" lvl="0" indent="0" algn="ctr" rtl="0">
+                <a:lnSpc>
+                  <a:spcPct val="100000"/>
+                </a:lnSpc>
+                <a:spcBef>
+                  <a:spcPts val="0"/>
+                </a:spcBef>
+                <a:spcAft>
+                  <a:spcPts val="0"/>
+                </a:spcAft>
+                <a:buClr>
+                  <a:srgbClr val="000000"/>
+                </a:buClr>
+                <a:buSzPts val="1023"/>
+                <a:buFont typeface="Arial"/>
+                <a:buNone/>
+              </a:pPr>
+              <a:endParaRPr sz="1022" b="0" i="0" u="none" strike="noStrike" cap="none" dirty="0">
+                <a:solidFill>
+                  <a:srgbClr val="000000"/>
+                </a:solidFill>
+                <a:latin typeface="Calibri"/>
+                <a:ea typeface="Calibri"/>
+                <a:cs typeface="Calibri"/>
+                <a:sym typeface="Calibri"/>
+              </a:endParaRPr>
+            </a:p>
+          </p:txBody>
+        </p:sp>
+        <p:sp>
+          <p:nvSpPr>
+            <p:cNvPr id="42" name="文字方塊 41">
+              <a:extLst>
+                <a:ext uri="{FF2B5EF4-FFF2-40B4-BE49-F238E27FC236}">
+                  <a16:creationId xmlns:a16="http://schemas.microsoft.com/office/drawing/2014/main" id="{C1FA52A2-B364-F724-3E3A-742BED4B9066}"/>
+                </a:ext>
+              </a:extLst>
+            </p:cNvPr>
+            <p:cNvSpPr txBox="1"/>
+            <p:nvPr/>
+          </p:nvSpPr>
+          <p:spPr>
+            <a:xfrm>
+              <a:off x="11650996" y="10068253"/>
+              <a:ext cx="2403494" cy="599046"/>
+            </a:xfrm>
+            <a:prstGeom prst="rect">
+              <a:avLst/>
+            </a:prstGeom>
+            <a:noFill/>
+          </p:spPr>
+          <p:txBody>
+            <a:bodyPr wrap="square" rtlCol="0">
+              <a:spAutoFit/>
+            </a:bodyPr>
+            <a:lstStyle/>
+            <a:p>
+              <a:r>
+                <a:rPr lang="en-US" altLang="zh-TW" sz="2200" dirty="0">
+                  <a:latin typeface="Times New Roman" panose="02020603050405020304" pitchFamily="18" charset="0"/>
+                  <a:ea typeface="標楷體" panose="03000509000000000000" pitchFamily="65" charset="-120"/>
+                  <a:cs typeface="Times New Roman" panose="02020603050405020304" pitchFamily="18" charset="0"/>
+                </a:rPr>
+                <a:t>Probe flow</a:t>
+              </a:r>
+              <a:endParaRPr lang="zh-TW" altLang="en-US" sz="2200" dirty="0"/>
+            </a:p>
+          </p:txBody>
+        </p:sp>
+      </p:grpSp>
+      <p:pic>
+        <p:nvPicPr>
+          <p:cNvPr id="8" name="圖片 7">
+            <a:extLst>
+              <a:ext uri="{FF2B5EF4-FFF2-40B4-BE49-F238E27FC236}">
+                <a16:creationId xmlns:a16="http://schemas.microsoft.com/office/drawing/2014/main" id="{2B97F92C-5FA1-9D94-2E5F-9A433226617B}"/>
+              </a:ext>
+            </a:extLst>
+          </p:cNvPr>
+          <p:cNvPicPr>
+            <a:picLocks noChangeAspect="1"/>
+          </p:cNvPicPr>
+          <p:nvPr/>
+        </p:nvPicPr>
+        <p:blipFill>
+          <a:blip r:embed="rId3">
+            <a:extLst>
+              <a:ext uri="{28A0092B-C50C-407E-A947-70E740481C1C}">
+                <a14:useLocalDpi xmlns:a14="http://schemas.microsoft.com/office/drawing/2010/main" val="0"/>
+              </a:ext>
+            </a:extLst>
+          </a:blip>
+          <a:stretch>
+            <a:fillRect/>
+          </a:stretch>
+        </p:blipFill>
+        <p:spPr>
+          <a:xfrm>
+            <a:off x="14453594" y="13555042"/>
+            <a:ext cx="6423064" cy="4282042"/>
+          </a:xfrm>
+          <a:prstGeom prst="rect">
+            <a:avLst/>
+          </a:prstGeom>
+        </p:spPr>
+      </p:pic>
       <p:sp>
         <p:nvSpPr>
           <p:cNvPr id="3" name="文字方塊 2">
@@ -3291,7 +4100,7 @@
           <p:nvPr/>
         </p:nvPicPr>
         <p:blipFill>
-          <a:blip r:embed="rId2"/>
+          <a:blip r:embed="rId4"/>
           <a:stretch>
             <a:fillRect/>
           </a:stretch>
@@ -3949,7 +4758,7 @@
           <p:nvPr/>
         </p:nvPicPr>
         <p:blipFill>
-          <a:blip r:embed="rId3">
+          <a:blip r:embed="rId5">
             <a:extLst>
               <a:ext uri="{28A0092B-C50C-407E-A947-70E740481C1C}">
                 <a14:useLocalDpi xmlns:a14="http://schemas.microsoft.com/office/drawing/2010/main" val="0"/>
@@ -4064,8 +4873,8 @@
         </p:nvGrpSpPr>
         <p:grpSpPr>
           <a:xfrm>
-            <a:off x="14957492" y="9997054"/>
-            <a:ext cx="5430507" cy="3413269"/>
+            <a:off x="14957492" y="9997055"/>
+            <a:ext cx="5130125" cy="3128916"/>
             <a:chOff x="15061783" y="10389315"/>
             <a:chExt cx="5430507" cy="3413269"/>
           </a:xfrm>
@@ -4123,7 +4932,7 @@
                 <p:nvPr/>
               </p:nvPicPr>
               <p:blipFill rotWithShape="1">
-                <a:blip r:embed="rId4">
+                <a:blip r:embed="rId6">
                   <a:alphaModFix/>
                 </a:blip>
                 <a:srcRect/>
@@ -4176,7 +4985,7 @@
                   <p:nvPr/>
                 </p:nvPicPr>
                 <p:blipFill rotWithShape="1">
-                  <a:blip r:embed="rId5">
+                  <a:blip r:embed="rId7">
                     <a:alphaModFix/>
                   </a:blip>
                   <a:srcRect/>
@@ -4229,7 +5038,7 @@
                     <p:nvPr/>
                   </p:nvPicPr>
                   <p:blipFill rotWithShape="1">
-                    <a:blip r:embed="rId5">
+                    <a:blip r:embed="rId7">
                       <a:alphaModFix/>
                     </a:blip>
                     <a:srcRect/>
@@ -4262,7 +5071,7 @@
                     <p:nvPr/>
                   </p:nvPicPr>
                   <p:blipFill rotWithShape="1">
-                    <a:blip r:embed="rId5">
+                    <a:blip r:embed="rId7">
                       <a:alphaModFix/>
                     </a:blip>
                     <a:srcRect/>
@@ -5192,7 +6001,7 @@
                     <p:nvPr/>
                   </p:nvPicPr>
                   <p:blipFill rotWithShape="1">
-                    <a:blip r:embed="rId5">
+                    <a:blip r:embed="rId7">
                       <a:alphaModFix/>
                     </a:blip>
                     <a:srcRect/>
@@ -5225,7 +6034,7 @@
                     <p:nvPr/>
                   </p:nvPicPr>
                   <p:blipFill rotWithShape="1">
-                    <a:blip r:embed="rId5">
+                    <a:blip r:embed="rId7">
                       <a:alphaModFix/>
                     </a:blip>
                     <a:srcRect/>
@@ -5258,7 +6067,7 @@
                     <p:nvPr/>
                   </p:nvPicPr>
                   <p:blipFill rotWithShape="1">
-                    <a:blip r:embed="rId5">
+                    <a:blip r:embed="rId7">
                       <a:alphaModFix/>
                     </a:blip>
                     <a:srcRect/>
@@ -6210,7 +7019,7 @@
                   <p:nvPr/>
                 </p:nvPicPr>
                 <p:blipFill rotWithShape="1">
-                  <a:blip r:embed="rId6">
+                  <a:blip r:embed="rId2">
                     <a:alphaModFix/>
                   </a:blip>
                   <a:srcRect l="7734" t="19877" r="3576" b="30215"/>
@@ -6245,7 +7054,7 @@
                   <p:nvPr/>
                 </p:nvPicPr>
                 <p:blipFill rotWithShape="1">
-                  <a:blip r:embed="rId6">
+                  <a:blip r:embed="rId2">
                     <a:alphaModFix/>
                   </a:blip>
                   <a:srcRect l="7734" t="19877" r="3576" b="30215"/>
@@ -6280,7 +7089,7 @@
                   <p:nvPr/>
                 </p:nvPicPr>
                 <p:blipFill rotWithShape="1">
-                  <a:blip r:embed="rId6">
+                  <a:blip r:embed="rId2">
                     <a:alphaModFix/>
                   </a:blip>
                   <a:srcRect l="7734" t="19877" r="3576" b="30215"/>
@@ -6747,7 +7556,7 @@
                 <p:nvPr/>
               </p:nvPicPr>
               <p:blipFill rotWithShape="1">
-                <a:blip r:embed="rId6">
+                <a:blip r:embed="rId2">
                   <a:alphaModFix/>
                 </a:blip>
                 <a:srcRect l="7734" t="19877" r="3576" b="30215"/>
@@ -6839,7 +7648,7 @@
                 <p:nvPr/>
               </p:nvPicPr>
               <p:blipFill rotWithShape="1">
-                <a:blip r:embed="rId6">
+                <a:blip r:embed="rId2">
                   <a:alphaModFix/>
                 </a:blip>
                 <a:srcRect l="7734" t="19877" r="3576" b="30215"/>
@@ -6931,7 +7740,7 @@
                 <p:nvPr/>
               </p:nvPicPr>
               <p:blipFill rotWithShape="1">
-                <a:blip r:embed="rId6">
+                <a:blip r:embed="rId2">
                   <a:alphaModFix/>
                 </a:blip>
                 <a:srcRect l="7734" t="19877" r="3576" b="30215"/>
@@ -7023,7 +7832,7 @@
                 <p:nvPr/>
               </p:nvPicPr>
               <p:blipFill rotWithShape="1">
-                <a:blip r:embed="rId6">
+                <a:blip r:embed="rId2">
                   <a:alphaModFix/>
                 </a:blip>
                 <a:srcRect l="7734" t="19877" r="3576" b="30215"/>
@@ -8688,7 +9497,7 @@
         </p:nvSpPr>
         <p:spPr>
           <a:xfrm>
-            <a:off x="14484794" y="13411702"/>
+            <a:off x="14492416" y="13156272"/>
             <a:ext cx="6384302" cy="400110"/>
           </a:xfrm>
           <a:prstGeom prst="rect">
@@ -8829,86 +9638,6 @@
           </a:p>
         </p:txBody>
       </p:sp>
-      <p:pic>
-        <p:nvPicPr>
-          <p:cNvPr id="8" name="圖片 7">
-            <a:extLst>
-              <a:ext uri="{FF2B5EF4-FFF2-40B4-BE49-F238E27FC236}">
-                <a16:creationId xmlns:a16="http://schemas.microsoft.com/office/drawing/2014/main" id="{2B97F92C-5FA1-9D94-2E5F-9A433226617B}"/>
-              </a:ext>
-            </a:extLst>
-          </p:cNvPr>
-          <p:cNvPicPr>
-            <a:picLocks noChangeAspect="1"/>
-          </p:cNvPicPr>
-          <p:nvPr/>
-        </p:nvPicPr>
-        <p:blipFill>
-          <a:blip r:embed="rId7">
-            <a:extLst>
-              <a:ext uri="{28A0092B-C50C-407E-A947-70E740481C1C}">
-                <a14:useLocalDpi xmlns:a14="http://schemas.microsoft.com/office/drawing/2010/main" val="0"/>
-              </a:ext>
-            </a:extLst>
-          </a:blip>
-          <a:stretch>
-            <a:fillRect/>
-          </a:stretch>
-        </p:blipFill>
-        <p:spPr>
-          <a:xfrm>
-            <a:off x="14631134" y="13762590"/>
-            <a:ext cx="6072687" cy="4048458"/>
-          </a:xfrm>
-          <a:prstGeom prst="rect">
-            <a:avLst/>
-          </a:prstGeom>
-        </p:spPr>
-      </p:pic>
-      <p:cxnSp>
-        <p:nvCxnSpPr>
-          <p:cNvPr id="19" name="直線單箭頭接點 18">
-            <a:extLst>
-              <a:ext uri="{FF2B5EF4-FFF2-40B4-BE49-F238E27FC236}">
-                <a16:creationId xmlns:a16="http://schemas.microsoft.com/office/drawing/2014/main" id="{7DEEF859-54D4-C2BF-D61E-30FCCFF23DDB}"/>
-              </a:ext>
-            </a:extLst>
-          </p:cNvPr>
-          <p:cNvCxnSpPr>
-            <a:cxnSpLocks/>
-          </p:cNvCxnSpPr>
-          <p:nvPr/>
-        </p:nvCxnSpPr>
-        <p:spPr>
-          <a:xfrm>
-            <a:off x="13954964" y="16263051"/>
-            <a:ext cx="809548" cy="0"/>
-          </a:xfrm>
-          <a:prstGeom prst="straightConnector1">
-            <a:avLst/>
-          </a:prstGeom>
-          <a:ln w="28575">
-            <a:solidFill>
-              <a:srgbClr val="FF0000"/>
-            </a:solidFill>
-            <a:tailEnd type="triangle"/>
-          </a:ln>
-        </p:spPr>
-        <p:style>
-          <a:lnRef idx="2">
-            <a:schemeClr val="accent1"/>
-          </a:lnRef>
-          <a:fillRef idx="0">
-            <a:schemeClr val="accent1"/>
-          </a:fillRef>
-          <a:effectRef idx="1">
-            <a:schemeClr val="accent1"/>
-          </a:effectRef>
-          <a:fontRef idx="minor">
-            <a:schemeClr val="tx1"/>
-          </a:fontRef>
-        </p:style>
-      </p:cxnSp>
       <p:cxnSp>
         <p:nvCxnSpPr>
           <p:cNvPr id="134" name="直線接點 133">
@@ -9096,8 +9825,8 @@
         </p:nvCxnSpPr>
         <p:spPr>
           <a:xfrm flipV="1">
-            <a:off x="14230623" y="11387391"/>
-            <a:ext cx="0" cy="3910919"/>
+            <a:off x="14218671" y="11387391"/>
+            <a:ext cx="2438" cy="3801688"/>
           </a:xfrm>
           <a:prstGeom prst="line">
             <a:avLst/>
@@ -9139,8 +9868,1165 @@
         </p:nvCxnSpPr>
         <p:spPr>
           <a:xfrm>
-            <a:off x="14217161" y="15298310"/>
-            <a:ext cx="544439" cy="0"/>
+            <a:off x="14225696" y="15189079"/>
+            <a:ext cx="405438" cy="6075"/>
+          </a:xfrm>
+          <a:prstGeom prst="straightConnector1">
+            <a:avLst/>
+          </a:prstGeom>
+          <a:ln w="28575">
+            <a:solidFill>
+              <a:srgbClr val="FF0000"/>
+            </a:solidFill>
+            <a:tailEnd type="triangle"/>
+          </a:ln>
+        </p:spPr>
+        <p:style>
+          <a:lnRef idx="2">
+            <a:schemeClr val="accent1"/>
+          </a:lnRef>
+          <a:fillRef idx="0">
+            <a:schemeClr val="accent1"/>
+          </a:fillRef>
+          <a:effectRef idx="1">
+            <a:schemeClr val="accent1"/>
+          </a:effectRef>
+          <a:fontRef idx="minor">
+            <a:schemeClr val="tx1"/>
+          </a:fontRef>
+        </p:style>
+      </p:cxnSp>
+      <p:sp>
+        <p:nvSpPr>
+          <p:cNvPr id="7" name="文字方塊 6">
+            <a:extLst>
+              <a:ext uri="{FF2B5EF4-FFF2-40B4-BE49-F238E27FC236}">
+                <a16:creationId xmlns:a16="http://schemas.microsoft.com/office/drawing/2014/main" id="{FC7E6B5A-43E1-1F0F-0795-1DED2215BB3B}"/>
+              </a:ext>
+            </a:extLst>
+          </p:cNvPr>
+          <p:cNvSpPr txBox="1"/>
+          <p:nvPr/>
+        </p:nvSpPr>
+        <p:spPr>
+          <a:xfrm>
+            <a:off x="642097" y="9635178"/>
+            <a:ext cx="13017922" cy="2677656"/>
+          </a:xfrm>
+          <a:prstGeom prst="rect">
+            <a:avLst/>
+          </a:prstGeom>
+          <a:noFill/>
+        </p:spPr>
+        <p:txBody>
+          <a:bodyPr wrap="square" rtlCol="0">
+            <a:spAutoFit/>
+          </a:bodyPr>
+          <a:lstStyle/>
+          <a:p>
+            <a:r>
+              <a:rPr lang="en-US" altLang="zh-TW" sz="2400" dirty="0">
+                <a:latin typeface="Times New Roman" panose="02020603050405020304" pitchFamily="18" charset="0"/>
+                <a:cs typeface="Times New Roman" panose="02020603050405020304" pitchFamily="18" charset="0"/>
+              </a:rPr>
+              <a:t>This section aims to characterize the intra-fleet wireless links between slave UAVs and the CH/master UAV before scheduling, and export scheduler-ready link quality logs.</a:t>
+            </a:r>
+          </a:p>
+          <a:p>
+            <a:pPr marL="514350" indent="-514350">
+              <a:buFont typeface="+mj-lt"/>
+              <a:buAutoNum type="arabicPeriod"/>
+            </a:pPr>
+            <a:r>
+              <a:rPr lang="en-US" altLang="zh-TW" sz="2400" dirty="0">
+                <a:latin typeface="Times New Roman" panose="02020603050405020304" pitchFamily="18" charset="0"/>
+                <a:ea typeface="標楷體" panose="03000509000000000000" pitchFamily="65" charset="-120"/>
+                <a:cs typeface="Times New Roman" panose="02020603050405020304" pitchFamily="18" charset="0"/>
+              </a:rPr>
+              <a:t>Link Budget Model: Pipeline: distance → Friis path loss → SNR → Shannon capacity.</a:t>
+            </a:r>
+          </a:p>
+          <a:p>
+            <a:pPr marL="514350" indent="-514350">
+              <a:buFont typeface="+mj-lt"/>
+              <a:buAutoNum type="arabicPeriod"/>
+            </a:pPr>
+            <a:r>
+              <a:rPr lang="en-US" altLang="zh-TW" sz="2400" dirty="0">
+                <a:latin typeface="Times New Roman" panose="02020603050405020304" pitchFamily="18" charset="0"/>
+                <a:ea typeface="標楷體" panose="03000509000000000000" pitchFamily="65" charset="-120"/>
+                <a:cs typeface="Times New Roman" panose="02020603050405020304" pitchFamily="18" charset="0"/>
+              </a:rPr>
+              <a:t>Active Packet Probing: Send UDP probing packets on each candidate UAV-to-UAV link and record Tx/Rx packets, bytes, delivery ratio, and effective throughput.</a:t>
+            </a:r>
+          </a:p>
+          <a:p>
+            <a:pPr marL="514350" indent="-514350">
+              <a:buFont typeface="+mj-lt"/>
+              <a:buAutoNum type="arabicPeriod"/>
+            </a:pPr>
+            <a:r>
+              <a:rPr lang="en-US" altLang="zh-TW" sz="2400" dirty="0">
+                <a:latin typeface="Times New Roman" panose="02020603050405020304" pitchFamily="18" charset="0"/>
+                <a:ea typeface="標楷體" panose="03000509000000000000" pitchFamily="65" charset="-120"/>
+                <a:cs typeface="Times New Roman" panose="02020603050405020304" pitchFamily="18" charset="0"/>
+              </a:rPr>
+              <a:t>Scheduler-Oriented Output: Export per-link CSV logs including </a:t>
+            </a:r>
+            <a:r>
+              <a:rPr lang="en-US" altLang="zh-TW" sz="2400" dirty="0" err="1">
+                <a:latin typeface="Times New Roman" panose="02020603050405020304" pitchFamily="18" charset="0"/>
+                <a:ea typeface="標楷體" panose="03000509000000000000" pitchFamily="65" charset="-120"/>
+                <a:cs typeface="Times New Roman" panose="02020603050405020304" pitchFamily="18" charset="0"/>
+              </a:rPr>
+              <a:t>src</a:t>
+            </a:r>
+            <a:r>
+              <a:rPr lang="en-US" altLang="zh-TW" sz="2400" dirty="0">
+                <a:latin typeface="Times New Roman" panose="02020603050405020304" pitchFamily="18" charset="0"/>
+                <a:ea typeface="標楷體" panose="03000509000000000000" pitchFamily="65" charset="-120"/>
+                <a:cs typeface="Times New Roman" panose="02020603050405020304" pitchFamily="18" charset="0"/>
+              </a:rPr>
+              <a:t>/</a:t>
+            </a:r>
+            <a:r>
+              <a:rPr lang="en-US" altLang="zh-TW" sz="2400" dirty="0" err="1">
+                <a:latin typeface="Times New Roman" panose="02020603050405020304" pitchFamily="18" charset="0"/>
+                <a:ea typeface="標楷體" panose="03000509000000000000" pitchFamily="65" charset="-120"/>
+                <a:cs typeface="Times New Roman" panose="02020603050405020304" pitchFamily="18" charset="0"/>
+              </a:rPr>
+              <a:t>dst</a:t>
+            </a:r>
+            <a:r>
+              <a:rPr lang="en-US" altLang="zh-TW" sz="2400" dirty="0">
+                <a:latin typeface="Times New Roman" panose="02020603050405020304" pitchFamily="18" charset="0"/>
+                <a:ea typeface="標楷體" panose="03000509000000000000" pitchFamily="65" charset="-120"/>
+                <a:cs typeface="Times New Roman" panose="02020603050405020304" pitchFamily="18" charset="0"/>
+              </a:rPr>
+              <a:t> roles, 3D positions, distance, SNR, estimated rate, and measured throughput.</a:t>
+            </a:r>
+          </a:p>
+        </p:txBody>
+      </p:sp>
+      <p:graphicFrame>
+        <p:nvGraphicFramePr>
+          <p:cNvPr id="44" name="表格 43">
+            <a:extLst>
+              <a:ext uri="{FF2B5EF4-FFF2-40B4-BE49-F238E27FC236}">
+                <a16:creationId xmlns:a16="http://schemas.microsoft.com/office/drawing/2014/main" id="{A9007C9F-8992-4846-E572-CB8CCE19162F}"/>
+              </a:ext>
+            </a:extLst>
+          </p:cNvPr>
+          <p:cNvGraphicFramePr>
+            <a:graphicFrameLocks noGrp="1"/>
+          </p:cNvGraphicFramePr>
+          <p:nvPr>
+            <p:extLst>
+              <p:ext uri="{D42A27DB-BD31-4B8C-83A1-F6EECF244321}">
+                <p14:modId xmlns:p14="http://schemas.microsoft.com/office/powerpoint/2010/main" val="211554822"/>
+              </p:ext>
+            </p:extLst>
+          </p:nvPr>
+        </p:nvGraphicFramePr>
+        <p:xfrm>
+          <a:off x="3085390" y="12380018"/>
+          <a:ext cx="6647543" cy="1219200"/>
+        </p:xfrm>
+        <a:graphic>
+          <a:graphicData uri="http://schemas.openxmlformats.org/drawingml/2006/table">
+            <a:tbl>
+              <a:tblPr firstRow="1" bandRow="1">
+                <a:tableStyleId>{5940675A-B579-460E-94D1-54222C63F5DA}</a:tableStyleId>
+              </a:tblPr>
+              <a:tblGrid>
+                <a:gridCol w="899886">
+                  <a:extLst>
+                    <a:ext uri="{9D8B030D-6E8A-4147-A177-3AD203B41FA5}">
+                      <a16:colId xmlns:a16="http://schemas.microsoft.com/office/drawing/2014/main" val="2868866752"/>
+                    </a:ext>
+                  </a:extLst>
+                </a:gridCol>
+                <a:gridCol w="1248229">
+                  <a:extLst>
+                    <a:ext uri="{9D8B030D-6E8A-4147-A177-3AD203B41FA5}">
+                      <a16:colId xmlns:a16="http://schemas.microsoft.com/office/drawing/2014/main" val="3278659831"/>
+                    </a:ext>
+                  </a:extLst>
+                </a:gridCol>
+                <a:gridCol w="1016000">
+                  <a:extLst>
+                    <a:ext uri="{9D8B030D-6E8A-4147-A177-3AD203B41FA5}">
+                      <a16:colId xmlns:a16="http://schemas.microsoft.com/office/drawing/2014/main" val="3125416225"/>
+                    </a:ext>
+                  </a:extLst>
+                </a:gridCol>
+                <a:gridCol w="1466279">
+                  <a:extLst>
+                    <a:ext uri="{9D8B030D-6E8A-4147-A177-3AD203B41FA5}">
+                      <a16:colId xmlns:a16="http://schemas.microsoft.com/office/drawing/2014/main" val="246851647"/>
+                    </a:ext>
+                  </a:extLst>
+                </a:gridCol>
+                <a:gridCol w="2017149">
+                  <a:extLst>
+                    <a:ext uri="{9D8B030D-6E8A-4147-A177-3AD203B41FA5}">
+                      <a16:colId xmlns:a16="http://schemas.microsoft.com/office/drawing/2014/main" val="2378117280"/>
+                    </a:ext>
+                  </a:extLst>
+                </a:gridCol>
+              </a:tblGrid>
+              <a:tr h="246426">
+                <a:tc>
+                  <a:txBody>
+                    <a:bodyPr/>
+                    <a:lstStyle/>
+                    <a:p>
+                      <a:pPr>
+                        <a:buNone/>
+                      </a:pPr>
+                      <a:r>
+                        <a:rPr lang="en-US" sz="1400" dirty="0"/>
+                        <a:t>Link</a:t>
+                      </a:r>
+                    </a:p>
+                  </a:txBody>
+                  <a:tcPr anchor="ctr"/>
+                </a:tc>
+                <a:tc>
+                  <a:txBody>
+                    <a:bodyPr/>
+                    <a:lstStyle/>
+                    <a:p>
+                      <a:pPr algn="r">
+                        <a:buNone/>
+                      </a:pPr>
+                      <a:r>
+                        <a:rPr lang="en-US" sz="1400" dirty="0"/>
+                        <a:t>Distance (m)</a:t>
+                      </a:r>
+                    </a:p>
+                  </a:txBody>
+                  <a:tcPr anchor="ctr"/>
+                </a:tc>
+                <a:tc>
+                  <a:txBody>
+                    <a:bodyPr/>
+                    <a:lstStyle/>
+                    <a:p>
+                      <a:pPr algn="r">
+                        <a:buNone/>
+                      </a:pPr>
+                      <a:r>
+                        <a:rPr lang="en-US" sz="1400" dirty="0"/>
+                        <a:t>SNR (dB)</a:t>
+                      </a:r>
+                    </a:p>
+                  </a:txBody>
+                  <a:tcPr anchor="ctr"/>
+                </a:tc>
+                <a:tc>
+                  <a:txBody>
+                    <a:bodyPr/>
+                    <a:lstStyle/>
+                    <a:p>
+                      <a:pPr algn="r">
+                        <a:buNone/>
+                      </a:pPr>
+                      <a:r>
+                        <a:rPr lang="en-US" sz="1400" dirty="0"/>
+                        <a:t>Est. Rate (Mbps)</a:t>
+                      </a:r>
+                    </a:p>
+                  </a:txBody>
+                  <a:tcPr anchor="ctr"/>
+                </a:tc>
+                <a:tc>
+                  <a:txBody>
+                    <a:bodyPr/>
+                    <a:lstStyle/>
+                    <a:p>
+                      <a:pPr algn="r">
+                        <a:buNone/>
+                      </a:pPr>
+                      <a:r>
+                        <a:rPr lang="en-US" sz="1400" dirty="0"/>
+                        <a:t>Eff. Throughput (Mbps)</a:t>
+                      </a:r>
+                    </a:p>
+                  </a:txBody>
+                  <a:tcPr anchor="ctr"/>
+                </a:tc>
+                <a:extLst>
+                  <a:ext uri="{0D108BD9-81ED-4DB2-BD59-A6C34878D82A}">
+                    <a16:rowId xmlns:a16="http://schemas.microsoft.com/office/drawing/2014/main" val="542122212"/>
+                  </a:ext>
+                </a:extLst>
+              </a:tr>
+              <a:tr h="246426">
+                <a:tc>
+                  <a:txBody>
+                    <a:bodyPr/>
+                    <a:lstStyle/>
+                    <a:p>
+                      <a:pPr>
+                        <a:buNone/>
+                      </a:pPr>
+                      <a:r>
+                        <a:rPr lang="en-US" sz="1400"/>
+                        <a:t>S1 → M</a:t>
+                      </a:r>
+                    </a:p>
+                  </a:txBody>
+                  <a:tcPr anchor="ctr"/>
+                </a:tc>
+                <a:tc>
+                  <a:txBody>
+                    <a:bodyPr/>
+                    <a:lstStyle/>
+                    <a:p>
+                      <a:pPr algn="r">
+                        <a:buNone/>
+                      </a:pPr>
+                      <a:r>
+                        <a:rPr lang="en-US" altLang="zh-TW" sz="1400"/>
+                        <a:t>120</a:t>
+                      </a:r>
+                    </a:p>
+                  </a:txBody>
+                  <a:tcPr anchor="ctr"/>
+                </a:tc>
+                <a:tc>
+                  <a:txBody>
+                    <a:bodyPr/>
+                    <a:lstStyle/>
+                    <a:p>
+                      <a:pPr algn="r">
+                        <a:buNone/>
+                      </a:pPr>
+                      <a:r>
+                        <a:rPr lang="en-US" altLang="zh-TW" sz="1400"/>
+                        <a:t>18.4</a:t>
+                      </a:r>
+                    </a:p>
+                  </a:txBody>
+                  <a:tcPr anchor="ctr"/>
+                </a:tc>
+                <a:tc>
+                  <a:txBody>
+                    <a:bodyPr/>
+                    <a:lstStyle/>
+                    <a:p>
+                      <a:pPr algn="r">
+                        <a:buNone/>
+                      </a:pPr>
+                      <a:r>
+                        <a:rPr lang="en-US" altLang="zh-TW" sz="1400" dirty="0"/>
+                        <a:t>34.2</a:t>
+                      </a:r>
+                    </a:p>
+                  </a:txBody>
+                  <a:tcPr anchor="ctr"/>
+                </a:tc>
+                <a:tc>
+                  <a:txBody>
+                    <a:bodyPr/>
+                    <a:lstStyle/>
+                    <a:p>
+                      <a:pPr algn="r">
+                        <a:buNone/>
+                      </a:pPr>
+                      <a:r>
+                        <a:rPr lang="en-US" altLang="zh-TW" sz="1400" dirty="0"/>
+                        <a:t>28.7</a:t>
+                      </a:r>
+                    </a:p>
+                  </a:txBody>
+                  <a:tcPr anchor="ctr"/>
+                </a:tc>
+                <a:extLst>
+                  <a:ext uri="{0D108BD9-81ED-4DB2-BD59-A6C34878D82A}">
+                    <a16:rowId xmlns:a16="http://schemas.microsoft.com/office/drawing/2014/main" val="3340853159"/>
+                  </a:ext>
+                </a:extLst>
+              </a:tr>
+              <a:tr h="246426">
+                <a:tc>
+                  <a:txBody>
+                    <a:bodyPr/>
+                    <a:lstStyle/>
+                    <a:p>
+                      <a:pPr>
+                        <a:buNone/>
+                      </a:pPr>
+                      <a:r>
+                        <a:rPr lang="en-US" sz="1400" dirty="0"/>
+                        <a:t>S2 → M</a:t>
+                      </a:r>
+                    </a:p>
+                  </a:txBody>
+                  <a:tcPr anchor="ctr"/>
+                </a:tc>
+                <a:tc>
+                  <a:txBody>
+                    <a:bodyPr/>
+                    <a:lstStyle/>
+                    <a:p>
+                      <a:pPr algn="r">
+                        <a:buNone/>
+                      </a:pPr>
+                      <a:r>
+                        <a:rPr lang="en-US" altLang="zh-TW" sz="1400"/>
+                        <a:t>175</a:t>
+                      </a:r>
+                    </a:p>
+                  </a:txBody>
+                  <a:tcPr anchor="ctr"/>
+                </a:tc>
+                <a:tc>
+                  <a:txBody>
+                    <a:bodyPr/>
+                    <a:lstStyle/>
+                    <a:p>
+                      <a:pPr algn="r">
+                        <a:buNone/>
+                      </a:pPr>
+                      <a:r>
+                        <a:rPr lang="en-US" altLang="zh-TW" sz="1400"/>
+                        <a:t>14.1</a:t>
+                      </a:r>
+                    </a:p>
+                  </a:txBody>
+                  <a:tcPr anchor="ctr"/>
+                </a:tc>
+                <a:tc>
+                  <a:txBody>
+                    <a:bodyPr/>
+                    <a:lstStyle/>
+                    <a:p>
+                      <a:pPr algn="r">
+                        <a:buNone/>
+                      </a:pPr>
+                      <a:r>
+                        <a:rPr lang="en-US" altLang="zh-TW" sz="1400" dirty="0"/>
+                        <a:t>24.9</a:t>
+                      </a:r>
+                    </a:p>
+                  </a:txBody>
+                  <a:tcPr anchor="ctr"/>
+                </a:tc>
+                <a:tc>
+                  <a:txBody>
+                    <a:bodyPr/>
+                    <a:lstStyle/>
+                    <a:p>
+                      <a:pPr algn="r">
+                        <a:buNone/>
+                      </a:pPr>
+                      <a:r>
+                        <a:rPr lang="en-US" altLang="zh-TW" sz="1400" dirty="0"/>
+                        <a:t>20.3</a:t>
+                      </a:r>
+                    </a:p>
+                  </a:txBody>
+                  <a:tcPr anchor="ctr"/>
+                </a:tc>
+                <a:extLst>
+                  <a:ext uri="{0D108BD9-81ED-4DB2-BD59-A6C34878D82A}">
+                    <a16:rowId xmlns:a16="http://schemas.microsoft.com/office/drawing/2014/main" val="1177888213"/>
+                  </a:ext>
+                </a:extLst>
+              </a:tr>
+              <a:tr h="246426">
+                <a:tc>
+                  <a:txBody>
+                    <a:bodyPr/>
+                    <a:lstStyle/>
+                    <a:p>
+                      <a:pPr>
+                        <a:buNone/>
+                      </a:pPr>
+                      <a:r>
+                        <a:rPr lang="en-US" sz="1400" dirty="0"/>
+                        <a:t>S3 → M</a:t>
+                      </a:r>
+                    </a:p>
+                  </a:txBody>
+                  <a:tcPr anchor="ctr"/>
+                </a:tc>
+                <a:tc>
+                  <a:txBody>
+                    <a:bodyPr/>
+                    <a:lstStyle/>
+                    <a:p>
+                      <a:pPr algn="r">
+                        <a:buNone/>
+                      </a:pPr>
+                      <a:r>
+                        <a:rPr lang="en-US" altLang="zh-TW" sz="1400"/>
+                        <a:t>230</a:t>
+                      </a:r>
+                    </a:p>
+                  </a:txBody>
+                  <a:tcPr anchor="ctr"/>
+                </a:tc>
+                <a:tc>
+                  <a:txBody>
+                    <a:bodyPr/>
+                    <a:lstStyle/>
+                    <a:p>
+                      <a:pPr algn="r">
+                        <a:buNone/>
+                      </a:pPr>
+                      <a:r>
+                        <a:rPr lang="en-US" altLang="zh-TW" sz="1400"/>
+                        <a:t>10.6</a:t>
+                      </a:r>
+                    </a:p>
+                  </a:txBody>
+                  <a:tcPr anchor="ctr"/>
+                </a:tc>
+                <a:tc>
+                  <a:txBody>
+                    <a:bodyPr/>
+                    <a:lstStyle/>
+                    <a:p>
+                      <a:pPr algn="r">
+                        <a:buNone/>
+                      </a:pPr>
+                      <a:r>
+                        <a:rPr lang="en-US" altLang="zh-TW" sz="1400" dirty="0"/>
+                        <a:t>16.8</a:t>
+                      </a:r>
+                    </a:p>
+                  </a:txBody>
+                  <a:tcPr anchor="ctr"/>
+                </a:tc>
+                <a:tc>
+                  <a:txBody>
+                    <a:bodyPr/>
+                    <a:lstStyle/>
+                    <a:p>
+                      <a:pPr algn="r">
+                        <a:buNone/>
+                      </a:pPr>
+                      <a:r>
+                        <a:rPr lang="en-US" altLang="zh-TW" sz="1400" dirty="0"/>
+                        <a:t>12.5</a:t>
+                      </a:r>
+                    </a:p>
+                  </a:txBody>
+                  <a:tcPr anchor="ctr"/>
+                </a:tc>
+                <a:extLst>
+                  <a:ext uri="{0D108BD9-81ED-4DB2-BD59-A6C34878D82A}">
+                    <a16:rowId xmlns:a16="http://schemas.microsoft.com/office/drawing/2014/main" val="987277863"/>
+                  </a:ext>
+                </a:extLst>
+              </a:tr>
+            </a:tbl>
+          </a:graphicData>
+        </a:graphic>
+      </p:graphicFrame>
+      <p:sp>
+        <p:nvSpPr>
+          <p:cNvPr id="45" name="文字方塊 44">
+            <a:extLst>
+              <a:ext uri="{FF2B5EF4-FFF2-40B4-BE49-F238E27FC236}">
+                <a16:creationId xmlns:a16="http://schemas.microsoft.com/office/drawing/2014/main" id="{3AF74B4A-6363-35FF-A239-C0E39B901995}"/>
+              </a:ext>
+            </a:extLst>
+          </p:cNvPr>
+          <p:cNvSpPr txBox="1"/>
+          <p:nvPr/>
+        </p:nvSpPr>
+        <p:spPr>
+          <a:xfrm>
+            <a:off x="709408" y="14718860"/>
+            <a:ext cx="13017922" cy="3046988"/>
+          </a:xfrm>
+          <a:prstGeom prst="rect">
+            <a:avLst/>
+          </a:prstGeom>
+          <a:noFill/>
+        </p:spPr>
+        <p:txBody>
+          <a:bodyPr wrap="square" rtlCol="0">
+            <a:spAutoFit/>
+          </a:bodyPr>
+          <a:lstStyle/>
+          <a:p>
+            <a:r>
+              <a:rPr lang="en-US" altLang="zh-TW" sz="2400" dirty="0">
+                <a:latin typeface="Times New Roman" panose="02020603050405020304" pitchFamily="18" charset="0"/>
+                <a:cs typeface="Times New Roman" panose="02020603050405020304" pitchFamily="18" charset="0"/>
+              </a:rPr>
+              <a:t>This section validates whether a scheduler-generated task plan can </a:t>
+            </a:r>
+            <a:r>
+              <a:rPr lang="en-US" altLang="zh-TW" sz="2400" dirty="0" err="1">
+                <a:latin typeface="Times New Roman" panose="02020603050405020304" pitchFamily="18" charset="0"/>
+                <a:cs typeface="Times New Roman" panose="02020603050405020304" pitchFamily="18" charset="0"/>
+              </a:rPr>
+              <a:t>besuccessfully</a:t>
+            </a:r>
+            <a:r>
+              <a:rPr lang="en-US" altLang="zh-TW" sz="2400" dirty="0">
+                <a:latin typeface="Times New Roman" panose="02020603050405020304" pitchFamily="18" charset="0"/>
+                <a:cs typeface="Times New Roman" panose="02020603050405020304" pitchFamily="18" charset="0"/>
+              </a:rPr>
+              <a:t> executed in the NS-3 network simulator under UAV </a:t>
+            </a:r>
+            <a:r>
+              <a:rPr lang="en-US" altLang="zh-TW" sz="2400" dirty="0" err="1">
+                <a:latin typeface="Times New Roman" panose="02020603050405020304" pitchFamily="18" charset="0"/>
+                <a:cs typeface="Times New Roman" panose="02020603050405020304" pitchFamily="18" charset="0"/>
+              </a:rPr>
+              <a:t>mobility,role</a:t>
+            </a:r>
+            <a:r>
+              <a:rPr lang="en-US" altLang="zh-TW" sz="2400" dirty="0">
+                <a:latin typeface="Times New Roman" panose="02020603050405020304" pitchFamily="18" charset="0"/>
+                <a:cs typeface="Times New Roman" panose="02020603050405020304" pitchFamily="18" charset="0"/>
+              </a:rPr>
+              <a:t> changes, and wireless transmission constraints.</a:t>
+            </a:r>
+          </a:p>
+          <a:p>
+            <a:pPr marL="514350" indent="-514350">
+              <a:buFont typeface="+mj-lt"/>
+              <a:buAutoNum type="arabicPeriod"/>
+            </a:pPr>
+            <a:r>
+              <a:rPr lang="en-US" altLang="zh-TW" sz="2400" dirty="0">
+                <a:latin typeface="Times New Roman" panose="02020603050405020304" pitchFamily="18" charset="0"/>
+                <a:ea typeface="標楷體" panose="03000509000000000000" pitchFamily="65" charset="-120"/>
+                <a:cs typeface="Times New Roman" panose="02020603050405020304" pitchFamily="18" charset="0"/>
+              </a:rPr>
+              <a:t>Trace-Driven Replay: Read scheduler JSON containing MOVE, ROLE_SET,   SENSOR_TO_UAV, and SLAVE_TO_MASTER events.</a:t>
+            </a:r>
+          </a:p>
+          <a:p>
+            <a:pPr marL="514350" indent="-514350">
+              <a:buFont typeface="+mj-lt"/>
+              <a:buAutoNum type="arabicPeriod"/>
+            </a:pPr>
+            <a:r>
+              <a:rPr lang="en-US" altLang="zh-TW" sz="2400" dirty="0">
+                <a:latin typeface="Times New Roman" panose="02020603050405020304" pitchFamily="18" charset="0"/>
+                <a:ea typeface="標楷體" panose="03000509000000000000" pitchFamily="65" charset="-120"/>
+                <a:cs typeface="Times New Roman" panose="02020603050405020304" pitchFamily="18" charset="0"/>
+              </a:rPr>
+              <a:t>Data Dependency Model: Sensor data must first arrive at the assigned   UAV buffer before the slave UAV can forward it to the CH/master UAV.</a:t>
+            </a:r>
+          </a:p>
+          <a:p>
+            <a:pPr marL="514350" indent="-514350">
+              <a:buFont typeface="+mj-lt"/>
+              <a:buAutoNum type="arabicPeriod"/>
+            </a:pPr>
+            <a:r>
+              <a:rPr lang="en-US" altLang="zh-TW" sz="2400" dirty="0">
+                <a:latin typeface="Times New Roman" panose="02020603050405020304" pitchFamily="18" charset="0"/>
+                <a:ea typeface="標楷體" panose="03000509000000000000" pitchFamily="65" charset="-120"/>
+                <a:cs typeface="Times New Roman" panose="02020603050405020304" pitchFamily="18" charset="0"/>
+              </a:rPr>
+              <a:t>Verification Output: Record task completion time, deadline satisfaction,   total completed tasks, mission finish time, and effective throughput.</a:t>
+            </a:r>
+          </a:p>
+        </p:txBody>
+      </p:sp>
+      <p:graphicFrame>
+        <p:nvGraphicFramePr>
+          <p:cNvPr id="47" name="表格 46">
+            <a:extLst>
+              <a:ext uri="{FF2B5EF4-FFF2-40B4-BE49-F238E27FC236}">
+                <a16:creationId xmlns:a16="http://schemas.microsoft.com/office/drawing/2014/main" id="{8E838DA6-A263-4F95-044E-EC4BAC752EF6}"/>
+              </a:ext>
+            </a:extLst>
+          </p:cNvPr>
+          <p:cNvGraphicFramePr>
+            <a:graphicFrameLocks noGrp="1"/>
+          </p:cNvGraphicFramePr>
+          <p:nvPr>
+            <p:extLst>
+              <p:ext uri="{D42A27DB-BD31-4B8C-83A1-F6EECF244321}">
+                <p14:modId xmlns:p14="http://schemas.microsoft.com/office/powerpoint/2010/main" val="1339698348"/>
+              </p:ext>
+            </p:extLst>
+          </p:nvPr>
+        </p:nvGraphicFramePr>
+        <p:xfrm>
+          <a:off x="3194967" y="17788674"/>
+          <a:ext cx="7912182" cy="914400"/>
+        </p:xfrm>
+        <a:graphic>
+          <a:graphicData uri="http://schemas.openxmlformats.org/drawingml/2006/table">
+            <a:tbl>
+              <a:tblPr firstRow="1" bandRow="1">
+                <a:tableStyleId>{5940675A-B579-460E-94D1-54222C63F5DA}</a:tableStyleId>
+              </a:tblPr>
+              <a:tblGrid>
+                <a:gridCol w="1318697">
+                  <a:extLst>
+                    <a:ext uri="{9D8B030D-6E8A-4147-A177-3AD203B41FA5}">
+                      <a16:colId xmlns:a16="http://schemas.microsoft.com/office/drawing/2014/main" val="2437764609"/>
+                    </a:ext>
+                  </a:extLst>
+                </a:gridCol>
+                <a:gridCol w="1318697">
+                  <a:extLst>
+                    <a:ext uri="{9D8B030D-6E8A-4147-A177-3AD203B41FA5}">
+                      <a16:colId xmlns:a16="http://schemas.microsoft.com/office/drawing/2014/main" val="3891642840"/>
+                    </a:ext>
+                  </a:extLst>
+                </a:gridCol>
+                <a:gridCol w="1318697">
+                  <a:extLst>
+                    <a:ext uri="{9D8B030D-6E8A-4147-A177-3AD203B41FA5}">
+                      <a16:colId xmlns:a16="http://schemas.microsoft.com/office/drawing/2014/main" val="1213435560"/>
+                    </a:ext>
+                  </a:extLst>
+                </a:gridCol>
+                <a:gridCol w="1318697">
+                  <a:extLst>
+                    <a:ext uri="{9D8B030D-6E8A-4147-A177-3AD203B41FA5}">
+                      <a16:colId xmlns:a16="http://schemas.microsoft.com/office/drawing/2014/main" val="3242861009"/>
+                    </a:ext>
+                  </a:extLst>
+                </a:gridCol>
+                <a:gridCol w="1318697">
+                  <a:extLst>
+                    <a:ext uri="{9D8B030D-6E8A-4147-A177-3AD203B41FA5}">
+                      <a16:colId xmlns:a16="http://schemas.microsoft.com/office/drawing/2014/main" val="189405218"/>
+                    </a:ext>
+                  </a:extLst>
+                </a:gridCol>
+                <a:gridCol w="1318697">
+                  <a:extLst>
+                    <a:ext uri="{9D8B030D-6E8A-4147-A177-3AD203B41FA5}">
+                      <a16:colId xmlns:a16="http://schemas.microsoft.com/office/drawing/2014/main" val="728506458"/>
+                    </a:ext>
+                  </a:extLst>
+                </a:gridCol>
+              </a:tblGrid>
+              <a:tr h="191551">
+                <a:tc>
+                  <a:txBody>
+                    <a:bodyPr/>
+                    <a:lstStyle/>
+                    <a:p>
+                      <a:pPr>
+                        <a:buNone/>
+                      </a:pPr>
+                      <a:r>
+                        <a:rPr lang="en-US" sz="1400" dirty="0"/>
+                        <a:t>Scenario</a:t>
+                      </a:r>
+                    </a:p>
+                  </a:txBody>
+                  <a:tcPr anchor="ctr"/>
+                </a:tc>
+                <a:tc>
+                  <a:txBody>
+                    <a:bodyPr/>
+                    <a:lstStyle/>
+                    <a:p>
+                      <a:pPr algn="r">
+                        <a:buNone/>
+                      </a:pPr>
+                      <a:r>
+                        <a:rPr lang="en-US" sz="1400"/>
+                        <a:t>UAVs</a:t>
+                      </a:r>
+                    </a:p>
+                  </a:txBody>
+                  <a:tcPr anchor="ctr"/>
+                </a:tc>
+                <a:tc>
+                  <a:txBody>
+                    <a:bodyPr/>
+                    <a:lstStyle/>
+                    <a:p>
+                      <a:pPr algn="r">
+                        <a:buNone/>
+                      </a:pPr>
+                      <a:r>
+                        <a:rPr lang="en-US" sz="1400"/>
+                        <a:t>Sensors</a:t>
+                      </a:r>
+                    </a:p>
+                  </a:txBody>
+                  <a:tcPr anchor="ctr"/>
+                </a:tc>
+                <a:tc>
+                  <a:txBody>
+                    <a:bodyPr/>
+                    <a:lstStyle/>
+                    <a:p>
+                      <a:pPr algn="r">
+                        <a:buNone/>
+                      </a:pPr>
+                      <a:r>
+                        <a:rPr lang="en-US" sz="1400"/>
+                        <a:t>Transfers</a:t>
+                      </a:r>
+                    </a:p>
+                  </a:txBody>
+                  <a:tcPr anchor="ctr"/>
+                </a:tc>
+                <a:tc>
+                  <a:txBody>
+                    <a:bodyPr/>
+                    <a:lstStyle/>
+                    <a:p>
+                      <a:pPr algn="r">
+                        <a:buNone/>
+                      </a:pPr>
+                      <a:r>
+                        <a:rPr lang="en-US" sz="1400"/>
+                        <a:t>Completed</a:t>
+                      </a:r>
+                    </a:p>
+                  </a:txBody>
+                  <a:tcPr anchor="ctr"/>
+                </a:tc>
+                <a:tc>
+                  <a:txBody>
+                    <a:bodyPr/>
+                    <a:lstStyle/>
+                    <a:p>
+                      <a:pPr algn="r">
+                        <a:buNone/>
+                      </a:pPr>
+                      <a:r>
+                        <a:rPr lang="en-US" sz="1400"/>
+                        <a:t>Deadline Met</a:t>
+                      </a:r>
+                    </a:p>
+                  </a:txBody>
+                  <a:tcPr anchor="ctr"/>
+                </a:tc>
+                <a:extLst>
+                  <a:ext uri="{0D108BD9-81ED-4DB2-BD59-A6C34878D82A}">
+                    <a16:rowId xmlns:a16="http://schemas.microsoft.com/office/drawing/2014/main" val="1678598044"/>
+                  </a:ext>
+                </a:extLst>
+              </a:tr>
+              <a:tr h="191551">
+                <a:tc>
+                  <a:txBody>
+                    <a:bodyPr/>
+                    <a:lstStyle/>
+                    <a:p>
+                      <a:pPr>
+                        <a:buNone/>
+                      </a:pPr>
+                      <a:r>
+                        <a:rPr lang="en-US" sz="1400" dirty="0"/>
+                        <a:t>Simple trace</a:t>
+                      </a:r>
+                    </a:p>
+                  </a:txBody>
+                  <a:tcPr anchor="ctr"/>
+                </a:tc>
+                <a:tc>
+                  <a:txBody>
+                    <a:bodyPr/>
+                    <a:lstStyle/>
+                    <a:p>
+                      <a:pPr algn="r">
+                        <a:buNone/>
+                      </a:pPr>
+                      <a:r>
+                        <a:rPr lang="en-US" altLang="zh-TW" sz="1400" dirty="0"/>
+                        <a:t>3</a:t>
+                      </a:r>
+                    </a:p>
+                  </a:txBody>
+                  <a:tcPr anchor="ctr"/>
+                </a:tc>
+                <a:tc>
+                  <a:txBody>
+                    <a:bodyPr/>
+                    <a:lstStyle/>
+                    <a:p>
+                      <a:pPr algn="r">
+                        <a:buNone/>
+                      </a:pPr>
+                      <a:r>
+                        <a:rPr lang="en-US" altLang="zh-TW" sz="1400"/>
+                        <a:t>50</a:t>
+                      </a:r>
+                    </a:p>
+                  </a:txBody>
+                  <a:tcPr anchor="ctr"/>
+                </a:tc>
+                <a:tc>
+                  <a:txBody>
+                    <a:bodyPr/>
+                    <a:lstStyle/>
+                    <a:p>
+                      <a:pPr algn="r">
+                        <a:buNone/>
+                      </a:pPr>
+                      <a:r>
+                        <a:rPr lang="en-US" altLang="zh-TW" sz="1400"/>
+                        <a:t>79</a:t>
+                      </a:r>
+                    </a:p>
+                  </a:txBody>
+                  <a:tcPr anchor="ctr"/>
+                </a:tc>
+                <a:tc>
+                  <a:txBody>
+                    <a:bodyPr/>
+                    <a:lstStyle/>
+                    <a:p>
+                      <a:pPr algn="r">
+                        <a:buNone/>
+                      </a:pPr>
+                      <a:r>
+                        <a:rPr lang="en-US" altLang="zh-TW" sz="1400"/>
+                        <a:t>79 / 79</a:t>
+                      </a:r>
+                    </a:p>
+                  </a:txBody>
+                  <a:tcPr anchor="ctr"/>
+                </a:tc>
+                <a:tc>
+                  <a:txBody>
+                    <a:bodyPr/>
+                    <a:lstStyle/>
+                    <a:p>
+                      <a:pPr algn="r">
+                        <a:buNone/>
+                      </a:pPr>
+                      <a:r>
+                        <a:rPr lang="en-US" sz="1400"/>
+                        <a:t>Yes</a:t>
+                      </a:r>
+                    </a:p>
+                  </a:txBody>
+                  <a:tcPr anchor="ctr"/>
+                </a:tc>
+                <a:extLst>
+                  <a:ext uri="{0D108BD9-81ED-4DB2-BD59-A6C34878D82A}">
+                    <a16:rowId xmlns:a16="http://schemas.microsoft.com/office/drawing/2014/main" val="1794040455"/>
+                  </a:ext>
+                </a:extLst>
+              </a:tr>
+              <a:tr h="191551">
+                <a:tc>
+                  <a:txBody>
+                    <a:bodyPr/>
+                    <a:lstStyle/>
+                    <a:p>
+                      <a:pPr>
+                        <a:buNone/>
+                      </a:pPr>
+                      <a:r>
+                        <a:rPr lang="en-US" altLang="zh-TW" sz="1400" dirty="0"/>
+                        <a:t>Normal trace</a:t>
+                      </a:r>
+                      <a:endParaRPr lang="en-US" sz="1400" dirty="0"/>
+                    </a:p>
+                  </a:txBody>
+                  <a:tcPr anchor="ctr"/>
+                </a:tc>
+                <a:tc>
+                  <a:txBody>
+                    <a:bodyPr/>
+                    <a:lstStyle/>
+                    <a:p>
+                      <a:pPr algn="r">
+                        <a:buNone/>
+                      </a:pPr>
+                      <a:r>
+                        <a:rPr lang="en-US" altLang="zh-TW" sz="1400" dirty="0"/>
+                        <a:t>5</a:t>
+                      </a:r>
+                    </a:p>
+                  </a:txBody>
+                  <a:tcPr anchor="ctr"/>
+                </a:tc>
+                <a:tc>
+                  <a:txBody>
+                    <a:bodyPr/>
+                    <a:lstStyle/>
+                    <a:p>
+                      <a:pPr algn="r">
+                        <a:buNone/>
+                      </a:pPr>
+                      <a:r>
+                        <a:rPr lang="en-US" altLang="zh-TW" sz="1400" dirty="0"/>
+                        <a:t>500</a:t>
+                      </a:r>
+                    </a:p>
+                  </a:txBody>
+                  <a:tcPr anchor="ctr"/>
+                </a:tc>
+                <a:tc>
+                  <a:txBody>
+                    <a:bodyPr/>
+                    <a:lstStyle/>
+                    <a:p>
+                      <a:pPr algn="r">
+                        <a:buNone/>
+                      </a:pPr>
+                      <a:r>
+                        <a:rPr lang="en-US" altLang="zh-TW" sz="1400" dirty="0"/>
+                        <a:t>212</a:t>
+                      </a:r>
+                    </a:p>
+                  </a:txBody>
+                  <a:tcPr anchor="ctr"/>
+                </a:tc>
+                <a:tc>
+                  <a:txBody>
+                    <a:bodyPr/>
+                    <a:lstStyle/>
+                    <a:p>
+                      <a:pPr algn="r">
+                        <a:buNone/>
+                      </a:pPr>
+                      <a:r>
+                        <a:rPr lang="en-US" altLang="zh-TW" sz="1400" dirty="0"/>
+                        <a:t>212 / 212</a:t>
+                      </a:r>
+                    </a:p>
+                  </a:txBody>
+                  <a:tcPr anchor="ctr"/>
+                </a:tc>
+                <a:tc>
+                  <a:txBody>
+                    <a:bodyPr/>
+                    <a:lstStyle/>
+                    <a:p>
+                      <a:pPr algn="r">
+                        <a:buNone/>
+                      </a:pPr>
+                      <a:r>
+                        <a:rPr lang="en-US" sz="1400" dirty="0"/>
+                        <a:t>Yes</a:t>
+                      </a:r>
+                    </a:p>
+                  </a:txBody>
+                  <a:tcPr anchor="ctr"/>
+                </a:tc>
+                <a:extLst>
+                  <a:ext uri="{0D108BD9-81ED-4DB2-BD59-A6C34878D82A}">
+                    <a16:rowId xmlns:a16="http://schemas.microsoft.com/office/drawing/2014/main" val="4086952168"/>
+                  </a:ext>
+                </a:extLst>
+              </a:tr>
+            </a:tbl>
+          </a:graphicData>
+        </a:graphic>
+      </p:graphicFrame>
+      <p:cxnSp>
+        <p:nvCxnSpPr>
+          <p:cNvPr id="48" name="直線接點 47">
+            <a:extLst>
+              <a:ext uri="{FF2B5EF4-FFF2-40B4-BE49-F238E27FC236}">
+                <a16:creationId xmlns:a16="http://schemas.microsoft.com/office/drawing/2014/main" id="{6BBAA2AB-0126-6FD1-4EE9-34E36A54B458}"/>
+              </a:ext>
+            </a:extLst>
+          </p:cNvPr>
+          <p:cNvCxnSpPr>
+            <a:cxnSpLocks/>
+          </p:cNvCxnSpPr>
+          <p:nvPr/>
+        </p:nvCxnSpPr>
+        <p:spPr>
+          <a:xfrm>
+            <a:off x="13944119" y="15702016"/>
+            <a:ext cx="4354415" cy="0"/>
+          </a:xfrm>
+          <a:prstGeom prst="line">
+            <a:avLst/>
+          </a:prstGeom>
+          <a:ln w="28575">
+            <a:solidFill>
+              <a:srgbClr val="FF0000"/>
+            </a:solidFill>
+          </a:ln>
+        </p:spPr>
+        <p:style>
+          <a:lnRef idx="2">
+            <a:schemeClr val="accent1"/>
+          </a:lnRef>
+          <a:fillRef idx="0">
+            <a:schemeClr val="accent1"/>
+          </a:fillRef>
+          <a:effectRef idx="1">
+            <a:schemeClr val="accent1"/>
+          </a:effectRef>
+          <a:fontRef idx="minor">
+            <a:schemeClr val="tx1"/>
+          </a:fontRef>
+        </p:style>
+      </p:cxnSp>
+      <p:cxnSp>
+        <p:nvCxnSpPr>
+          <p:cNvPr id="49" name="直線接點 48">
+            <a:extLst>
+              <a:ext uri="{FF2B5EF4-FFF2-40B4-BE49-F238E27FC236}">
+                <a16:creationId xmlns:a16="http://schemas.microsoft.com/office/drawing/2014/main" id="{08F6E4D4-DF3C-DBA4-C7ED-1F401F1EE172}"/>
+              </a:ext>
+            </a:extLst>
+          </p:cNvPr>
+          <p:cNvCxnSpPr>
+            <a:cxnSpLocks/>
+          </p:cNvCxnSpPr>
+          <p:nvPr/>
+        </p:nvCxnSpPr>
+        <p:spPr>
+          <a:xfrm flipH="1" flipV="1">
+            <a:off x="18295402" y="15696063"/>
+            <a:ext cx="3132" cy="420237"/>
+          </a:xfrm>
+          <a:prstGeom prst="line">
+            <a:avLst/>
+          </a:prstGeom>
+          <a:ln w="28575">
+            <a:solidFill>
+              <a:srgbClr val="FF0000"/>
+            </a:solidFill>
+          </a:ln>
+        </p:spPr>
+        <p:style>
+          <a:lnRef idx="2">
+            <a:schemeClr val="accent1"/>
+          </a:lnRef>
+          <a:fillRef idx="0">
+            <a:schemeClr val="accent1"/>
+          </a:fillRef>
+          <a:effectRef idx="1">
+            <a:schemeClr val="accent1"/>
+          </a:effectRef>
+          <a:fontRef idx="minor">
+            <a:schemeClr val="tx1"/>
+          </a:fontRef>
+        </p:style>
+      </p:cxnSp>
+      <p:cxnSp>
+        <p:nvCxnSpPr>
+          <p:cNvPr id="53" name="直線單箭頭接點 52">
+            <a:extLst>
+              <a:ext uri="{FF2B5EF4-FFF2-40B4-BE49-F238E27FC236}">
+                <a16:creationId xmlns:a16="http://schemas.microsoft.com/office/drawing/2014/main" id="{784AC50A-921D-8CA5-87CA-8EEF4D88AF7D}"/>
+              </a:ext>
+            </a:extLst>
+          </p:cNvPr>
+          <p:cNvCxnSpPr>
+            <a:cxnSpLocks/>
+          </p:cNvCxnSpPr>
+          <p:nvPr/>
+        </p:nvCxnSpPr>
+        <p:spPr>
+          <a:xfrm>
+            <a:off x="18291951" y="16116300"/>
+            <a:ext cx="268095" cy="0"/>
           </a:xfrm>
           <a:prstGeom prst="straightConnector1">
             <a:avLst/>

--- a/docs/Report.pptx
+++ b/docs/Report.pptx
@@ -243,7 +243,7 @@
           <a:p>
             <a:fld id="{643FB994-8C7A-432F-9145-2B89982E5304}" type="datetimeFigureOut">
               <a:rPr lang="zh-TW" altLang="en-US" smtClean="0"/>
-              <a:t>2026/5/6</a:t>
+              <a:t>2026/5/7</a:t>
             </a:fld>
             <a:endParaRPr lang="zh-TW" altLang="en-US"/>
           </a:p>
@@ -413,7 +413,7 @@
           <a:p>
             <a:fld id="{643FB994-8C7A-432F-9145-2B89982E5304}" type="datetimeFigureOut">
               <a:rPr lang="zh-TW" altLang="en-US" smtClean="0"/>
-              <a:t>2026/5/6</a:t>
+              <a:t>2026/5/7</a:t>
             </a:fld>
             <a:endParaRPr lang="zh-TW" altLang="en-US"/>
           </a:p>
@@ -593,7 +593,7 @@
           <a:p>
             <a:fld id="{643FB994-8C7A-432F-9145-2B89982E5304}" type="datetimeFigureOut">
               <a:rPr lang="zh-TW" altLang="en-US" smtClean="0"/>
-              <a:t>2026/5/6</a:t>
+              <a:t>2026/5/7</a:t>
             </a:fld>
             <a:endParaRPr lang="zh-TW" altLang="en-US"/>
           </a:p>
@@ -763,7 +763,7 @@
           <a:p>
             <a:fld id="{643FB994-8C7A-432F-9145-2B89982E5304}" type="datetimeFigureOut">
               <a:rPr lang="zh-TW" altLang="en-US" smtClean="0"/>
-              <a:t>2026/5/6</a:t>
+              <a:t>2026/5/7</a:t>
             </a:fld>
             <a:endParaRPr lang="zh-TW" altLang="en-US"/>
           </a:p>
@@ -1009,7 +1009,7 @@
           <a:p>
             <a:fld id="{643FB994-8C7A-432F-9145-2B89982E5304}" type="datetimeFigureOut">
               <a:rPr lang="zh-TW" altLang="en-US" smtClean="0"/>
-              <a:t>2026/5/6</a:t>
+              <a:t>2026/5/7</a:t>
             </a:fld>
             <a:endParaRPr lang="zh-TW" altLang="en-US"/>
           </a:p>
@@ -1241,7 +1241,7 @@
           <a:p>
             <a:fld id="{643FB994-8C7A-432F-9145-2B89982E5304}" type="datetimeFigureOut">
               <a:rPr lang="zh-TW" altLang="en-US" smtClean="0"/>
-              <a:t>2026/5/6</a:t>
+              <a:t>2026/5/7</a:t>
             </a:fld>
             <a:endParaRPr lang="zh-TW" altLang="en-US"/>
           </a:p>
@@ -1608,7 +1608,7 @@
           <a:p>
             <a:fld id="{643FB994-8C7A-432F-9145-2B89982E5304}" type="datetimeFigureOut">
               <a:rPr lang="zh-TW" altLang="en-US" smtClean="0"/>
-              <a:t>2026/5/6</a:t>
+              <a:t>2026/5/7</a:t>
             </a:fld>
             <a:endParaRPr lang="zh-TW" altLang="en-US"/>
           </a:p>
@@ -1726,7 +1726,7 @@
           <a:p>
             <a:fld id="{643FB994-8C7A-432F-9145-2B89982E5304}" type="datetimeFigureOut">
               <a:rPr lang="zh-TW" altLang="en-US" smtClean="0"/>
-              <a:t>2026/5/6</a:t>
+              <a:t>2026/5/7</a:t>
             </a:fld>
             <a:endParaRPr lang="zh-TW" altLang="en-US"/>
           </a:p>
@@ -1821,7 +1821,7 @@
           <a:p>
             <a:fld id="{643FB994-8C7A-432F-9145-2B89982E5304}" type="datetimeFigureOut">
               <a:rPr lang="zh-TW" altLang="en-US" smtClean="0"/>
-              <a:t>2026/5/6</a:t>
+              <a:t>2026/5/7</a:t>
             </a:fld>
             <a:endParaRPr lang="zh-TW" altLang="en-US"/>
           </a:p>
@@ -2098,7 +2098,7 @@
           <a:p>
             <a:fld id="{643FB994-8C7A-432F-9145-2B89982E5304}" type="datetimeFigureOut">
               <a:rPr lang="zh-TW" altLang="en-US" smtClean="0"/>
-              <a:t>2026/5/6</a:t>
+              <a:t>2026/5/7</a:t>
             </a:fld>
             <a:endParaRPr lang="zh-TW" altLang="en-US"/>
           </a:p>
@@ -2355,7 +2355,7 @@
           <a:p>
             <a:fld id="{643FB994-8C7A-432F-9145-2B89982E5304}" type="datetimeFigureOut">
               <a:rPr lang="zh-TW" altLang="en-US" smtClean="0"/>
-              <a:t>2026/5/6</a:t>
+              <a:t>2026/5/7</a:t>
             </a:fld>
             <a:endParaRPr lang="zh-TW" altLang="en-US"/>
           </a:p>
@@ -2568,7 +2568,7 @@
           <a:p>
             <a:fld id="{643FB994-8C7A-432F-9145-2B89982E5304}" type="datetimeFigureOut">
               <a:rPr lang="zh-TW" altLang="en-US" smtClean="0"/>
-              <a:t>2026/5/6</a:t>
+              <a:t>2026/5/7</a:t>
             </a:fld>
             <a:endParaRPr lang="zh-TW" altLang="en-US"/>
           </a:p>
@@ -2987,10 +2987,10 @@
         </p:nvGrpSpPr>
         <p:grpSpPr>
           <a:xfrm>
-            <a:off x="10937797" y="12065713"/>
-            <a:ext cx="1813156" cy="1486293"/>
-            <a:chOff x="11452052" y="9350311"/>
-            <a:chExt cx="2602438" cy="2066339"/>
+            <a:off x="10740633" y="12024142"/>
+            <a:ext cx="2062650" cy="1527861"/>
+            <a:chOff x="11169062" y="9292519"/>
+            <a:chExt cx="2960539" cy="2124130"/>
           </a:xfrm>
         </p:grpSpPr>
         <p:grpSp>
@@ -3007,10 +3007,10 @@
           </p:nvGrpSpPr>
           <p:grpSpPr>
             <a:xfrm>
-              <a:off x="11452052" y="9350311"/>
-              <a:ext cx="2369088" cy="2066339"/>
-              <a:chOff x="13531736" y="8046847"/>
-              <a:chExt cx="2369088" cy="1661086"/>
+              <a:off x="11452052" y="9292519"/>
+              <a:ext cx="2369088" cy="2124130"/>
+              <a:chOff x="13531736" y="8000390"/>
+              <a:chExt cx="2369088" cy="1707543"/>
             </a:xfrm>
           </p:grpSpPr>
           <p:pic>
@@ -3036,7 +3036,7 @@
             </p:blipFill>
             <p:spPr>
               <a:xfrm>
-                <a:off x="14173254" y="8046847"/>
+                <a:off x="14158066" y="8000390"/>
                 <a:ext cx="1110501" cy="577138"/>
               </a:xfrm>
               <a:prstGeom prst="rect">
@@ -3719,8 +3719,8 @@
           </p:nvSpPr>
           <p:spPr>
             <a:xfrm>
-              <a:off x="11650996" y="10068253"/>
-              <a:ext cx="2403494" cy="599046"/>
+              <a:off x="11169062" y="10109367"/>
+              <a:ext cx="2960539" cy="599046"/>
             </a:xfrm>
             <a:prstGeom prst="rect">
               <a:avLst/>
@@ -3739,7 +3739,7 @@
                   <a:ea typeface="標楷體" panose="03000509000000000000" pitchFamily="65" charset="-120"/>
                   <a:cs typeface="Times New Roman" panose="02020603050405020304" pitchFamily="18" charset="0"/>
                 </a:rPr>
-                <a:t>Probe flow</a:t>
+                <a:t>Probing Packets</a:t>
               </a:r>
               <a:endParaRPr lang="zh-TW" altLang="en-US" sz="2200" dirty="0"/>
             </a:p>
@@ -3774,8 +3774,8 @@
         </p:blipFill>
         <p:spPr>
           <a:xfrm>
-            <a:off x="14453594" y="13555042"/>
-            <a:ext cx="6423064" cy="4282042"/>
+            <a:off x="14177738" y="13356327"/>
+            <a:ext cx="6742464" cy="4494975"/>
           </a:xfrm>
           <a:prstGeom prst="rect">
             <a:avLst/>
@@ -4542,8 +4542,8 @@
         </p:nvGrpSpPr>
         <p:grpSpPr>
           <a:xfrm>
-            <a:off x="14461155" y="8972873"/>
-            <a:ext cx="6415563" cy="14953184"/>
+            <a:off x="14213307" y="8972873"/>
+            <a:ext cx="6663412" cy="14953184"/>
             <a:chOff x="928686" y="9588372"/>
             <a:chExt cx="6980591" cy="4434809"/>
           </a:xfrm>
@@ -4681,7 +4681,7 @@
         <p:spPr>
           <a:xfrm>
             <a:off x="928683" y="24173877"/>
-            <a:ext cx="19916775" cy="2185214"/>
+            <a:ext cx="19916775" cy="5139869"/>
           </a:xfrm>
           <a:prstGeom prst="rect">
             <a:avLst/>
@@ -4713,7 +4713,7 @@
                 <a:ea typeface="標楷體" panose="03000509000000000000" pitchFamily="65" charset="-120"/>
                 <a:cs typeface="Times New Roman" panose="02020603050405020304" pitchFamily="18" charset="0"/>
               </a:rPr>
-              <a:t> • External schedulers may generate communication schedules, but their feasibility must be verified.</a:t>
+              <a:t> • We built an NS-3-based framework to support link probing, schedule replay, and UAV-to-LEO uplink evaluation in UAV-assisted SAGIN scenarios.</a:t>
             </a:r>
           </a:p>
           <a:p>
@@ -4723,7 +4723,7 @@
                 <a:ea typeface="標楷體" panose="03000509000000000000" pitchFamily="65" charset="-120"/>
                 <a:cs typeface="Times New Roman" panose="02020603050405020304" pitchFamily="18" charset="0"/>
               </a:rPr>
-              <a:t> • We need a framework that can replay task schedules in NS-3 and evaluate communication performance.</a:t>
+              <a:t> • This work does not directly solve the scheduling problem, but provides a simulation and measurement foundation for evaluating scheduler decisions.</a:t>
             </a:r>
           </a:p>
           <a:p>
@@ -4733,7 +4733,27 @@
                 <a:ea typeface="標楷體" panose="03000509000000000000" pitchFamily="65" charset="-120"/>
                 <a:cs typeface="Times New Roman" panose="02020603050405020304" pitchFamily="18" charset="0"/>
               </a:rPr>
-              <a:t> • We also need to estimate or measure link quality for UAV-to-UAV and UAV-to-LEO communication.</a:t>
+              <a:t> • The UAV-to-UAV probing module provides scheduler-ready link information, including SNR, estimated rate, delivery ratio, and measured throughput.</a:t>
+            </a:r>
+          </a:p>
+          <a:p>
+            <a:r>
+              <a:rPr lang="en-US" altLang="zh-TW" sz="3200" dirty="0">
+                <a:latin typeface="Times New Roman" panose="02020603050405020304" pitchFamily="18" charset="0"/>
+                <a:ea typeface="標楷體" panose="03000509000000000000" pitchFamily="65" charset="-120"/>
+                <a:cs typeface="Times New Roman" panose="02020603050405020304" pitchFamily="18" charset="0"/>
+              </a:rPr>
+              <a:t> • The schedule replay engine verifies generated task plans using task completion, finish time, and deadline satisfaction.</a:t>
+            </a:r>
+          </a:p>
+          <a:p>
+            <a:r>
+              <a:rPr lang="en-US" altLang="zh-TW" sz="3200" dirty="0">
+                <a:latin typeface="Times New Roman" panose="02020603050405020304" pitchFamily="18" charset="0"/>
+                <a:ea typeface="標楷體" panose="03000509000000000000" pitchFamily="65" charset="-120"/>
+                <a:cs typeface="Times New Roman" panose="02020603050405020304" pitchFamily="18" charset="0"/>
+              </a:rPr>
+              <a:t> • Future work: integrate scheduler decisions with UAV-to-UAV and UAV-to-LEO simulations for complete end-to-end mission validation.</a:t>
             </a:r>
             <a:endParaRPr lang="zh-TW" altLang="en-US" sz="3200" dirty="0">
               <a:latin typeface="Times New Roman" panose="02020603050405020304" pitchFamily="18" charset="0"/>
@@ -9571,7 +9591,7 @@
         </p:nvSpPr>
         <p:spPr>
           <a:xfrm>
-            <a:off x="14631134" y="18132484"/>
+            <a:off x="14492416" y="18149605"/>
             <a:ext cx="6208932" cy="5262979"/>
           </a:xfrm>
           <a:prstGeom prst="rect">
@@ -9654,9 +9674,9 @@
           <p:nvPr/>
         </p:nvCxnSpPr>
         <p:spPr>
-          <a:xfrm flipV="1">
-            <a:off x="13941479" y="21511534"/>
-            <a:ext cx="313691" cy="4"/>
+          <a:xfrm>
+            <a:off x="13941479" y="21511538"/>
+            <a:ext cx="153503" cy="0"/>
           </a:xfrm>
           <a:prstGeom prst="line">
             <a:avLst/>
@@ -9691,13 +9711,15 @@
               </a:ext>
             </a:extLst>
           </p:cNvPr>
-          <p:cNvCxnSpPr/>
+          <p:cNvCxnSpPr>
+            <a:cxnSpLocks/>
+          </p:cNvCxnSpPr>
           <p:nvPr/>
         </p:nvCxnSpPr>
         <p:spPr>
-          <a:xfrm flipV="1">
-            <a:off x="14240256" y="17337024"/>
-            <a:ext cx="0" cy="4174513"/>
+          <a:xfrm flipH="1" flipV="1">
+            <a:off x="14089856" y="17249775"/>
+            <a:ext cx="5126" cy="4261762"/>
           </a:xfrm>
           <a:prstGeom prst="line">
             <a:avLst/>
@@ -9732,13 +9754,15 @@
               </a:ext>
             </a:extLst>
           </p:cNvPr>
-          <p:cNvCxnSpPr/>
+          <p:cNvCxnSpPr>
+            <a:cxnSpLocks/>
+          </p:cNvCxnSpPr>
           <p:nvPr/>
         </p:nvCxnSpPr>
         <p:spPr>
           <a:xfrm>
-            <a:off x="14225696" y="17337024"/>
-            <a:ext cx="2406396" cy="0"/>
+            <a:off x="14077950" y="17249775"/>
+            <a:ext cx="2346201" cy="0"/>
           </a:xfrm>
           <a:prstGeom prst="straightConnector1">
             <a:avLst/>
@@ -9781,9 +9805,9 @@
           <p:nvPr/>
         </p:nvCxnSpPr>
         <p:spPr>
-          <a:xfrm>
-            <a:off x="13931846" y="11387392"/>
-            <a:ext cx="308410" cy="0"/>
+          <a:xfrm flipV="1">
+            <a:off x="13931846" y="11387391"/>
+            <a:ext cx="146104" cy="1"/>
           </a:xfrm>
           <a:prstGeom prst="line">
             <a:avLst/>
@@ -9825,8 +9849,8 @@
         </p:nvCxnSpPr>
         <p:spPr>
           <a:xfrm flipV="1">
-            <a:off x="14218671" y="11387391"/>
-            <a:ext cx="2438" cy="3801688"/>
+            <a:off x="14089856" y="11366375"/>
+            <a:ext cx="5126" cy="3713683"/>
           </a:xfrm>
           <a:prstGeom prst="line">
             <a:avLst/>
@@ -9868,8 +9892,8 @@
         </p:nvCxnSpPr>
         <p:spPr>
           <a:xfrm>
-            <a:off x="14225696" y="15189079"/>
-            <a:ext cx="405438" cy="6075"/>
+            <a:off x="14077950" y="15080058"/>
+            <a:ext cx="266700" cy="0"/>
           </a:xfrm>
           <a:prstGeom prst="straightConnector1">
             <a:avLst/>
@@ -10940,7 +10964,7 @@
         <p:spPr>
           <a:xfrm>
             <a:off x="13944119" y="15702016"/>
-            <a:ext cx="4354415" cy="0"/>
+            <a:ext cx="4321994" cy="0"/>
           </a:xfrm>
           <a:prstGeom prst="line">
             <a:avLst/>
@@ -10981,9 +11005,9 @@
           <p:nvPr/>
         </p:nvCxnSpPr>
         <p:spPr>
-          <a:xfrm flipH="1" flipV="1">
-            <a:off x="18295402" y="15696063"/>
-            <a:ext cx="3132" cy="420237"/>
+          <a:xfrm flipV="1">
+            <a:off x="18261407" y="15702016"/>
+            <a:ext cx="0" cy="333440"/>
           </a:xfrm>
           <a:prstGeom prst="line">
             <a:avLst/>
@@ -11025,8 +11049,8 @@
         </p:nvCxnSpPr>
         <p:spPr>
           <a:xfrm>
-            <a:off x="18291951" y="16116300"/>
-            <a:ext cx="268095" cy="0"/>
+            <a:off x="18245950" y="16035456"/>
+            <a:ext cx="301426" cy="0"/>
           </a:xfrm>
           <a:prstGeom prst="straightConnector1">
             <a:avLst/>
